--- a/presentations/IETF125/slides-125-netmod-configuration-template-v1.pptx
+++ b/presentations/IETF125/slides-125-netmod-configuration-template-v1.pptx
@@ -12,9 +12,9 @@
     <p:sldId id="304" r:id="rId3"/>
     <p:sldId id="312" r:id="rId4"/>
     <p:sldId id="305" r:id="rId5"/>
-    <p:sldId id="307" r:id="rId6"/>
-    <p:sldId id="308" r:id="rId7"/>
-    <p:sldId id="309" r:id="rId8"/>
+    <p:sldId id="313" r:id="rId6"/>
+    <p:sldId id="307" r:id="rId7"/>
+    <p:sldId id="308" r:id="rId8"/>
     <p:sldId id="310" r:id="rId9"/>
     <p:sldId id="276" r:id="rId10"/>
   </p:sldIdLst>
@@ -217,7 +217,7 @@
           <a:p>
             <a:fld id="{89A37958-EF2B-4A94-85A4-43EA6C792211}" type="datetimeFigureOut">
               <a:rPr lang="zh-CN" altLang="en-US" smtClean="0"/>
-              <a:t>2026/3/9</a:t>
+              <a:t>2026/3/12</a:t>
             </a:fld>
             <a:endParaRPr lang="zh-CN" altLang="en-US"/>
           </a:p>
@@ -784,7 +784,7 @@
           <a:p>
             <a:fld id="{DD283332-0ADC-44CE-A8C7-BB44D9873E20}" type="datetimeFigureOut">
               <a:rPr lang="zh-CN" altLang="en-US" smtClean="0"/>
-              <a:t>2026/3/9</a:t>
+              <a:t>2026/3/12</a:t>
             </a:fld>
             <a:endParaRPr lang="zh-CN" altLang="en-US"/>
           </a:p>
@@ -952,7 +952,7 @@
           <a:p>
             <a:fld id="{DD283332-0ADC-44CE-A8C7-BB44D9873E20}" type="datetimeFigureOut">
               <a:rPr lang="zh-CN" altLang="en-US" smtClean="0"/>
-              <a:t>2026/3/9</a:t>
+              <a:t>2026/3/12</a:t>
             </a:fld>
             <a:endParaRPr lang="zh-CN" altLang="en-US"/>
           </a:p>
@@ -1130,7 +1130,7 @@
           <a:p>
             <a:fld id="{DD283332-0ADC-44CE-A8C7-BB44D9873E20}" type="datetimeFigureOut">
               <a:rPr lang="zh-CN" altLang="en-US" smtClean="0"/>
-              <a:t>2026/3/9</a:t>
+              <a:t>2026/3/12</a:t>
             </a:fld>
             <a:endParaRPr lang="zh-CN" altLang="en-US"/>
           </a:p>
@@ -1298,7 +1298,7 @@
           <a:p>
             <a:fld id="{DD283332-0ADC-44CE-A8C7-BB44D9873E20}" type="datetimeFigureOut">
               <a:rPr lang="zh-CN" altLang="en-US" smtClean="0"/>
-              <a:t>2026/3/9</a:t>
+              <a:t>2026/3/12</a:t>
             </a:fld>
             <a:endParaRPr lang="zh-CN" altLang="en-US"/>
           </a:p>
@@ -1543,7 +1543,7 @@
           <a:p>
             <a:fld id="{DD283332-0ADC-44CE-A8C7-BB44D9873E20}" type="datetimeFigureOut">
               <a:rPr lang="zh-CN" altLang="en-US" smtClean="0"/>
-              <a:t>2026/3/9</a:t>
+              <a:t>2026/3/12</a:t>
             </a:fld>
             <a:endParaRPr lang="zh-CN" altLang="en-US"/>
           </a:p>
@@ -1772,7 +1772,7 @@
           <a:p>
             <a:fld id="{DD283332-0ADC-44CE-A8C7-BB44D9873E20}" type="datetimeFigureOut">
               <a:rPr lang="zh-CN" altLang="en-US" smtClean="0"/>
-              <a:t>2026/3/9</a:t>
+              <a:t>2026/3/12</a:t>
             </a:fld>
             <a:endParaRPr lang="zh-CN" altLang="en-US"/>
           </a:p>
@@ -2136,7 +2136,7 @@
           <a:p>
             <a:fld id="{DD283332-0ADC-44CE-A8C7-BB44D9873E20}" type="datetimeFigureOut">
               <a:rPr lang="zh-CN" altLang="en-US" smtClean="0"/>
-              <a:t>2026/3/9</a:t>
+              <a:t>2026/3/12</a:t>
             </a:fld>
             <a:endParaRPr lang="zh-CN" altLang="en-US"/>
           </a:p>
@@ -2253,7 +2253,7 @@
           <a:p>
             <a:fld id="{DD283332-0ADC-44CE-A8C7-BB44D9873E20}" type="datetimeFigureOut">
               <a:rPr lang="zh-CN" altLang="en-US" smtClean="0"/>
-              <a:t>2026/3/9</a:t>
+              <a:t>2026/3/12</a:t>
             </a:fld>
             <a:endParaRPr lang="zh-CN" altLang="en-US"/>
           </a:p>
@@ -2348,7 +2348,7 @@
           <a:p>
             <a:fld id="{DD283332-0ADC-44CE-A8C7-BB44D9873E20}" type="datetimeFigureOut">
               <a:rPr lang="zh-CN" altLang="en-US" smtClean="0"/>
-              <a:t>2026/3/9</a:t>
+              <a:t>2026/3/12</a:t>
             </a:fld>
             <a:endParaRPr lang="zh-CN" altLang="en-US"/>
           </a:p>
@@ -2623,7 +2623,7 @@
           <a:p>
             <a:fld id="{DD283332-0ADC-44CE-A8C7-BB44D9873E20}" type="datetimeFigureOut">
               <a:rPr lang="zh-CN" altLang="en-US" smtClean="0"/>
-              <a:t>2026/3/9</a:t>
+              <a:t>2026/3/12</a:t>
             </a:fld>
             <a:endParaRPr lang="zh-CN" altLang="en-US"/>
           </a:p>
@@ -2875,7 +2875,7 @@
           <a:p>
             <a:fld id="{DD283332-0ADC-44CE-A8C7-BB44D9873E20}" type="datetimeFigureOut">
               <a:rPr lang="zh-CN" altLang="en-US" smtClean="0"/>
-              <a:t>2026/3/9</a:t>
+              <a:t>2026/3/12</a:t>
             </a:fld>
             <a:endParaRPr lang="zh-CN" altLang="en-US"/>
           </a:p>
@@ -3086,7 +3086,7 @@
           <a:p>
             <a:fld id="{DD283332-0ADC-44CE-A8C7-BB44D9873E20}" type="datetimeFigureOut">
               <a:rPr lang="zh-CN" altLang="en-US" smtClean="0"/>
-              <a:t>2026/3/9</a:t>
+              <a:t>2026/3/12</a:t>
             </a:fld>
             <a:endParaRPr lang="zh-CN" altLang="en-US"/>
           </a:p>
@@ -3617,15 +3617,7 @@
             </a:pPr>
             <a:r>
               <a:rPr lang="en-US" sz="2000" dirty="0" smtClean="0"/>
-              <a:t>Qiufang </a:t>
-            </a:r>
-            <a:r>
-              <a:rPr lang="en-US" sz="2000" dirty="0" smtClean="0"/>
-              <a:t>Ma (Huawei</a:t>
-            </a:r>
-            <a:r>
-              <a:rPr lang="en-US" sz="2000" dirty="0" smtClean="0"/>
-              <a:t>) </a:t>
+              <a:t>Qiufang Ma (Huawei) </a:t>
             </a:r>
             <a:endParaRPr lang="en-US" sz="2000" b="1" dirty="0" smtClean="0"/>
           </a:p>
@@ -3923,7 +3915,6 @@
               <a:rPr lang="en-US" dirty="0" smtClean="0"/>
               <a:t> by explicitly provided regular config</a:t>
             </a:r>
-            <a:endParaRPr lang="en-US" dirty="0" smtClean="0"/>
           </a:p>
           <a:p>
             <a:endParaRPr lang="en-US" dirty="0"/>
@@ -3958,7 +3949,7 @@
         <p:cNvPr id="1" name="">
           <a:extLst>
             <a:ext uri="{FF2B5EF4-FFF2-40B4-BE49-F238E27FC236}">
-              <a16:creationId xmlns:a16="http://schemas.microsoft.com/office/drawing/2014/main" xmlns="" id="{222C2FE9-3638-09C5-9816-DD1F4C1B9D4D}"/>
+              <a16:creationId xmlns="" xmlns:a16="http://schemas.microsoft.com/office/drawing/2014/main" id="{222C2FE9-3638-09C5-9816-DD1F4C1B9D4D}"/>
             </a:ext>
           </a:extLst>
         </p:cNvPr>
@@ -3978,7 +3969,7 @@
           <p:cNvPr id="2" name="Title 1">
             <a:extLst>
               <a:ext uri="{FF2B5EF4-FFF2-40B4-BE49-F238E27FC236}">
-                <a16:creationId xmlns:a16="http://schemas.microsoft.com/office/drawing/2014/main" xmlns="" id="{2EBF1D3F-D4B1-154A-2F6C-48C9D644314E}"/>
+                <a16:creationId xmlns="" xmlns:a16="http://schemas.microsoft.com/office/drawing/2014/main" id="{2EBF1D3F-D4B1-154A-2F6C-48C9D644314E}"/>
               </a:ext>
             </a:extLst>
           </p:cNvPr>
@@ -4012,7 +4003,7 @@
           <p:cNvPr id="3" name="Content Placeholder 2">
             <a:extLst>
               <a:ext uri="{FF2B5EF4-FFF2-40B4-BE49-F238E27FC236}">
-                <a16:creationId xmlns:a16="http://schemas.microsoft.com/office/drawing/2014/main" xmlns="" id="{4A1258EC-E496-66DC-75C5-308B75C76E9E}"/>
+                <a16:creationId xmlns="" xmlns:a16="http://schemas.microsoft.com/office/drawing/2014/main" id="{4A1258EC-E496-66DC-75C5-308B75C76E9E}"/>
               </a:ext>
             </a:extLst>
           </p:cNvPr>
@@ -4065,11 +4056,7 @@
             </a:pPr>
             <a:r>
               <a:rPr lang="en-US" b="1" dirty="0" smtClean="0"/>
-              <a:t>Top</a:t>
-            </a:r>
-            <a:r>
-              <a:rPr lang="en-US" b="1" dirty="0" smtClean="0"/>
-              <a:t>-priority open issues:</a:t>
+              <a:t>Top-priority open issues:</a:t>
             </a:r>
             <a:endParaRPr lang="en-US" b="1" dirty="0"/>
           </a:p>
@@ -4082,7 +4069,6 @@
               <a:rPr lang="en-US" dirty="0" smtClean="0"/>
               <a:t>?</a:t>
             </a:r>
-            <a:endParaRPr lang="en-US" dirty="0" smtClean="0"/>
           </a:p>
           <a:p>
             <a:r>
@@ -4106,7 +4092,7 @@
           <p:cNvPr id="5" name="Slide Number Placeholder 4">
             <a:extLst>
               <a:ext uri="{FF2B5EF4-FFF2-40B4-BE49-F238E27FC236}">
-                <a16:creationId xmlns:a16="http://schemas.microsoft.com/office/drawing/2014/main" xmlns="" id="{3EE13A6B-CD5C-2B6B-7266-342C4EAFD494}"/>
+                <a16:creationId xmlns="" xmlns:a16="http://schemas.microsoft.com/office/drawing/2014/main" id="{3EE13A6B-CD5C-2B6B-7266-342C4EAFD494}"/>
               </a:ext>
             </a:extLst>
           </p:cNvPr>
@@ -4223,11 +4209,7 @@
             <a:pPr algn="ctr"/>
             <a:r>
               <a:rPr lang="en-US" altLang="zh-CN" sz="3600" b="1" dirty="0" smtClean="0"/>
-              <a:t>Requirement </a:t>
-            </a:r>
-            <a:r>
-              <a:rPr lang="en-US" altLang="zh-CN" sz="3600" b="1" dirty="0" smtClean="0"/>
-              <a:t>Implementation Status</a:t>
+              <a:t>Requirement Implementation Status</a:t>
             </a:r>
             <a:endParaRPr lang="en-US" sz="3600" b="1" dirty="0"/>
           </a:p>
@@ -4273,25 +4255,26 @@
           <p:nvPr>
             <p:extLst>
               <p:ext uri="{D42A27DB-BD31-4B8C-83A1-F6EECF244321}">
-                <p14:modId xmlns:p14="http://schemas.microsoft.com/office/powerpoint/2010/main" val="153776893"/>
+                <p14:modId xmlns:p14="http://schemas.microsoft.com/office/powerpoint/2010/main" val="1078018167"/>
               </p:ext>
             </p:extLst>
           </p:nvPr>
         </p:nvGraphicFramePr>
         <p:xfrm>
-          <a:off x="66501" y="794499"/>
-          <a:ext cx="6093230" cy="5406996"/>
+          <a:off x="538940" y="782666"/>
+          <a:ext cx="10600115" cy="5368792"/>
         </p:xfrm>
         <a:graphic>
           <a:graphicData uri="http://schemas.openxmlformats.org/drawingml/2006/table">
             <a:tbl>
               <a:tblPr/>
               <a:tblGrid>
-                <a:gridCol w="3084022"/>
-                <a:gridCol w="615142"/>
-                <a:gridCol w="2394066"/>
+                <a:gridCol w="3851755"/>
+                <a:gridCol w="768276"/>
+                <a:gridCol w="2990042"/>
+                <a:gridCol w="2990042"/>
               </a:tblGrid>
-              <a:tr h="322387">
+              <a:tr h="322927">
                 <a:tc>
                   <a:txBody>
                     <a:bodyPr/>
@@ -4299,7 +4282,7 @@
                     <a:p>
                       <a:pPr algn="l"/>
                       <a:r>
-                        <a:rPr lang="en-US" sz="1200" b="1" dirty="0">
+                        <a:rPr lang="en-US" sz="1400" b="1" dirty="0">
                           <a:effectLst/>
                         </a:rPr>
                         <a:t>Requirement</a:t>
@@ -4344,7 +4327,9 @@
                       <a:tailEnd type="none" w="med" len="med"/>
                     </a:lnB>
                     <a:solidFill>
-                      <a:srgbClr val="FFFFFF"/>
+                      <a:schemeClr val="bg1">
+                        <a:alpha val="17000"/>
+                      </a:schemeClr>
                     </a:solidFill>
                   </a:tcPr>
                 </a:tc>
@@ -4355,7 +4340,7 @@
                     <a:p>
                       <a:pPr algn="l"/>
                       <a:r>
-                        <a:rPr lang="en-US" sz="1200" b="1" dirty="0">
+                        <a:rPr lang="en-US" sz="1400" b="1" dirty="0">
                           <a:effectLst/>
                         </a:rPr>
                         <a:t>Fulfilled</a:t>
@@ -4400,7 +4385,9 @@
                       <a:tailEnd type="none" w="med" len="med"/>
                     </a:lnB>
                     <a:solidFill>
-                      <a:srgbClr val="FFFFFF"/>
+                      <a:schemeClr val="bg1">
+                        <a:alpha val="17000"/>
+                      </a:schemeClr>
                     </a:solidFill>
                   </a:tcPr>
                 </a:tc>
@@ -4411,12 +4398,18 @@
                     <a:p>
                       <a:pPr algn="l"/>
                       <a:r>
-                        <a:rPr lang="en-US" sz="1200" b="1" dirty="0" smtClean="0">
+                        <a:rPr lang="en-US" sz="1400" b="1" dirty="0" smtClean="0">
                           <a:effectLst/>
                         </a:rPr>
-                        <a:t>Description</a:t>
+                        <a:t>Comments</a:t>
                       </a:r>
-                      <a:endParaRPr lang="en-US" sz="1200" b="1" dirty="0">
+                      <a:r>
+                        <a:rPr lang="en-US" sz="1400" b="1" baseline="0" dirty="0" smtClean="0">
+                          <a:effectLst/>
+                        </a:rPr>
+                        <a:t> from authors</a:t>
+                      </a:r>
+                      <a:endParaRPr lang="en-US" sz="1400" b="1" dirty="0">
                         <a:effectLst/>
                       </a:endParaRPr>
                     </a:p>
@@ -4459,12 +4452,87 @@
                       <a:tailEnd type="none" w="med" len="med"/>
                     </a:lnB>
                     <a:solidFill>
-                      <a:srgbClr val="FFFFFF"/>
+                      <a:schemeClr val="bg1">
+                        <a:alpha val="17000"/>
+                      </a:schemeClr>
+                    </a:solidFill>
+                  </a:tcPr>
+                </a:tc>
+                <a:tc>
+                  <a:txBody>
+                    <a:bodyPr/>
+                    <a:lstStyle/>
+                    <a:p>
+                      <a:pPr algn="l"/>
+                      <a:r>
+                        <a:rPr lang="en-US" sz="1400" b="1" dirty="0" smtClean="0">
+                          <a:effectLst/>
+                        </a:rPr>
+                        <a:t>Template-</a:t>
+                      </a:r>
+                      <a:r>
+                        <a:rPr lang="en-US" sz="1400" b="1" dirty="0" err="1" smtClean="0">
+                          <a:effectLst/>
+                        </a:rPr>
+                        <a:t>reqs</a:t>
+                      </a:r>
+                      <a:r>
+                        <a:rPr lang="en-US" sz="1400" b="1" dirty="0" smtClean="0">
+                          <a:effectLst/>
+                        </a:rPr>
+                        <a:t> Repo issue</a:t>
+                      </a:r>
+                      <a:endParaRPr lang="en-US" sz="1400" b="1" dirty="0">
+                        <a:effectLst/>
+                      </a:endParaRPr>
+                    </a:p>
+                  </a:txBody>
+                  <a:tcPr marL="30218" marR="30218" marT="15109" marB="15109" anchor="ctr">
+                    <a:lnL w="9525" cap="flat" cmpd="sng" algn="ctr">
+                      <a:solidFill>
+                        <a:srgbClr val="DEE2E6"/>
+                      </a:solidFill>
+                      <a:prstDash val="solid"/>
+                      <a:round/>
+                      <a:headEnd type="none" w="med" len="med"/>
+                      <a:tailEnd type="none" w="med" len="med"/>
+                    </a:lnL>
+                    <a:lnR w="9525" cap="flat" cmpd="sng" algn="ctr">
+                      <a:solidFill>
+                        <a:srgbClr val="DEE2E6"/>
+                      </a:solidFill>
+                      <a:prstDash val="solid"/>
+                      <a:round/>
+                      <a:headEnd type="none" w="med" len="med"/>
+                      <a:tailEnd type="none" w="med" len="med"/>
+                    </a:lnR>
+                    <a:lnT w="9525" cap="flat" cmpd="sng" algn="ctr">
+                      <a:solidFill>
+                        <a:srgbClr val="DEE2E6"/>
+                      </a:solidFill>
+                      <a:prstDash val="solid"/>
+                      <a:round/>
+                      <a:headEnd type="none" w="med" len="med"/>
+                      <a:tailEnd type="none" w="med" len="med"/>
+                    </a:lnT>
+                    <a:lnB w="9525" cap="flat" cmpd="sng" algn="ctr">
+                      <a:solidFill>
+                        <a:srgbClr val="DEE2E6"/>
+                      </a:solidFill>
+                      <a:prstDash val="solid"/>
+                      <a:round/>
+                      <a:headEnd type="none" w="med" len="med"/>
+                      <a:tailEnd type="none" w="med" len="med"/>
+                    </a:lnB>
+                    <a:solidFill>
+                      <a:schemeClr val="bg1">
+                        <a:alpha val="17000"/>
+                      </a:schemeClr>
                     </a:solidFill>
                   </a:tcPr>
                 </a:tc>
               </a:tr>
-              <a:tr h="580741">
+              <a:tr h="576316">
                 <a:tc>
                   <a:txBody>
                     <a:bodyPr/>
@@ -4517,7 +4585,9 @@
                       <a:tailEnd type="none" w="med" len="med"/>
                     </a:lnB>
                     <a:solidFill>
-                      <a:srgbClr val="FFFFFF"/>
+                      <a:schemeClr val="bg1">
+                        <a:alpha val="17000"/>
+                      </a:schemeClr>
                     </a:solidFill>
                   </a:tcPr>
                 </a:tc>
@@ -4573,7 +4643,9 @@
                       <a:tailEnd type="none" w="med" len="med"/>
                     </a:lnB>
                     <a:solidFill>
-                      <a:srgbClr val="FFFFFF"/>
+                      <a:schemeClr val="bg1">
+                        <a:alpha val="17000"/>
+                      </a:schemeClr>
                     </a:solidFill>
                   </a:tcPr>
                 </a:tc>
@@ -4642,12 +4714,80 @@
                       <a:tailEnd type="none" w="med" len="med"/>
                     </a:lnB>
                     <a:solidFill>
-                      <a:srgbClr val="FFFFFF"/>
+                      <a:schemeClr val="bg1">
+                        <a:alpha val="17000"/>
+                      </a:schemeClr>
+                    </a:solidFill>
+                  </a:tcPr>
+                </a:tc>
+                <a:tc>
+                  <a:txBody>
+                    <a:bodyPr/>
+                    <a:lstStyle/>
+                    <a:p>
+                      <a:pPr algn="l"/>
+                      <a:r>
+                        <a:rPr lang="en-US" sz="1200" b="0" i="0" u="sng" dirty="0" smtClean="0">
+                          <a:solidFill>
+                            <a:srgbClr val="0D6EFD"/>
+                          </a:solidFill>
+                          <a:effectLst/>
+                          <a:latin typeface="Inter"/>
+                          <a:hlinkClick r:id="rId3"/>
+                        </a:rPr>
+                        <a:t>Requirement #1</a:t>
+                      </a:r>
+                      <a:endParaRPr lang="en-US" sz="1200" dirty="0">
+                        <a:effectLst/>
+                      </a:endParaRPr>
+                    </a:p>
+                  </a:txBody>
+                  <a:tcPr marL="30218" marR="30218" marT="15109" marB="15109" anchor="ctr">
+                    <a:lnL w="9525" cap="flat" cmpd="sng" algn="ctr">
+                      <a:solidFill>
+                        <a:srgbClr val="DEE2E6"/>
+                      </a:solidFill>
+                      <a:prstDash val="solid"/>
+                      <a:round/>
+                      <a:headEnd type="none" w="med" len="med"/>
+                      <a:tailEnd type="none" w="med" len="med"/>
+                    </a:lnL>
+                    <a:lnR w="9525" cap="flat" cmpd="sng" algn="ctr">
+                      <a:solidFill>
+                        <a:srgbClr val="DEE2E6"/>
+                      </a:solidFill>
+                      <a:prstDash val="solid"/>
+                      <a:round/>
+                      <a:headEnd type="none" w="med" len="med"/>
+                      <a:tailEnd type="none" w="med" len="med"/>
+                    </a:lnR>
+                    <a:lnT w="9525" cap="flat" cmpd="sng" algn="ctr">
+                      <a:solidFill>
+                        <a:srgbClr val="DEE2E6"/>
+                      </a:solidFill>
+                      <a:prstDash val="solid"/>
+                      <a:round/>
+                      <a:headEnd type="none" w="med" len="med"/>
+                      <a:tailEnd type="none" w="med" len="med"/>
+                    </a:lnT>
+                    <a:lnB w="9525" cap="flat" cmpd="sng" algn="ctr">
+                      <a:solidFill>
+                        <a:srgbClr val="DEE2E6"/>
+                      </a:solidFill>
+                      <a:prstDash val="solid"/>
+                      <a:round/>
+                      <a:headEnd type="none" w="med" len="med"/>
+                      <a:tailEnd type="none" w="med" len="med"/>
+                    </a:lnB>
+                    <a:solidFill>
+                      <a:schemeClr val="bg1">
+                        <a:alpha val="17000"/>
+                      </a:schemeClr>
                     </a:solidFill>
                   </a:tcPr>
                 </a:tc>
               </a:tr>
-              <a:tr h="580741">
+              <a:tr h="576316">
                 <a:tc>
                   <a:txBody>
                     <a:bodyPr/>
@@ -4700,7 +4840,9 @@
                       <a:tailEnd type="none" w="med" len="med"/>
                     </a:lnB>
                     <a:solidFill>
-                      <a:srgbClr val="FFFFFF"/>
+                      <a:schemeClr val="bg1">
+                        <a:alpha val="17000"/>
+                      </a:schemeClr>
                     </a:solidFill>
                   </a:tcPr>
                 </a:tc>
@@ -4756,7 +4898,9 @@
                       <a:tailEnd type="none" w="med" len="med"/>
                     </a:lnB>
                     <a:solidFill>
-                      <a:srgbClr val="FFFFFF"/>
+                      <a:schemeClr val="bg1">
+                        <a:alpha val="17000"/>
+                      </a:schemeClr>
                     </a:solidFill>
                   </a:tcPr>
                 </a:tc>
@@ -4778,7 +4922,7 @@
                             <a:srgbClr val="0D6EFD"/>
                           </a:solidFill>
                           <a:effectLst/>
-                          <a:hlinkClick r:id="rId3"/>
+                          <a:hlinkClick r:id="rId4"/>
                         </a:rPr>
                         <a:t>Section 4.1</a:t>
                       </a:r>
@@ -4825,12 +4969,79 @@
                       <a:tailEnd type="none" w="med" len="med"/>
                     </a:lnB>
                     <a:solidFill>
-                      <a:srgbClr val="FFFFFF"/>
+                      <a:schemeClr val="bg1">
+                        <a:alpha val="17000"/>
+                      </a:schemeClr>
+                    </a:solidFill>
+                  </a:tcPr>
+                </a:tc>
+                <a:tc>
+                  <a:txBody>
+                    <a:bodyPr/>
+                    <a:lstStyle/>
+                    <a:p>
+                      <a:pPr algn="l"/>
+                      <a:r>
+                        <a:rPr lang="en-US" sz="1200" b="0" i="0" u="sng" dirty="0" smtClean="0">
+                          <a:solidFill>
+                            <a:srgbClr val="0D6EFD"/>
+                          </a:solidFill>
+                          <a:effectLst/>
+                          <a:latin typeface="Inter"/>
+                        </a:rPr>
+                        <a:t>Requirement #3</a:t>
+                      </a:r>
+                      <a:endParaRPr lang="en-US" sz="1200" dirty="0">
+                        <a:effectLst/>
+                      </a:endParaRPr>
+                    </a:p>
+                  </a:txBody>
+                  <a:tcPr marL="30218" marR="30218" marT="15109" marB="15109" anchor="ctr">
+                    <a:lnL w="9525" cap="flat" cmpd="sng" algn="ctr">
+                      <a:solidFill>
+                        <a:srgbClr val="DEE2E6"/>
+                      </a:solidFill>
+                      <a:prstDash val="solid"/>
+                      <a:round/>
+                      <a:headEnd type="none" w="med" len="med"/>
+                      <a:tailEnd type="none" w="med" len="med"/>
+                    </a:lnL>
+                    <a:lnR w="9525" cap="flat" cmpd="sng" algn="ctr">
+                      <a:solidFill>
+                        <a:srgbClr val="DEE2E6"/>
+                      </a:solidFill>
+                      <a:prstDash val="solid"/>
+                      <a:round/>
+                      <a:headEnd type="none" w="med" len="med"/>
+                      <a:tailEnd type="none" w="med" len="med"/>
+                    </a:lnR>
+                    <a:lnT w="9525" cap="flat" cmpd="sng" algn="ctr">
+                      <a:solidFill>
+                        <a:srgbClr val="DEE2E6"/>
+                      </a:solidFill>
+                      <a:prstDash val="solid"/>
+                      <a:round/>
+                      <a:headEnd type="none" w="med" len="med"/>
+                      <a:tailEnd type="none" w="med" len="med"/>
+                    </a:lnT>
+                    <a:lnB w="9525" cap="flat" cmpd="sng" algn="ctr">
+                      <a:solidFill>
+                        <a:srgbClr val="DEE2E6"/>
+                      </a:solidFill>
+                      <a:prstDash val="solid"/>
+                      <a:round/>
+                      <a:headEnd type="none" w="med" len="med"/>
+                      <a:tailEnd type="none" w="med" len="med"/>
+                    </a:lnB>
+                    <a:solidFill>
+                      <a:schemeClr val="bg1">
+                        <a:alpha val="17000"/>
+                      </a:schemeClr>
                     </a:solidFill>
                   </a:tcPr>
                 </a:tc>
               </a:tr>
-              <a:tr h="580741">
+              <a:tr h="576316">
                 <a:tc>
                   <a:txBody>
                     <a:bodyPr/>
@@ -4884,8 +5095,7 @@
                     </a:lnB>
                     <a:solidFill>
                       <a:schemeClr val="accent4">
-                        <a:lumMod val="20000"/>
-                        <a:lumOff val="80000"/>
+                        <a:alpha val="17000"/>
                       </a:schemeClr>
                     </a:solidFill>
                   </a:tcPr>
@@ -4943,8 +5153,7 @@
                     </a:lnB>
                     <a:solidFill>
                       <a:schemeClr val="accent4">
-                        <a:lumMod val="20000"/>
-                        <a:lumOff val="80000"/>
+                        <a:alpha val="17000"/>
                       </a:schemeClr>
                     </a:solidFill>
                   </a:tcPr>
@@ -4967,7 +5176,7 @@
                             <a:srgbClr val="0D6EFD"/>
                           </a:solidFill>
                           <a:effectLst/>
-                          <a:hlinkClick r:id="rId3"/>
+                          <a:hlinkClick r:id="rId4"/>
                         </a:rPr>
                         <a:t>Section 4.1</a:t>
                       </a:r>
@@ -5015,14 +5224,11 @@
                     </a:lnB>
                     <a:solidFill>
                       <a:schemeClr val="accent4">
-                        <a:lumMod val="20000"/>
-                        <a:lumOff val="80000"/>
+                        <a:alpha val="17000"/>
                       </a:schemeClr>
                     </a:solidFill>
                   </a:tcPr>
                 </a:tc>
-              </a:tr>
-              <a:tr h="498302">
                 <a:tc>
                   <a:txBody>
                     <a:bodyPr/>
@@ -5030,7 +5236,75 @@
                     <a:p>
                       <a:pPr algn="l"/>
                       <a:r>
-                        <a:rPr lang="en-US" sz="1200">
+                        <a:rPr lang="en-US" sz="1200" b="0" i="0" u="sng" dirty="0" smtClean="0">
+                          <a:solidFill>
+                            <a:srgbClr val="0A58CA"/>
+                          </a:solidFill>
+                          <a:effectLst/>
+                          <a:latin typeface="Inter"/>
+                          <a:hlinkClick r:id="rId5"/>
+                        </a:rPr>
+                        <a:t>Requirement #4</a:t>
+                      </a:r>
+                      <a:endParaRPr lang="en-US" sz="1200" dirty="0">
+                        <a:effectLst/>
+                      </a:endParaRPr>
+                    </a:p>
+                  </a:txBody>
+                  <a:tcPr marL="30218" marR="30218" marT="15109" marB="15109" anchor="ctr">
+                    <a:lnL w="9525" cap="flat" cmpd="sng" algn="ctr">
+                      <a:solidFill>
+                        <a:srgbClr val="DEE2E6"/>
+                      </a:solidFill>
+                      <a:prstDash val="solid"/>
+                      <a:round/>
+                      <a:headEnd type="none" w="med" len="med"/>
+                      <a:tailEnd type="none" w="med" len="med"/>
+                    </a:lnL>
+                    <a:lnR w="9525" cap="flat" cmpd="sng" algn="ctr">
+                      <a:solidFill>
+                        <a:srgbClr val="DEE2E6"/>
+                      </a:solidFill>
+                      <a:prstDash val="solid"/>
+                      <a:round/>
+                      <a:headEnd type="none" w="med" len="med"/>
+                      <a:tailEnd type="none" w="med" len="med"/>
+                    </a:lnR>
+                    <a:lnT w="9525" cap="flat" cmpd="sng" algn="ctr">
+                      <a:solidFill>
+                        <a:srgbClr val="DEE2E6"/>
+                      </a:solidFill>
+                      <a:prstDash val="solid"/>
+                      <a:round/>
+                      <a:headEnd type="none" w="med" len="med"/>
+                      <a:tailEnd type="none" w="med" len="med"/>
+                    </a:lnT>
+                    <a:lnB w="9525" cap="flat" cmpd="sng" algn="ctr">
+                      <a:solidFill>
+                        <a:srgbClr val="DEE2E6"/>
+                      </a:solidFill>
+                      <a:prstDash val="solid"/>
+                      <a:round/>
+                      <a:headEnd type="none" w="med" len="med"/>
+                      <a:tailEnd type="none" w="med" len="med"/>
+                    </a:lnB>
+                    <a:solidFill>
+                      <a:schemeClr val="accent4">
+                        <a:alpha val="17000"/>
+                      </a:schemeClr>
+                    </a:solidFill>
+                  </a:tcPr>
+                </a:tc>
+              </a:tr>
+              <a:tr h="494506">
+                <a:tc>
+                  <a:txBody>
+                    <a:bodyPr/>
+                    <a:lstStyle/>
+                    <a:p>
+                      <a:pPr algn="l"/>
+                      <a:r>
+                        <a:rPr lang="en-US" sz="1200" dirty="0">
                           <a:effectLst/>
                         </a:rPr>
                         <a:t>R4: Local-config overrides template-config</a:t>
@@ -5075,7 +5349,9 @@
                       <a:tailEnd type="none" w="med" len="med"/>
                     </a:lnB>
                     <a:solidFill>
-                      <a:srgbClr val="FFFFFF"/>
+                      <a:schemeClr val="bg1">
+                        <a:alpha val="17000"/>
+                      </a:schemeClr>
                     </a:solidFill>
                   </a:tcPr>
                 </a:tc>
@@ -5131,7 +5407,9 @@
                       <a:tailEnd type="none" w="med" len="med"/>
                     </a:lnB>
                     <a:solidFill>
-                      <a:srgbClr val="FFFFFF"/>
+                      <a:schemeClr val="bg1">
+                        <a:alpha val="17000"/>
+                      </a:schemeClr>
                     </a:solidFill>
                   </a:tcPr>
                 </a:tc>
@@ -5153,7 +5431,7 @@
                             <a:srgbClr val="0D6EFD"/>
                           </a:solidFill>
                           <a:effectLst/>
-                          <a:hlinkClick r:id="rId4"/>
+                          <a:hlinkClick r:id="rId6"/>
                         </a:rPr>
                         <a:t>Section 4.3</a:t>
                       </a:r>
@@ -5200,12 +5478,80 @@
                       <a:tailEnd type="none" w="med" len="med"/>
                     </a:lnB>
                     <a:solidFill>
-                      <a:srgbClr val="FFFFFF"/>
+                      <a:schemeClr val="bg1">
+                        <a:alpha val="17000"/>
+                      </a:schemeClr>
+                    </a:solidFill>
+                  </a:tcPr>
+                </a:tc>
+                <a:tc>
+                  <a:txBody>
+                    <a:bodyPr/>
+                    <a:lstStyle/>
+                    <a:p>
+                      <a:pPr algn="l"/>
+                      <a:r>
+                        <a:rPr lang="en-US" sz="1200" b="0" i="0" u="sng" dirty="0" smtClean="0">
+                          <a:solidFill>
+                            <a:srgbClr val="0D6EFD"/>
+                          </a:solidFill>
+                          <a:effectLst/>
+                          <a:latin typeface="Inter"/>
+                          <a:hlinkClick r:id="rId7"/>
+                        </a:rPr>
+                        <a:t>Requirement #6</a:t>
+                      </a:r>
+                      <a:endParaRPr lang="en-US" sz="1200" dirty="0">
+                        <a:effectLst/>
+                      </a:endParaRPr>
+                    </a:p>
+                  </a:txBody>
+                  <a:tcPr marL="30218" marR="30218" marT="15109" marB="15109" anchor="ctr">
+                    <a:lnL w="9525" cap="flat" cmpd="sng" algn="ctr">
+                      <a:solidFill>
+                        <a:srgbClr val="DEE2E6"/>
+                      </a:solidFill>
+                      <a:prstDash val="solid"/>
+                      <a:round/>
+                      <a:headEnd type="none" w="med" len="med"/>
+                      <a:tailEnd type="none" w="med" len="med"/>
+                    </a:lnL>
+                    <a:lnR w="9525" cap="flat" cmpd="sng" algn="ctr">
+                      <a:solidFill>
+                        <a:srgbClr val="DEE2E6"/>
+                      </a:solidFill>
+                      <a:prstDash val="solid"/>
+                      <a:round/>
+                      <a:headEnd type="none" w="med" len="med"/>
+                      <a:tailEnd type="none" w="med" len="med"/>
+                    </a:lnR>
+                    <a:lnT w="9525" cap="flat" cmpd="sng" algn="ctr">
+                      <a:solidFill>
+                        <a:srgbClr val="DEE2E6"/>
+                      </a:solidFill>
+                      <a:prstDash val="solid"/>
+                      <a:round/>
+                      <a:headEnd type="none" w="med" len="med"/>
+                      <a:tailEnd type="none" w="med" len="med"/>
+                    </a:lnT>
+                    <a:lnB w="9525" cap="flat" cmpd="sng" algn="ctr">
+                      <a:solidFill>
+                        <a:srgbClr val="DEE2E6"/>
+                      </a:solidFill>
+                      <a:prstDash val="solid"/>
+                      <a:round/>
+                      <a:headEnd type="none" w="med" len="med"/>
+                      <a:tailEnd type="none" w="med" len="med"/>
+                    </a:lnB>
+                    <a:solidFill>
+                      <a:schemeClr val="bg1">
+                        <a:alpha val="17000"/>
+                      </a:schemeClr>
                     </a:solidFill>
                   </a:tcPr>
                 </a:tc>
               </a:tr>
-              <a:tr h="712124">
+              <a:tr h="706697">
                 <a:tc>
                   <a:txBody>
                     <a:bodyPr/>
@@ -5258,7 +5604,9 @@
                       <a:tailEnd type="none" w="med" len="med"/>
                     </a:lnB>
                     <a:solidFill>
-                      <a:srgbClr val="FFFFFF"/>
+                      <a:schemeClr val="bg1">
+                        <a:alpha val="17000"/>
+                      </a:schemeClr>
                     </a:solidFill>
                   </a:tcPr>
                 </a:tc>
@@ -5314,7 +5662,9 @@
                       <a:tailEnd type="none" w="med" len="med"/>
                     </a:lnB>
                     <a:solidFill>
-                      <a:srgbClr val="FFFFFF"/>
+                      <a:schemeClr val="bg1">
+                        <a:alpha val="17000"/>
+                      </a:schemeClr>
                     </a:solidFill>
                   </a:tcPr>
                 </a:tc>
@@ -5336,7 +5686,7 @@
                             <a:srgbClr val="0D6EFD"/>
                           </a:solidFill>
                           <a:effectLst/>
-                          <a:hlinkClick r:id="rId5"/>
+                          <a:hlinkClick r:id="rId8"/>
                         </a:rPr>
                         <a:t>Section 4.4</a:t>
                       </a:r>
@@ -5383,12 +5733,12 @@
                       <a:tailEnd type="none" w="med" len="med"/>
                     </a:lnB>
                     <a:solidFill>
-                      <a:srgbClr val="FFFFFF"/>
+                      <a:schemeClr val="bg1">
+                        <a:alpha val="17000"/>
+                      </a:schemeClr>
                     </a:solidFill>
                   </a:tcPr>
                 </a:tc>
-              </a:tr>
-              <a:tr h="580741">
                 <a:tc>
                   <a:txBody>
                     <a:bodyPr/>
@@ -5396,7 +5746,75 @@
                     <a:p>
                       <a:pPr algn="l"/>
                       <a:r>
-                        <a:rPr lang="en-US" sz="1200">
+                        <a:rPr lang="en-US" sz="1200" b="0" i="0" u="sng" dirty="0" smtClean="0">
+                          <a:solidFill>
+                            <a:srgbClr val="0D6EFD"/>
+                          </a:solidFill>
+                          <a:effectLst/>
+                          <a:latin typeface="Inter"/>
+                          <a:hlinkClick r:id="rId9"/>
+                        </a:rPr>
+                        <a:t>Requirement #7</a:t>
+                      </a:r>
+                      <a:endParaRPr lang="en-US" sz="1200" dirty="0">
+                        <a:effectLst/>
+                      </a:endParaRPr>
+                    </a:p>
+                  </a:txBody>
+                  <a:tcPr marL="30218" marR="30218" marT="15109" marB="15109" anchor="ctr">
+                    <a:lnL w="9525" cap="flat" cmpd="sng" algn="ctr">
+                      <a:solidFill>
+                        <a:srgbClr val="DEE2E6"/>
+                      </a:solidFill>
+                      <a:prstDash val="solid"/>
+                      <a:round/>
+                      <a:headEnd type="none" w="med" len="med"/>
+                      <a:tailEnd type="none" w="med" len="med"/>
+                    </a:lnL>
+                    <a:lnR w="9525" cap="flat" cmpd="sng" algn="ctr">
+                      <a:solidFill>
+                        <a:srgbClr val="DEE2E6"/>
+                      </a:solidFill>
+                      <a:prstDash val="solid"/>
+                      <a:round/>
+                      <a:headEnd type="none" w="med" len="med"/>
+                      <a:tailEnd type="none" w="med" len="med"/>
+                    </a:lnR>
+                    <a:lnT w="9525" cap="flat" cmpd="sng" algn="ctr">
+                      <a:solidFill>
+                        <a:srgbClr val="DEE2E6"/>
+                      </a:solidFill>
+                      <a:prstDash val="solid"/>
+                      <a:round/>
+                      <a:headEnd type="none" w="med" len="med"/>
+                      <a:tailEnd type="none" w="med" len="med"/>
+                    </a:lnT>
+                    <a:lnB w="9525" cap="flat" cmpd="sng" algn="ctr">
+                      <a:solidFill>
+                        <a:srgbClr val="DEE2E6"/>
+                      </a:solidFill>
+                      <a:prstDash val="solid"/>
+                      <a:round/>
+                      <a:headEnd type="none" w="med" len="med"/>
+                      <a:tailEnd type="none" w="med" len="med"/>
+                    </a:lnB>
+                    <a:solidFill>
+                      <a:schemeClr val="bg1">
+                        <a:alpha val="17000"/>
+                      </a:schemeClr>
+                    </a:solidFill>
+                  </a:tcPr>
+                </a:tc>
+              </a:tr>
+              <a:tr h="576316">
+                <a:tc>
+                  <a:txBody>
+                    <a:bodyPr/>
+                    <a:lstStyle/>
+                    <a:p>
+                      <a:pPr algn="l"/>
+                      <a:r>
+                        <a:rPr lang="en-US" sz="1200" dirty="0">
                           <a:effectLst/>
                         </a:rPr>
                         <a:t>R6: Support basic programmatic elements in templates</a:t>
@@ -5442,8 +5860,7 @@
                     </a:lnB>
                     <a:solidFill>
                       <a:schemeClr val="accent4">
-                        <a:lumMod val="20000"/>
-                        <a:lumOff val="80000"/>
+                        <a:alpha val="17000"/>
                       </a:schemeClr>
                     </a:solidFill>
                   </a:tcPr>
@@ -5501,8 +5918,7 @@
                     </a:lnB>
                     <a:solidFill>
                       <a:schemeClr val="accent4">
-                        <a:lumMod val="20000"/>
-                        <a:lumOff val="80000"/>
+                        <a:alpha val="17000"/>
                       </a:schemeClr>
                     </a:solidFill>
                   </a:tcPr>
@@ -5560,14 +5976,79 @@
                     </a:lnB>
                     <a:solidFill>
                       <a:schemeClr val="accent4">
-                        <a:lumMod val="20000"/>
-                        <a:lumOff val="80000"/>
+                        <a:alpha val="17000"/>
+                      </a:schemeClr>
+                    </a:solidFill>
+                  </a:tcPr>
+                </a:tc>
+                <a:tc>
+                  <a:txBody>
+                    <a:bodyPr/>
+                    <a:lstStyle/>
+                    <a:p>
+                      <a:pPr algn="l"/>
+                      <a:r>
+                        <a:rPr lang="en-US" sz="1200" b="0" i="0" u="sng" dirty="0" smtClean="0">
+                          <a:solidFill>
+                            <a:srgbClr val="0D6EFD"/>
+                          </a:solidFill>
+                          <a:effectLst/>
+                          <a:latin typeface="Inter"/>
+                          <a:hlinkClick r:id="rId10"/>
+                        </a:rPr>
+                        <a:t>Requirement #8</a:t>
+                      </a:r>
+                      <a:endParaRPr lang="en-US" sz="1200" dirty="0">
+                        <a:effectLst/>
+                      </a:endParaRPr>
+                    </a:p>
+                  </a:txBody>
+                  <a:tcPr marL="30218" marR="30218" marT="15109" marB="15109" anchor="ctr">
+                    <a:lnL w="9525" cap="flat" cmpd="sng" algn="ctr">
+                      <a:solidFill>
+                        <a:srgbClr val="DEE2E6"/>
+                      </a:solidFill>
+                      <a:prstDash val="solid"/>
+                      <a:round/>
+                      <a:headEnd type="none" w="med" len="med"/>
+                      <a:tailEnd type="none" w="med" len="med"/>
+                    </a:lnL>
+                    <a:lnR w="9525" cap="flat" cmpd="sng" algn="ctr">
+                      <a:solidFill>
+                        <a:srgbClr val="DEE2E6"/>
+                      </a:solidFill>
+                      <a:prstDash val="solid"/>
+                      <a:round/>
+                      <a:headEnd type="none" w="med" len="med"/>
+                      <a:tailEnd type="none" w="med" len="med"/>
+                    </a:lnR>
+                    <a:lnT w="9525" cap="flat" cmpd="sng" algn="ctr">
+                      <a:solidFill>
+                        <a:srgbClr val="DEE2E6"/>
+                      </a:solidFill>
+                      <a:prstDash val="solid"/>
+                      <a:round/>
+                      <a:headEnd type="none" w="med" len="med"/>
+                      <a:tailEnd type="none" w="med" len="med"/>
+                    </a:lnT>
+                    <a:lnB w="9525" cap="flat" cmpd="sng" algn="ctr">
+                      <a:solidFill>
+                        <a:srgbClr val="DEE2E6"/>
+                      </a:solidFill>
+                      <a:prstDash val="solid"/>
+                      <a:round/>
+                      <a:headEnd type="none" w="med" len="med"/>
+                      <a:tailEnd type="none" w="med" len="med"/>
+                    </a:lnB>
+                    <a:solidFill>
+                      <a:schemeClr val="accent4">
+                        <a:alpha val="17000"/>
                       </a:schemeClr>
                     </a:solidFill>
                   </a:tcPr>
                 </a:tc>
               </a:tr>
-              <a:tr h="712124">
+              <a:tr h="706697">
                 <a:tc>
                   <a:txBody>
                     <a:bodyPr/>
@@ -5620,7 +6101,9 @@
                       <a:tailEnd type="none" w="med" len="med"/>
                     </a:lnB>
                     <a:solidFill>
-                      <a:srgbClr val="FFFFFF"/>
+                      <a:schemeClr val="bg1">
+                        <a:alpha val="17000"/>
+                      </a:schemeClr>
                     </a:solidFill>
                   </a:tcPr>
                 </a:tc>
@@ -5676,7 +6159,9 @@
                       <a:tailEnd type="none" w="med" len="med"/>
                     </a:lnB>
                     <a:solidFill>
-                      <a:srgbClr val="FFFFFF"/>
+                      <a:schemeClr val="bg1">
+                        <a:alpha val="17000"/>
+                      </a:schemeClr>
                     </a:solidFill>
                   </a:tcPr>
                 </a:tc>
@@ -5687,22 +6172,22 @@
                     <a:p>
                       <a:pPr algn="l"/>
                       <a:r>
-                        <a:rPr lang="en-US" sz="1200">
+                        <a:rPr lang="en-US" sz="1200" dirty="0">
                           <a:effectLst/>
                         </a:rPr>
                         <a:t>See </a:t>
                       </a:r>
                       <a:r>
-                        <a:rPr lang="en-US" sz="1200" u="sng">
+                        <a:rPr lang="en-US" sz="1200" u="sng" dirty="0">
                           <a:solidFill>
                             <a:srgbClr val="0D6EFD"/>
                           </a:solidFill>
                           <a:effectLst/>
-                          <a:hlinkClick r:id="rId6"/>
+                          <a:hlinkClick r:id="rId11"/>
                         </a:rPr>
                         <a:t>Section 8</a:t>
                       </a:r>
-                      <a:endParaRPr lang="en-US" sz="1200">
+                      <a:endParaRPr lang="en-US" sz="1200" dirty="0">
                         <a:effectLst/>
                       </a:endParaRPr>
                     </a:p>
@@ -5745,12 +6230,80 @@
                       <a:tailEnd type="none" w="med" len="med"/>
                     </a:lnB>
                     <a:solidFill>
-                      <a:srgbClr val="FFFFFF"/>
+                      <a:schemeClr val="bg1">
+                        <a:alpha val="17000"/>
+                      </a:schemeClr>
+                    </a:solidFill>
+                  </a:tcPr>
+                </a:tc>
+                <a:tc>
+                  <a:txBody>
+                    <a:bodyPr/>
+                    <a:lstStyle/>
+                    <a:p>
+                      <a:pPr algn="l"/>
+                      <a:r>
+                        <a:rPr lang="en-US" sz="1200" b="0" i="0" u="sng" dirty="0" smtClean="0">
+                          <a:solidFill>
+                            <a:srgbClr val="0D6EFD"/>
+                          </a:solidFill>
+                          <a:effectLst/>
+                          <a:latin typeface="Inter"/>
+                          <a:hlinkClick r:id="rId12"/>
+                        </a:rPr>
+                        <a:t>Requirement #9</a:t>
+                      </a:r>
+                      <a:endParaRPr lang="en-US" sz="1200" dirty="0">
+                        <a:effectLst/>
+                      </a:endParaRPr>
+                    </a:p>
+                  </a:txBody>
+                  <a:tcPr marL="30218" marR="30218" marT="15109" marB="15109" anchor="ctr">
+                    <a:lnL w="9525" cap="flat" cmpd="sng" algn="ctr">
+                      <a:solidFill>
+                        <a:srgbClr val="DEE2E6"/>
+                      </a:solidFill>
+                      <a:prstDash val="solid"/>
+                      <a:round/>
+                      <a:headEnd type="none" w="med" len="med"/>
+                      <a:tailEnd type="none" w="med" len="med"/>
+                    </a:lnL>
+                    <a:lnR w="9525" cap="flat" cmpd="sng" algn="ctr">
+                      <a:solidFill>
+                        <a:srgbClr val="DEE2E6"/>
+                      </a:solidFill>
+                      <a:prstDash val="solid"/>
+                      <a:round/>
+                      <a:headEnd type="none" w="med" len="med"/>
+                      <a:tailEnd type="none" w="med" len="med"/>
+                    </a:lnR>
+                    <a:lnT w="9525" cap="flat" cmpd="sng" algn="ctr">
+                      <a:solidFill>
+                        <a:srgbClr val="DEE2E6"/>
+                      </a:solidFill>
+                      <a:prstDash val="solid"/>
+                      <a:round/>
+                      <a:headEnd type="none" w="med" len="med"/>
+                      <a:tailEnd type="none" w="med" len="med"/>
+                    </a:lnT>
+                    <a:lnB w="9525" cap="flat" cmpd="sng" algn="ctr">
+                      <a:solidFill>
+                        <a:srgbClr val="DEE2E6"/>
+                      </a:solidFill>
+                      <a:prstDash val="solid"/>
+                      <a:round/>
+                      <a:headEnd type="none" w="med" len="med"/>
+                      <a:tailEnd type="none" w="med" len="med"/>
+                    </a:lnB>
+                    <a:solidFill>
+                      <a:schemeClr val="bg1">
+                        <a:alpha val="17000"/>
+                      </a:schemeClr>
                     </a:solidFill>
                   </a:tcPr>
                 </a:tc>
               </a:tr>
-              <a:tr h="839095">
+              <a:tr h="832701">
                 <a:tc>
                   <a:txBody>
                     <a:bodyPr/>
@@ -5803,7 +6356,9 @@
                       <a:tailEnd type="none" w="med" len="med"/>
                     </a:lnB>
                     <a:solidFill>
-                      <a:srgbClr val="FFFFFF"/>
+                      <a:schemeClr val="bg1">
+                        <a:alpha val="17000"/>
+                      </a:schemeClr>
                     </a:solidFill>
                   </a:tcPr>
                 </a:tc>
@@ -5859,7 +6414,9 @@
                       <a:tailEnd type="none" w="med" len="med"/>
                     </a:lnB>
                     <a:solidFill>
-                      <a:srgbClr val="FFFFFF"/>
+                      <a:schemeClr val="bg1">
+                        <a:alpha val="17000"/>
+                      </a:schemeClr>
                     </a:solidFill>
                   </a:tcPr>
                 </a:tc>
@@ -5881,7 +6438,7 @@
                             <a:srgbClr val="0D6EFD"/>
                           </a:solidFill>
                           <a:effectLst/>
-                          <a:hlinkClick r:id="rId7"/>
+                          <a:hlinkClick r:id="rId13"/>
                         </a:rPr>
                         <a:t>Section 5</a:t>
                       </a:r>
@@ -5897,7 +6454,7 @@
                             <a:srgbClr val="0D6EFD"/>
                           </a:solidFill>
                           <a:effectLst/>
-                          <a:hlinkClick r:id="rId6"/>
+                          <a:hlinkClick r:id="rId11"/>
                         </a:rPr>
                         <a:t>Section 8</a:t>
                       </a:r>
@@ -5944,1401 +6501,8 @@
                       <a:tailEnd type="none" w="med" len="med"/>
                     </a:lnB>
                     <a:solidFill>
-                      <a:srgbClr val="FFFFFF"/>
-                    </a:solidFill>
-                  </a:tcPr>
-                </a:tc>
-              </a:tr>
-            </a:tbl>
-          </a:graphicData>
-        </a:graphic>
-      </p:graphicFrame>
-      <p:graphicFrame>
-        <p:nvGraphicFramePr>
-          <p:cNvPr id="6" name="表格 5"/>
-          <p:cNvGraphicFramePr>
-            <a:graphicFrameLocks noGrp="1"/>
-          </p:cNvGraphicFramePr>
-          <p:nvPr>
-            <p:extLst>
-              <p:ext uri="{D42A27DB-BD31-4B8C-83A1-F6EECF244321}">
-                <p14:modId xmlns:p14="http://schemas.microsoft.com/office/powerpoint/2010/main" val="1769849145"/>
-              </p:ext>
-            </p:extLst>
-          </p:nvPr>
-        </p:nvGraphicFramePr>
-        <p:xfrm>
-          <a:off x="6342611" y="790344"/>
-          <a:ext cx="5774574" cy="5406996"/>
-        </p:xfrm>
-        <a:graphic>
-          <a:graphicData uri="http://schemas.openxmlformats.org/drawingml/2006/table">
-            <a:tbl>
-              <a:tblPr/>
-              <a:tblGrid>
-                <a:gridCol w="2527068"/>
-                <a:gridCol w="640080"/>
-                <a:gridCol w="2607426"/>
-              </a:tblGrid>
-              <a:tr h="273518">
-                <a:tc>
-                  <a:txBody>
-                    <a:bodyPr/>
-                    <a:lstStyle/>
-                    <a:p>
-                      <a:pPr algn="l"/>
-                      <a:r>
-                        <a:rPr lang="en-US" sz="1200" b="1" dirty="0">
-                          <a:effectLst/>
-                        </a:rPr>
-                        <a:t>Requirement</a:t>
-                      </a:r>
-                    </a:p>
-                  </a:txBody>
-                  <a:tcPr marL="30218" marR="30218" marT="15109" marB="15109" anchor="ctr">
-                    <a:lnL w="9525" cap="flat" cmpd="sng" algn="ctr">
-                      <a:solidFill>
-                        <a:srgbClr val="DEE2E6"/>
-                      </a:solidFill>
-                      <a:prstDash val="solid"/>
-                      <a:round/>
-                      <a:headEnd type="none" w="med" len="med"/>
-                      <a:tailEnd type="none" w="med" len="med"/>
-                    </a:lnL>
-                    <a:lnR w="9525" cap="flat" cmpd="sng" algn="ctr">
-                      <a:solidFill>
-                        <a:srgbClr val="DEE2E6"/>
-                      </a:solidFill>
-                      <a:prstDash val="solid"/>
-                      <a:round/>
-                      <a:headEnd type="none" w="med" len="med"/>
-                      <a:tailEnd type="none" w="med" len="med"/>
-                    </a:lnR>
-                    <a:lnT w="9525" cap="flat" cmpd="sng" algn="ctr">
-                      <a:solidFill>
-                        <a:srgbClr val="DEE2E6"/>
-                      </a:solidFill>
-                      <a:prstDash val="solid"/>
-                      <a:round/>
-                      <a:headEnd type="none" w="med" len="med"/>
-                      <a:tailEnd type="none" w="med" len="med"/>
-                    </a:lnT>
-                    <a:lnB w="9525" cap="flat" cmpd="sng" algn="ctr">
-                      <a:solidFill>
-                        <a:srgbClr val="DEE2E6"/>
-                      </a:solidFill>
-                      <a:prstDash val="solid"/>
-                      <a:round/>
-                      <a:headEnd type="none" w="med" len="med"/>
-                      <a:tailEnd type="none" w="med" len="med"/>
-                    </a:lnB>
-                    <a:solidFill>
-                      <a:srgbClr val="FFFFFF"/>
-                    </a:solidFill>
-                  </a:tcPr>
-                </a:tc>
-                <a:tc>
-                  <a:txBody>
-                    <a:bodyPr/>
-                    <a:lstStyle/>
-                    <a:p>
-                      <a:pPr algn="l"/>
-                      <a:r>
-                        <a:rPr lang="en-US" sz="1200" b="1" dirty="0">
-                          <a:effectLst/>
-                        </a:rPr>
-                        <a:t>Fulfilled</a:t>
-                      </a:r>
-                    </a:p>
-                  </a:txBody>
-                  <a:tcPr marL="30218" marR="30218" marT="15109" marB="15109" anchor="ctr">
-                    <a:lnL w="9525" cap="flat" cmpd="sng" algn="ctr">
-                      <a:solidFill>
-                        <a:srgbClr val="DEE2E6"/>
-                      </a:solidFill>
-                      <a:prstDash val="solid"/>
-                      <a:round/>
-                      <a:headEnd type="none" w="med" len="med"/>
-                      <a:tailEnd type="none" w="med" len="med"/>
-                    </a:lnL>
-                    <a:lnR w="9525" cap="flat" cmpd="sng" algn="ctr">
-                      <a:solidFill>
-                        <a:srgbClr val="DEE2E6"/>
-                      </a:solidFill>
-                      <a:prstDash val="solid"/>
-                      <a:round/>
-                      <a:headEnd type="none" w="med" len="med"/>
-                      <a:tailEnd type="none" w="med" len="med"/>
-                    </a:lnR>
-                    <a:lnT w="9525" cap="flat" cmpd="sng" algn="ctr">
-                      <a:solidFill>
-                        <a:srgbClr val="DEE2E6"/>
-                      </a:solidFill>
-                      <a:prstDash val="solid"/>
-                      <a:round/>
-                      <a:headEnd type="none" w="med" len="med"/>
-                      <a:tailEnd type="none" w="med" len="med"/>
-                    </a:lnT>
-                    <a:lnB w="9525" cap="flat" cmpd="sng" algn="ctr">
-                      <a:solidFill>
-                        <a:srgbClr val="DEE2E6"/>
-                      </a:solidFill>
-                      <a:prstDash val="solid"/>
-                      <a:round/>
-                      <a:headEnd type="none" w="med" len="med"/>
-                      <a:tailEnd type="none" w="med" len="med"/>
-                    </a:lnB>
-                    <a:solidFill>
-                      <a:srgbClr val="FFFFFF"/>
-                    </a:solidFill>
-                  </a:tcPr>
-                </a:tc>
-                <a:tc>
-                  <a:txBody>
-                    <a:bodyPr/>
-                    <a:lstStyle/>
-                    <a:p>
-                      <a:pPr algn="l"/>
-                      <a:r>
-                        <a:rPr lang="en-US" sz="1200" b="1" dirty="0" smtClean="0">
-                          <a:effectLst/>
-                        </a:rPr>
-                        <a:t>Description</a:t>
-                      </a:r>
-                      <a:endParaRPr lang="en-US" sz="1200" b="1" dirty="0">
-                        <a:effectLst/>
-                      </a:endParaRPr>
-                    </a:p>
-                  </a:txBody>
-                  <a:tcPr marL="30218" marR="30218" marT="15109" marB="15109" anchor="ctr">
-                    <a:lnL w="9525" cap="flat" cmpd="sng" algn="ctr">
-                      <a:solidFill>
-                        <a:srgbClr val="DEE2E6"/>
-                      </a:solidFill>
-                      <a:prstDash val="solid"/>
-                      <a:round/>
-                      <a:headEnd type="none" w="med" len="med"/>
-                      <a:tailEnd type="none" w="med" len="med"/>
-                    </a:lnL>
-                    <a:lnR w="9525" cap="flat" cmpd="sng" algn="ctr">
-                      <a:solidFill>
-                        <a:srgbClr val="DEE2E6"/>
-                      </a:solidFill>
-                      <a:prstDash val="solid"/>
-                      <a:round/>
-                      <a:headEnd type="none" w="med" len="med"/>
-                      <a:tailEnd type="none" w="med" len="med"/>
-                    </a:lnR>
-                    <a:lnT w="9525" cap="flat" cmpd="sng" algn="ctr">
-                      <a:solidFill>
-                        <a:srgbClr val="DEE2E6"/>
-                      </a:solidFill>
-                      <a:prstDash val="solid"/>
-                      <a:round/>
-                      <a:headEnd type="none" w="med" len="med"/>
-                      <a:tailEnd type="none" w="med" len="med"/>
-                    </a:lnT>
-                    <a:lnB w="9525" cap="flat" cmpd="sng" algn="ctr">
-                      <a:solidFill>
-                        <a:srgbClr val="DEE2E6"/>
-                      </a:solidFill>
-                      <a:prstDash val="solid"/>
-                      <a:round/>
-                      <a:headEnd type="none" w="med" len="med"/>
-                      <a:tailEnd type="none" w="med" len="med"/>
-                    </a:lnB>
-                    <a:solidFill>
-                      <a:srgbClr val="FFFFFF"/>
-                    </a:solidFill>
-                  </a:tcPr>
-                </a:tc>
-              </a:tr>
-              <a:tr h="492709">
-                <a:tc>
-                  <a:txBody>
-                    <a:bodyPr/>
-                    <a:lstStyle/>
-                    <a:p>
-                      <a:pPr algn="l"/>
-                      <a:r>
-                        <a:rPr lang="en-US" sz="1200" dirty="0">
-                          <a:effectLst/>
-                        </a:rPr>
-                        <a:t>R9: &lt;running&gt; contains the unexpanded template</a:t>
-                      </a:r>
-                    </a:p>
-                  </a:txBody>
-                  <a:tcPr marL="30218" marR="30218" marT="15109" marB="15109" anchor="ctr">
-                    <a:lnL w="9525" cap="flat" cmpd="sng" algn="ctr">
-                      <a:solidFill>
-                        <a:srgbClr val="DEE2E6"/>
-                      </a:solidFill>
-                      <a:prstDash val="solid"/>
-                      <a:round/>
-                      <a:headEnd type="none" w="med" len="med"/>
-                      <a:tailEnd type="none" w="med" len="med"/>
-                    </a:lnL>
-                    <a:lnR w="9525" cap="flat" cmpd="sng" algn="ctr">
-                      <a:solidFill>
-                        <a:srgbClr val="DEE2E6"/>
-                      </a:solidFill>
-                      <a:prstDash val="solid"/>
-                      <a:round/>
-                      <a:headEnd type="none" w="med" len="med"/>
-                      <a:tailEnd type="none" w="med" len="med"/>
-                    </a:lnR>
-                    <a:lnT w="9525" cap="flat" cmpd="sng" algn="ctr">
-                      <a:solidFill>
-                        <a:srgbClr val="DEE2E6"/>
-                      </a:solidFill>
-                      <a:prstDash val="solid"/>
-                      <a:round/>
-                      <a:headEnd type="none" w="med" len="med"/>
-                      <a:tailEnd type="none" w="med" len="med"/>
-                    </a:lnT>
-                    <a:lnB w="9525" cap="flat" cmpd="sng" algn="ctr">
-                      <a:solidFill>
-                        <a:srgbClr val="DEE2E6"/>
-                      </a:solidFill>
-                      <a:prstDash val="solid"/>
-                      <a:round/>
-                      <a:headEnd type="none" w="med" len="med"/>
-                      <a:tailEnd type="none" w="med" len="med"/>
-                    </a:lnB>
-                    <a:solidFill>
-                      <a:srgbClr val="FFFFFF"/>
-                    </a:solidFill>
-                  </a:tcPr>
-                </a:tc>
-                <a:tc>
-                  <a:txBody>
-                    <a:bodyPr/>
-                    <a:lstStyle/>
-                    <a:p>
-                      <a:pPr algn="l"/>
-                      <a:r>
-                        <a:rPr lang="en-US" sz="1200">
-                          <a:effectLst/>
-                        </a:rPr>
-                        <a:t>Y</a:t>
-                      </a:r>
-                    </a:p>
-                  </a:txBody>
-                  <a:tcPr marL="30218" marR="30218" marT="15109" marB="15109" anchor="ctr">
-                    <a:lnL w="9525" cap="flat" cmpd="sng" algn="ctr">
-                      <a:solidFill>
-                        <a:srgbClr val="DEE2E6"/>
-                      </a:solidFill>
-                      <a:prstDash val="solid"/>
-                      <a:round/>
-                      <a:headEnd type="none" w="med" len="med"/>
-                      <a:tailEnd type="none" w="med" len="med"/>
-                    </a:lnL>
-                    <a:lnR w="9525" cap="flat" cmpd="sng" algn="ctr">
-                      <a:solidFill>
-                        <a:srgbClr val="DEE2E6"/>
-                      </a:solidFill>
-                      <a:prstDash val="solid"/>
-                      <a:round/>
-                      <a:headEnd type="none" w="med" len="med"/>
-                      <a:tailEnd type="none" w="med" len="med"/>
-                    </a:lnR>
-                    <a:lnT w="9525" cap="flat" cmpd="sng" algn="ctr">
-                      <a:solidFill>
-                        <a:srgbClr val="DEE2E6"/>
-                      </a:solidFill>
-                      <a:prstDash val="solid"/>
-                      <a:round/>
-                      <a:headEnd type="none" w="med" len="med"/>
-                      <a:tailEnd type="none" w="med" len="med"/>
-                    </a:lnT>
-                    <a:lnB w="9525" cap="flat" cmpd="sng" algn="ctr">
-                      <a:solidFill>
-                        <a:srgbClr val="DEE2E6"/>
-                      </a:solidFill>
-                      <a:prstDash val="solid"/>
-                      <a:round/>
-                      <a:headEnd type="none" w="med" len="med"/>
-                      <a:tailEnd type="none" w="med" len="med"/>
-                    </a:lnB>
-                    <a:solidFill>
-                      <a:srgbClr val="FFFFFF"/>
-                    </a:solidFill>
-                  </a:tcPr>
-                </a:tc>
-                <a:tc>
-                  <a:txBody>
-                    <a:bodyPr/>
-                    <a:lstStyle/>
-                    <a:p>
-                      <a:pPr algn="l"/>
-                      <a:r>
-                        <a:rPr lang="en-US" sz="1200" dirty="0">
-                          <a:effectLst/>
-                        </a:rPr>
-                        <a:t>see </a:t>
-                      </a:r>
-                      <a:r>
-                        <a:rPr lang="en-US" sz="1200" u="sng" dirty="0">
-                          <a:solidFill>
-                            <a:srgbClr val="0D6EFD"/>
-                          </a:solidFill>
-                          <a:effectLst/>
-                          <a:hlinkClick r:id="rId7"/>
-                        </a:rPr>
-                        <a:t>Section 5</a:t>
-                      </a:r>
-                      <a:r>
-                        <a:rPr lang="en-US" sz="1200" dirty="0">
-                          <a:effectLst/>
-                        </a:rPr>
-                        <a:t>, also stated explicitly in </a:t>
-                      </a:r>
-                      <a:r>
-                        <a:rPr lang="en-US" sz="1200" u="sng" dirty="0">
-                          <a:solidFill>
-                            <a:srgbClr val="0D6EFD"/>
-                          </a:solidFill>
-                          <a:effectLst/>
-                          <a:hlinkClick r:id="rId6"/>
-                        </a:rPr>
-                        <a:t>Section 8</a:t>
-                      </a:r>
-                      <a:endParaRPr lang="en-US" sz="1200" dirty="0">
-                        <a:effectLst/>
-                      </a:endParaRPr>
-                    </a:p>
-                  </a:txBody>
-                  <a:tcPr marL="30218" marR="30218" marT="15109" marB="15109" anchor="ctr">
-                    <a:lnL w="9525" cap="flat" cmpd="sng" algn="ctr">
-                      <a:solidFill>
-                        <a:srgbClr val="DEE2E6"/>
-                      </a:solidFill>
-                      <a:prstDash val="solid"/>
-                      <a:round/>
-                      <a:headEnd type="none" w="med" len="med"/>
-                      <a:tailEnd type="none" w="med" len="med"/>
-                    </a:lnL>
-                    <a:lnR w="9525" cap="flat" cmpd="sng" algn="ctr">
-                      <a:solidFill>
-                        <a:srgbClr val="DEE2E6"/>
-                      </a:solidFill>
-                      <a:prstDash val="solid"/>
-                      <a:round/>
-                      <a:headEnd type="none" w="med" len="med"/>
-                      <a:tailEnd type="none" w="med" len="med"/>
-                    </a:lnR>
-                    <a:lnT w="9525" cap="flat" cmpd="sng" algn="ctr">
-                      <a:solidFill>
-                        <a:srgbClr val="DEE2E6"/>
-                      </a:solidFill>
-                      <a:prstDash val="solid"/>
-                      <a:round/>
-                      <a:headEnd type="none" w="med" len="med"/>
-                      <a:tailEnd type="none" w="med" len="med"/>
-                    </a:lnT>
-                    <a:lnB w="9525" cap="flat" cmpd="sng" algn="ctr">
-                      <a:solidFill>
-                        <a:srgbClr val="DEE2E6"/>
-                      </a:solidFill>
-                      <a:prstDash val="solid"/>
-                      <a:round/>
-                      <a:headEnd type="none" w="med" len="med"/>
-                      <a:tailEnd type="none" w="med" len="med"/>
-                    </a:lnB>
-                    <a:solidFill>
-                      <a:srgbClr val="FFFFFF"/>
-                    </a:solidFill>
-                  </a:tcPr>
-                </a:tc>
-              </a:tr>
-              <a:tr h="492709">
-                <a:tc>
-                  <a:txBody>
-                    <a:bodyPr/>
-                    <a:lstStyle/>
-                    <a:p>
-                      <a:pPr algn="l"/>
-                      <a:r>
-                        <a:rPr lang="en-US" sz="1200" dirty="0">
-                          <a:effectLst/>
-                        </a:rPr>
-                        <a:t>R10: &lt;intended&gt; contains the expanded template</a:t>
-                      </a:r>
-                    </a:p>
-                  </a:txBody>
-                  <a:tcPr marL="30218" marR="30218" marT="15109" marB="15109" anchor="ctr">
-                    <a:lnL w="9525" cap="flat" cmpd="sng" algn="ctr">
-                      <a:solidFill>
-                        <a:srgbClr val="DEE2E6"/>
-                      </a:solidFill>
-                      <a:prstDash val="solid"/>
-                      <a:round/>
-                      <a:headEnd type="none" w="med" len="med"/>
-                      <a:tailEnd type="none" w="med" len="med"/>
-                    </a:lnL>
-                    <a:lnR w="9525" cap="flat" cmpd="sng" algn="ctr">
-                      <a:solidFill>
-                        <a:srgbClr val="DEE2E6"/>
-                      </a:solidFill>
-                      <a:prstDash val="solid"/>
-                      <a:round/>
-                      <a:headEnd type="none" w="med" len="med"/>
-                      <a:tailEnd type="none" w="med" len="med"/>
-                    </a:lnR>
-                    <a:lnT w="9525" cap="flat" cmpd="sng" algn="ctr">
-                      <a:solidFill>
-                        <a:srgbClr val="DEE2E6"/>
-                      </a:solidFill>
-                      <a:prstDash val="solid"/>
-                      <a:round/>
-                      <a:headEnd type="none" w="med" len="med"/>
-                      <a:tailEnd type="none" w="med" len="med"/>
-                    </a:lnT>
-                    <a:lnB w="9525" cap="flat" cmpd="sng" algn="ctr">
-                      <a:solidFill>
-                        <a:srgbClr val="DEE2E6"/>
-                      </a:solidFill>
-                      <a:prstDash val="solid"/>
-                      <a:round/>
-                      <a:headEnd type="none" w="med" len="med"/>
-                      <a:tailEnd type="none" w="med" len="med"/>
-                    </a:lnB>
-                    <a:solidFill>
-                      <a:srgbClr val="FFFFFF"/>
-                    </a:solidFill>
-                  </a:tcPr>
-                </a:tc>
-                <a:tc>
-                  <a:txBody>
-                    <a:bodyPr/>
-                    <a:lstStyle/>
-                    <a:p>
-                      <a:pPr algn="l"/>
-                      <a:r>
-                        <a:rPr lang="en-US" sz="1200">
-                          <a:effectLst/>
-                        </a:rPr>
-                        <a:t>Y</a:t>
-                      </a:r>
-                    </a:p>
-                  </a:txBody>
-                  <a:tcPr marL="30218" marR="30218" marT="15109" marB="15109" anchor="ctr">
-                    <a:lnL w="9525" cap="flat" cmpd="sng" algn="ctr">
-                      <a:solidFill>
-                        <a:srgbClr val="DEE2E6"/>
-                      </a:solidFill>
-                      <a:prstDash val="solid"/>
-                      <a:round/>
-                      <a:headEnd type="none" w="med" len="med"/>
-                      <a:tailEnd type="none" w="med" len="med"/>
-                    </a:lnL>
-                    <a:lnR w="9525" cap="flat" cmpd="sng" algn="ctr">
-                      <a:solidFill>
-                        <a:srgbClr val="DEE2E6"/>
-                      </a:solidFill>
-                      <a:prstDash val="solid"/>
-                      <a:round/>
-                      <a:headEnd type="none" w="med" len="med"/>
-                      <a:tailEnd type="none" w="med" len="med"/>
-                    </a:lnR>
-                    <a:lnT w="9525" cap="flat" cmpd="sng" algn="ctr">
-                      <a:solidFill>
-                        <a:srgbClr val="DEE2E6"/>
-                      </a:solidFill>
-                      <a:prstDash val="solid"/>
-                      <a:round/>
-                      <a:headEnd type="none" w="med" len="med"/>
-                      <a:tailEnd type="none" w="med" len="med"/>
-                    </a:lnT>
-                    <a:lnB w="9525" cap="flat" cmpd="sng" algn="ctr">
-                      <a:solidFill>
-                        <a:srgbClr val="DEE2E6"/>
-                      </a:solidFill>
-                      <a:prstDash val="solid"/>
-                      <a:round/>
-                      <a:headEnd type="none" w="med" len="med"/>
-                      <a:tailEnd type="none" w="med" len="med"/>
-                    </a:lnB>
-                    <a:solidFill>
-                      <a:srgbClr val="FFFFFF"/>
-                    </a:solidFill>
-                  </a:tcPr>
-                </a:tc>
-                <a:tc>
-                  <a:txBody>
-                    <a:bodyPr/>
-                    <a:lstStyle/>
-                    <a:p>
-                      <a:pPr algn="l"/>
-                      <a:r>
-                        <a:rPr lang="en-US" sz="1200">
-                          <a:effectLst/>
-                        </a:rPr>
-                        <a:t>see </a:t>
-                      </a:r>
-                      <a:r>
-                        <a:rPr lang="en-US" sz="1200" u="sng">
-                          <a:solidFill>
-                            <a:srgbClr val="0D6EFD"/>
-                          </a:solidFill>
-                          <a:effectLst/>
-                          <a:hlinkClick r:id="rId7"/>
-                        </a:rPr>
-                        <a:t>Section 5</a:t>
-                      </a:r>
-                      <a:r>
-                        <a:rPr lang="en-US" sz="1200">
-                          <a:effectLst/>
-                        </a:rPr>
-                        <a:t>, also stated explicitly in </a:t>
-                      </a:r>
-                      <a:r>
-                        <a:rPr lang="en-US" sz="1200" u="sng">
-                          <a:solidFill>
-                            <a:srgbClr val="0D6EFD"/>
-                          </a:solidFill>
-                          <a:effectLst/>
-                          <a:hlinkClick r:id="rId6"/>
-                        </a:rPr>
-                        <a:t>Section 8</a:t>
-                      </a:r>
-                      <a:endParaRPr lang="en-US" sz="1200">
-                        <a:effectLst/>
-                      </a:endParaRPr>
-                    </a:p>
-                  </a:txBody>
-                  <a:tcPr marL="30218" marR="30218" marT="15109" marB="15109" anchor="ctr">
-                    <a:lnL w="9525" cap="flat" cmpd="sng" algn="ctr">
-                      <a:solidFill>
-                        <a:srgbClr val="DEE2E6"/>
-                      </a:solidFill>
-                      <a:prstDash val="solid"/>
-                      <a:round/>
-                      <a:headEnd type="none" w="med" len="med"/>
-                      <a:tailEnd type="none" w="med" len="med"/>
-                    </a:lnL>
-                    <a:lnR w="9525" cap="flat" cmpd="sng" algn="ctr">
-                      <a:solidFill>
-                        <a:srgbClr val="DEE2E6"/>
-                      </a:solidFill>
-                      <a:prstDash val="solid"/>
-                      <a:round/>
-                      <a:headEnd type="none" w="med" len="med"/>
-                      <a:tailEnd type="none" w="med" len="med"/>
-                    </a:lnR>
-                    <a:lnT w="9525" cap="flat" cmpd="sng" algn="ctr">
-                      <a:solidFill>
-                        <a:srgbClr val="DEE2E6"/>
-                      </a:solidFill>
-                      <a:prstDash val="solid"/>
-                      <a:round/>
-                      <a:headEnd type="none" w="med" len="med"/>
-                      <a:tailEnd type="none" w="med" len="med"/>
-                    </a:lnT>
-                    <a:lnB w="9525" cap="flat" cmpd="sng" algn="ctr">
-                      <a:solidFill>
-                        <a:srgbClr val="DEE2E6"/>
-                      </a:solidFill>
-                      <a:prstDash val="solid"/>
-                      <a:round/>
-                      <a:headEnd type="none" w="med" len="med"/>
-                      <a:tailEnd type="none" w="med" len="med"/>
-                    </a:lnB>
-                    <a:solidFill>
-                      <a:srgbClr val="FFFFFF"/>
-                    </a:solidFill>
-                  </a:tcPr>
-                </a:tc>
-              </a:tr>
-              <a:tr h="492709">
-                <a:tc>
-                  <a:txBody>
-                    <a:bodyPr/>
-                    <a:lstStyle/>
-                    <a:p>
-                      <a:pPr algn="l"/>
-                      <a:r>
-                        <a:rPr lang="en-US" sz="1200">
-                          <a:effectLst/>
-                        </a:rPr>
-                        <a:t>R11: Enables off-box template expansion of &lt;running&gt;</a:t>
-                      </a:r>
-                    </a:p>
-                  </a:txBody>
-                  <a:tcPr marL="30218" marR="30218" marT="15109" marB="15109" anchor="ctr">
-                    <a:lnL w="9525" cap="flat" cmpd="sng" algn="ctr">
-                      <a:solidFill>
-                        <a:srgbClr val="DEE2E6"/>
-                      </a:solidFill>
-                      <a:prstDash val="solid"/>
-                      <a:round/>
-                      <a:headEnd type="none" w="med" len="med"/>
-                      <a:tailEnd type="none" w="med" len="med"/>
-                    </a:lnL>
-                    <a:lnR w="9525" cap="flat" cmpd="sng" algn="ctr">
-                      <a:solidFill>
-                        <a:srgbClr val="DEE2E6"/>
-                      </a:solidFill>
-                      <a:prstDash val="solid"/>
-                      <a:round/>
-                      <a:headEnd type="none" w="med" len="med"/>
-                      <a:tailEnd type="none" w="med" len="med"/>
-                    </a:lnR>
-                    <a:lnT w="9525" cap="flat" cmpd="sng" algn="ctr">
-                      <a:solidFill>
-                        <a:srgbClr val="DEE2E6"/>
-                      </a:solidFill>
-                      <a:prstDash val="solid"/>
-                      <a:round/>
-                      <a:headEnd type="none" w="med" len="med"/>
-                      <a:tailEnd type="none" w="med" len="med"/>
-                    </a:lnT>
-                    <a:lnB w="9525" cap="flat" cmpd="sng" algn="ctr">
-                      <a:solidFill>
-                        <a:srgbClr val="DEE2E6"/>
-                      </a:solidFill>
-                      <a:prstDash val="solid"/>
-                      <a:round/>
-                      <a:headEnd type="none" w="med" len="med"/>
-                      <a:tailEnd type="none" w="med" len="med"/>
-                    </a:lnB>
-                    <a:solidFill>
-                      <a:srgbClr val="FFFFFF"/>
-                    </a:solidFill>
-                  </a:tcPr>
-                </a:tc>
-                <a:tc>
-                  <a:txBody>
-                    <a:bodyPr/>
-                    <a:lstStyle/>
-                    <a:p>
-                      <a:pPr algn="l"/>
-                      <a:r>
-                        <a:rPr lang="en-US" sz="1200">
-                          <a:effectLst/>
-                        </a:rPr>
-                        <a:t>Y</a:t>
-                      </a:r>
-                    </a:p>
-                  </a:txBody>
-                  <a:tcPr marL="30218" marR="30218" marT="15109" marB="15109" anchor="ctr">
-                    <a:lnL w="9525" cap="flat" cmpd="sng" algn="ctr">
-                      <a:solidFill>
-                        <a:srgbClr val="DEE2E6"/>
-                      </a:solidFill>
-                      <a:prstDash val="solid"/>
-                      <a:round/>
-                      <a:headEnd type="none" w="med" len="med"/>
-                      <a:tailEnd type="none" w="med" len="med"/>
-                    </a:lnL>
-                    <a:lnR w="9525" cap="flat" cmpd="sng" algn="ctr">
-                      <a:solidFill>
-                        <a:srgbClr val="DEE2E6"/>
-                      </a:solidFill>
-                      <a:prstDash val="solid"/>
-                      <a:round/>
-                      <a:headEnd type="none" w="med" len="med"/>
-                      <a:tailEnd type="none" w="med" len="med"/>
-                    </a:lnR>
-                    <a:lnT w="9525" cap="flat" cmpd="sng" algn="ctr">
-                      <a:solidFill>
-                        <a:srgbClr val="DEE2E6"/>
-                      </a:solidFill>
-                      <a:prstDash val="solid"/>
-                      <a:round/>
-                      <a:headEnd type="none" w="med" len="med"/>
-                      <a:tailEnd type="none" w="med" len="med"/>
-                    </a:lnT>
-                    <a:lnB w="9525" cap="flat" cmpd="sng" algn="ctr">
-                      <a:solidFill>
-                        <a:srgbClr val="DEE2E6"/>
-                      </a:solidFill>
-                      <a:prstDash val="solid"/>
-                      <a:round/>
-                      <a:headEnd type="none" w="med" len="med"/>
-                      <a:tailEnd type="none" w="med" len="med"/>
-                    </a:lnB>
-                    <a:solidFill>
-                      <a:srgbClr val="FFFFFF"/>
-                    </a:solidFill>
-                  </a:tcPr>
-                </a:tc>
-                <a:tc>
-                  <a:txBody>
-                    <a:bodyPr/>
-                    <a:lstStyle/>
-                    <a:p>
-                      <a:pPr algn="l"/>
-                      <a:r>
-                        <a:rPr lang="en-US" sz="1200">
-                          <a:effectLst/>
-                        </a:rPr>
-                        <a:t>see </a:t>
-                      </a:r>
-                      <a:r>
-                        <a:rPr lang="en-US" sz="1200" u="sng">
-                          <a:solidFill>
-                            <a:srgbClr val="0D6EFD"/>
-                          </a:solidFill>
-                          <a:effectLst/>
-                          <a:hlinkClick r:id="rId5"/>
-                        </a:rPr>
-                        <a:t>Section 4.4</a:t>
-                      </a:r>
-                      <a:endParaRPr lang="en-US" sz="1200">
-                        <a:effectLst/>
-                      </a:endParaRPr>
-                    </a:p>
-                  </a:txBody>
-                  <a:tcPr marL="30218" marR="30218" marT="15109" marB="15109" anchor="ctr">
-                    <a:lnL w="9525" cap="flat" cmpd="sng" algn="ctr">
-                      <a:solidFill>
-                        <a:srgbClr val="DEE2E6"/>
-                      </a:solidFill>
-                      <a:prstDash val="solid"/>
-                      <a:round/>
-                      <a:headEnd type="none" w="med" len="med"/>
-                      <a:tailEnd type="none" w="med" len="med"/>
-                    </a:lnL>
-                    <a:lnR w="9525" cap="flat" cmpd="sng" algn="ctr">
-                      <a:solidFill>
-                        <a:srgbClr val="DEE2E6"/>
-                      </a:solidFill>
-                      <a:prstDash val="solid"/>
-                      <a:round/>
-                      <a:headEnd type="none" w="med" len="med"/>
-                      <a:tailEnd type="none" w="med" len="med"/>
-                    </a:lnR>
-                    <a:lnT w="9525" cap="flat" cmpd="sng" algn="ctr">
-                      <a:solidFill>
-                        <a:srgbClr val="DEE2E6"/>
-                      </a:solidFill>
-                      <a:prstDash val="solid"/>
-                      <a:round/>
-                      <a:headEnd type="none" w="med" len="med"/>
-                      <a:tailEnd type="none" w="med" len="med"/>
-                    </a:lnT>
-                    <a:lnB w="9525" cap="flat" cmpd="sng" algn="ctr">
-                      <a:solidFill>
-                        <a:srgbClr val="DEE2E6"/>
-                      </a:solidFill>
-                      <a:prstDash val="solid"/>
-                      <a:round/>
-                      <a:headEnd type="none" w="med" len="med"/>
-                      <a:tailEnd type="none" w="med" len="med"/>
-                    </a:lnB>
-                    <a:solidFill>
-                      <a:srgbClr val="FFFFFF"/>
-                    </a:solidFill>
-                  </a:tcPr>
-                </a:tc>
-              </a:tr>
-              <a:tr h="422766">
-                <a:tc>
-                  <a:txBody>
-                    <a:bodyPr/>
-                    <a:lstStyle/>
-                    <a:p>
-                      <a:pPr algn="l"/>
-                      <a:r>
-                        <a:rPr lang="en-US" sz="1200">
-                          <a:effectLst/>
-                        </a:rPr>
-                        <a:t>R12: Support limited regex in templates</a:t>
-                      </a:r>
-                    </a:p>
-                  </a:txBody>
-                  <a:tcPr marL="30218" marR="30218" marT="15109" marB="15109" anchor="ctr">
-                    <a:lnL w="9525" cap="flat" cmpd="sng" algn="ctr">
-                      <a:solidFill>
-                        <a:srgbClr val="DEE2E6"/>
-                      </a:solidFill>
-                      <a:prstDash val="solid"/>
-                      <a:round/>
-                      <a:headEnd type="none" w="med" len="med"/>
-                      <a:tailEnd type="none" w="med" len="med"/>
-                    </a:lnL>
-                    <a:lnR w="9525" cap="flat" cmpd="sng" algn="ctr">
-                      <a:solidFill>
-                        <a:srgbClr val="DEE2E6"/>
-                      </a:solidFill>
-                      <a:prstDash val="solid"/>
-                      <a:round/>
-                      <a:headEnd type="none" w="med" len="med"/>
-                      <a:tailEnd type="none" w="med" len="med"/>
-                    </a:lnR>
-                    <a:lnT w="9525" cap="flat" cmpd="sng" algn="ctr">
-                      <a:solidFill>
-                        <a:srgbClr val="DEE2E6"/>
-                      </a:solidFill>
-                      <a:prstDash val="solid"/>
-                      <a:round/>
-                      <a:headEnd type="none" w="med" len="med"/>
-                      <a:tailEnd type="none" w="med" len="med"/>
-                    </a:lnT>
-                    <a:lnB w="9525" cap="flat" cmpd="sng" algn="ctr">
-                      <a:solidFill>
-                        <a:srgbClr val="DEE2E6"/>
-                      </a:solidFill>
-                      <a:prstDash val="solid"/>
-                      <a:round/>
-                      <a:headEnd type="none" w="med" len="med"/>
-                      <a:tailEnd type="none" w="med" len="med"/>
-                    </a:lnB>
-                    <a:solidFill>
-                      <a:srgbClr val="FFFFFF"/>
-                    </a:solidFill>
-                  </a:tcPr>
-                </a:tc>
-                <a:tc>
-                  <a:txBody>
-                    <a:bodyPr/>
-                    <a:lstStyle/>
-                    <a:p>
-                      <a:pPr algn="l"/>
-                      <a:r>
-                        <a:rPr lang="en-US" sz="1200">
-                          <a:effectLst/>
-                        </a:rPr>
-                        <a:t>Y</a:t>
-                      </a:r>
-                    </a:p>
-                  </a:txBody>
-                  <a:tcPr marL="30218" marR="30218" marT="15109" marB="15109" anchor="ctr">
-                    <a:lnL w="9525" cap="flat" cmpd="sng" algn="ctr">
-                      <a:solidFill>
-                        <a:srgbClr val="DEE2E6"/>
-                      </a:solidFill>
-                      <a:prstDash val="solid"/>
-                      <a:round/>
-                      <a:headEnd type="none" w="med" len="med"/>
-                      <a:tailEnd type="none" w="med" len="med"/>
-                    </a:lnL>
-                    <a:lnR w="9525" cap="flat" cmpd="sng" algn="ctr">
-                      <a:solidFill>
-                        <a:srgbClr val="DEE2E6"/>
-                      </a:solidFill>
-                      <a:prstDash val="solid"/>
-                      <a:round/>
-                      <a:headEnd type="none" w="med" len="med"/>
-                      <a:tailEnd type="none" w="med" len="med"/>
-                    </a:lnR>
-                    <a:lnT w="9525" cap="flat" cmpd="sng" algn="ctr">
-                      <a:solidFill>
-                        <a:srgbClr val="DEE2E6"/>
-                      </a:solidFill>
-                      <a:prstDash val="solid"/>
-                      <a:round/>
-                      <a:headEnd type="none" w="med" len="med"/>
-                      <a:tailEnd type="none" w="med" len="med"/>
-                    </a:lnT>
-                    <a:lnB w="9525" cap="flat" cmpd="sng" algn="ctr">
-                      <a:solidFill>
-                        <a:srgbClr val="DEE2E6"/>
-                      </a:solidFill>
-                      <a:prstDash val="solid"/>
-                      <a:round/>
-                      <a:headEnd type="none" w="med" len="med"/>
-                      <a:tailEnd type="none" w="med" len="med"/>
-                    </a:lnB>
-                    <a:solidFill>
-                      <a:srgbClr val="FFFFFF"/>
-                    </a:solidFill>
-                  </a:tcPr>
-                </a:tc>
-                <a:tc>
-                  <a:txBody>
-                    <a:bodyPr/>
-                    <a:lstStyle/>
-                    <a:p>
-                      <a:pPr algn="l"/>
-                      <a:r>
-                        <a:rPr lang="en-US" sz="1200">
-                          <a:effectLst/>
-                        </a:rPr>
-                        <a:t>But needs more work, see </a:t>
-                      </a:r>
-                      <a:r>
-                        <a:rPr lang="en-US" sz="1200" u="sng">
-                          <a:solidFill>
-                            <a:srgbClr val="0D6EFD"/>
-                          </a:solidFill>
-                          <a:effectLst/>
-                          <a:hlinkClick r:id="rId8"/>
-                        </a:rPr>
-                        <a:t>Section 4.1.1</a:t>
-                      </a:r>
-                      <a:endParaRPr lang="en-US" sz="1200">
-                        <a:effectLst/>
-                      </a:endParaRPr>
-                    </a:p>
-                  </a:txBody>
-                  <a:tcPr marL="30218" marR="30218" marT="15109" marB="15109" anchor="ctr">
-                    <a:lnL w="9525" cap="flat" cmpd="sng" algn="ctr">
-                      <a:solidFill>
-                        <a:srgbClr val="DEE2E6"/>
-                      </a:solidFill>
-                      <a:prstDash val="solid"/>
-                      <a:round/>
-                      <a:headEnd type="none" w="med" len="med"/>
-                      <a:tailEnd type="none" w="med" len="med"/>
-                    </a:lnL>
-                    <a:lnR w="9525" cap="flat" cmpd="sng" algn="ctr">
-                      <a:solidFill>
-                        <a:srgbClr val="DEE2E6"/>
-                      </a:solidFill>
-                      <a:prstDash val="solid"/>
-                      <a:round/>
-                      <a:headEnd type="none" w="med" len="med"/>
-                      <a:tailEnd type="none" w="med" len="med"/>
-                    </a:lnR>
-                    <a:lnT w="9525" cap="flat" cmpd="sng" algn="ctr">
-                      <a:solidFill>
-                        <a:srgbClr val="DEE2E6"/>
-                      </a:solidFill>
-                      <a:prstDash val="solid"/>
-                      <a:round/>
-                      <a:headEnd type="none" w="med" len="med"/>
-                      <a:tailEnd type="none" w="med" len="med"/>
-                    </a:lnT>
-                    <a:lnB w="9525" cap="flat" cmpd="sng" algn="ctr">
-                      <a:solidFill>
-                        <a:srgbClr val="DEE2E6"/>
-                      </a:solidFill>
-                      <a:prstDash val="solid"/>
-                      <a:round/>
-                      <a:headEnd type="none" w="med" len="med"/>
-                      <a:tailEnd type="none" w="med" len="med"/>
-                    </a:lnB>
-                    <a:solidFill>
-                      <a:srgbClr val="FFFFFF"/>
-                    </a:solidFill>
-                  </a:tcPr>
-                </a:tc>
-              </a:tr>
-              <a:tr h="711900">
-                <a:tc>
-                  <a:txBody>
-                    <a:bodyPr/>
-                    <a:lstStyle/>
-                    <a:p>
-                      <a:pPr algn="l"/>
-                      <a:r>
-                        <a:rPr lang="en-US" sz="1200">
-                          <a:effectLst/>
-                        </a:rPr>
-                        <a:t>R13: Have a precedence rule when multiple templates are applied at a single node</a:t>
-                      </a:r>
-                    </a:p>
-                  </a:txBody>
-                  <a:tcPr marL="30218" marR="30218" marT="15109" marB="15109" anchor="ctr">
-                    <a:lnL w="9525" cap="flat" cmpd="sng" algn="ctr">
-                      <a:solidFill>
-                        <a:srgbClr val="DEE2E6"/>
-                      </a:solidFill>
-                      <a:prstDash val="solid"/>
-                      <a:round/>
-                      <a:headEnd type="none" w="med" len="med"/>
-                      <a:tailEnd type="none" w="med" len="med"/>
-                    </a:lnL>
-                    <a:lnR w="9525" cap="flat" cmpd="sng" algn="ctr">
-                      <a:solidFill>
-                        <a:srgbClr val="DEE2E6"/>
-                      </a:solidFill>
-                      <a:prstDash val="solid"/>
-                      <a:round/>
-                      <a:headEnd type="none" w="med" len="med"/>
-                      <a:tailEnd type="none" w="med" len="med"/>
-                    </a:lnR>
-                    <a:lnT w="9525" cap="flat" cmpd="sng" algn="ctr">
-                      <a:solidFill>
-                        <a:srgbClr val="DEE2E6"/>
-                      </a:solidFill>
-                      <a:prstDash val="solid"/>
-                      <a:round/>
-                      <a:headEnd type="none" w="med" len="med"/>
-                      <a:tailEnd type="none" w="med" len="med"/>
-                    </a:lnT>
-                    <a:lnB w="9525" cap="flat" cmpd="sng" algn="ctr">
-                      <a:solidFill>
-                        <a:srgbClr val="DEE2E6"/>
-                      </a:solidFill>
-                      <a:prstDash val="solid"/>
-                      <a:round/>
-                      <a:headEnd type="none" w="med" len="med"/>
-                      <a:tailEnd type="none" w="med" len="med"/>
-                    </a:lnB>
-                    <a:solidFill>
-                      <a:srgbClr val="FFFFFF"/>
-                    </a:solidFill>
-                  </a:tcPr>
-                </a:tc>
-                <a:tc>
-                  <a:txBody>
-                    <a:bodyPr/>
-                    <a:lstStyle/>
-                    <a:p>
-                      <a:pPr algn="l"/>
-                      <a:r>
-                        <a:rPr lang="en-US" sz="1200">
-                          <a:effectLst/>
-                        </a:rPr>
-                        <a:t>Y</a:t>
-                      </a:r>
-                    </a:p>
-                  </a:txBody>
-                  <a:tcPr marL="30218" marR="30218" marT="15109" marB="15109" anchor="ctr">
-                    <a:lnL w="9525" cap="flat" cmpd="sng" algn="ctr">
-                      <a:solidFill>
-                        <a:srgbClr val="DEE2E6"/>
-                      </a:solidFill>
-                      <a:prstDash val="solid"/>
-                      <a:round/>
-                      <a:headEnd type="none" w="med" len="med"/>
-                      <a:tailEnd type="none" w="med" len="med"/>
-                    </a:lnL>
-                    <a:lnR w="9525" cap="flat" cmpd="sng" algn="ctr">
-                      <a:solidFill>
-                        <a:srgbClr val="DEE2E6"/>
-                      </a:solidFill>
-                      <a:prstDash val="solid"/>
-                      <a:round/>
-                      <a:headEnd type="none" w="med" len="med"/>
-                      <a:tailEnd type="none" w="med" len="med"/>
-                    </a:lnR>
-                    <a:lnT w="9525" cap="flat" cmpd="sng" algn="ctr">
-                      <a:solidFill>
-                        <a:srgbClr val="DEE2E6"/>
-                      </a:solidFill>
-                      <a:prstDash val="solid"/>
-                      <a:round/>
-                      <a:headEnd type="none" w="med" len="med"/>
-                      <a:tailEnd type="none" w="med" len="med"/>
-                    </a:lnT>
-                    <a:lnB w="9525" cap="flat" cmpd="sng" algn="ctr">
-                      <a:solidFill>
-                        <a:srgbClr val="DEE2E6"/>
-                      </a:solidFill>
-                      <a:prstDash val="solid"/>
-                      <a:round/>
-                      <a:headEnd type="none" w="med" len="med"/>
-                      <a:tailEnd type="none" w="med" len="med"/>
-                    </a:lnB>
-                    <a:solidFill>
-                      <a:srgbClr val="FFFFFF"/>
-                    </a:solidFill>
-                  </a:tcPr>
-                </a:tc>
-                <a:tc>
-                  <a:txBody>
-                    <a:bodyPr/>
-                    <a:lstStyle/>
-                    <a:p>
-                      <a:pPr algn="l"/>
-                      <a:r>
-                        <a:rPr lang="en-US" sz="1200" dirty="0">
-                          <a:effectLst/>
-                        </a:rPr>
-                        <a:t>See </a:t>
-                      </a:r>
-                      <a:r>
-                        <a:rPr lang="en-US" sz="1200" u="sng" dirty="0">
-                          <a:solidFill>
-                            <a:srgbClr val="0D6EFD"/>
-                          </a:solidFill>
-                          <a:effectLst/>
-                          <a:hlinkClick r:id="rId5"/>
-                        </a:rPr>
-                        <a:t>Section 4.4</a:t>
-                      </a:r>
-                      <a:endParaRPr lang="en-US" sz="1200" dirty="0">
-                        <a:effectLst/>
-                      </a:endParaRPr>
-                    </a:p>
-                  </a:txBody>
-                  <a:tcPr marL="30218" marR="30218" marT="15109" marB="15109" anchor="ctr">
-                    <a:lnL w="9525" cap="flat" cmpd="sng" algn="ctr">
-                      <a:solidFill>
-                        <a:srgbClr val="DEE2E6"/>
-                      </a:solidFill>
-                      <a:prstDash val="solid"/>
-                      <a:round/>
-                      <a:headEnd type="none" w="med" len="med"/>
-                      <a:tailEnd type="none" w="med" len="med"/>
-                    </a:lnL>
-                    <a:lnR w="9525" cap="flat" cmpd="sng" algn="ctr">
-                      <a:solidFill>
-                        <a:srgbClr val="DEE2E6"/>
-                      </a:solidFill>
-                      <a:prstDash val="solid"/>
-                      <a:round/>
-                      <a:headEnd type="none" w="med" len="med"/>
-                      <a:tailEnd type="none" w="med" len="med"/>
-                    </a:lnR>
-                    <a:lnT w="9525" cap="flat" cmpd="sng" algn="ctr">
-                      <a:solidFill>
-                        <a:srgbClr val="DEE2E6"/>
-                      </a:solidFill>
-                      <a:prstDash val="solid"/>
-                      <a:round/>
-                      <a:headEnd type="none" w="med" len="med"/>
-                      <a:tailEnd type="none" w="med" len="med"/>
-                    </a:lnT>
-                    <a:lnB w="9525" cap="flat" cmpd="sng" algn="ctr">
-                      <a:solidFill>
-                        <a:srgbClr val="DEE2E6"/>
-                      </a:solidFill>
-                      <a:prstDash val="solid"/>
-                      <a:round/>
-                      <a:headEnd type="none" w="med" len="med"/>
-                      <a:tailEnd type="none" w="med" len="med"/>
-                    </a:lnB>
-                    <a:solidFill>
-                      <a:srgbClr val="FFFFFF"/>
-                    </a:solidFill>
-                  </a:tcPr>
-                </a:tc>
-              </a:tr>
-              <a:tr h="711900">
-                <a:tc>
-                  <a:txBody>
-                    <a:bodyPr/>
-                    <a:lstStyle/>
-                    <a:p>
-                      <a:pPr algn="l"/>
-                      <a:r>
-                        <a:rPr lang="en-US" sz="1200">
-                          <a:effectLst/>
-                        </a:rPr>
-                        <a:t>R14: The innermost template takes precedence when templates are applied at multiple ancestor nodes</a:t>
-                      </a:r>
-                    </a:p>
-                  </a:txBody>
-                  <a:tcPr marL="30218" marR="30218" marT="15109" marB="15109" anchor="ctr">
-                    <a:lnL w="9525" cap="flat" cmpd="sng" algn="ctr">
-                      <a:solidFill>
-                        <a:srgbClr val="DEE2E6"/>
-                      </a:solidFill>
-                      <a:prstDash val="solid"/>
-                      <a:round/>
-                      <a:headEnd type="none" w="med" len="med"/>
-                      <a:tailEnd type="none" w="med" len="med"/>
-                    </a:lnL>
-                    <a:lnR w="9525" cap="flat" cmpd="sng" algn="ctr">
-                      <a:solidFill>
-                        <a:srgbClr val="DEE2E6"/>
-                      </a:solidFill>
-                      <a:prstDash val="solid"/>
-                      <a:round/>
-                      <a:headEnd type="none" w="med" len="med"/>
-                      <a:tailEnd type="none" w="med" len="med"/>
-                    </a:lnR>
-                    <a:lnT w="9525" cap="flat" cmpd="sng" algn="ctr">
-                      <a:solidFill>
-                        <a:srgbClr val="DEE2E6"/>
-                      </a:solidFill>
-                      <a:prstDash val="solid"/>
-                      <a:round/>
-                      <a:headEnd type="none" w="med" len="med"/>
-                      <a:tailEnd type="none" w="med" len="med"/>
-                    </a:lnT>
-                    <a:lnB w="9525" cap="flat" cmpd="sng" algn="ctr">
-                      <a:solidFill>
-                        <a:srgbClr val="DEE2E6"/>
-                      </a:solidFill>
-                      <a:prstDash val="solid"/>
-                      <a:round/>
-                      <a:headEnd type="none" w="med" len="med"/>
-                      <a:tailEnd type="none" w="med" len="med"/>
-                    </a:lnB>
-                    <a:solidFill>
-                      <a:srgbClr val="FFFFFF"/>
-                    </a:solidFill>
-                  </a:tcPr>
-                </a:tc>
-                <a:tc>
-                  <a:txBody>
-                    <a:bodyPr/>
-                    <a:lstStyle/>
-                    <a:p>
-                      <a:pPr algn="l"/>
-                      <a:r>
-                        <a:rPr lang="en-US" sz="1200">
-                          <a:effectLst/>
-                        </a:rPr>
-                        <a:t>Y</a:t>
-                      </a:r>
-                    </a:p>
-                  </a:txBody>
-                  <a:tcPr marL="30218" marR="30218" marT="15109" marB="15109" anchor="ctr">
-                    <a:lnL w="9525" cap="flat" cmpd="sng" algn="ctr">
-                      <a:solidFill>
-                        <a:srgbClr val="DEE2E6"/>
-                      </a:solidFill>
-                      <a:prstDash val="solid"/>
-                      <a:round/>
-                      <a:headEnd type="none" w="med" len="med"/>
-                      <a:tailEnd type="none" w="med" len="med"/>
-                    </a:lnL>
-                    <a:lnR w="9525" cap="flat" cmpd="sng" algn="ctr">
-                      <a:solidFill>
-                        <a:srgbClr val="DEE2E6"/>
-                      </a:solidFill>
-                      <a:prstDash val="solid"/>
-                      <a:round/>
-                      <a:headEnd type="none" w="med" len="med"/>
-                      <a:tailEnd type="none" w="med" len="med"/>
-                    </a:lnR>
-                    <a:lnT w="9525" cap="flat" cmpd="sng" algn="ctr">
-                      <a:solidFill>
-                        <a:srgbClr val="DEE2E6"/>
-                      </a:solidFill>
-                      <a:prstDash val="solid"/>
-                      <a:round/>
-                      <a:headEnd type="none" w="med" len="med"/>
-                      <a:tailEnd type="none" w="med" len="med"/>
-                    </a:lnT>
-                    <a:lnB w="9525" cap="flat" cmpd="sng" algn="ctr">
-                      <a:solidFill>
-                        <a:srgbClr val="DEE2E6"/>
-                      </a:solidFill>
-                      <a:prstDash val="solid"/>
-                      <a:round/>
-                      <a:headEnd type="none" w="med" len="med"/>
-                      <a:tailEnd type="none" w="med" len="med"/>
-                    </a:lnB>
-                    <a:solidFill>
-                      <a:srgbClr val="FFFFFF"/>
-                    </a:solidFill>
-                  </a:tcPr>
-                </a:tc>
-                <a:tc>
-                  <a:txBody>
-                    <a:bodyPr/>
-                    <a:lstStyle/>
-                    <a:p>
-                      <a:pPr algn="l"/>
-                      <a:r>
-                        <a:rPr lang="en-US" sz="1200">
-                          <a:effectLst/>
-                        </a:rPr>
-                        <a:t>See </a:t>
-                      </a:r>
-                      <a:r>
-                        <a:rPr lang="en-US" sz="1200" u="sng">
-                          <a:solidFill>
-                            <a:srgbClr val="0D6EFD"/>
-                          </a:solidFill>
-                          <a:effectLst/>
-                          <a:hlinkClick r:id="rId5"/>
-                        </a:rPr>
-                        <a:t>Section 4.4</a:t>
-                      </a:r>
-                      <a:endParaRPr lang="en-US" sz="1200">
-                        <a:effectLst/>
-                      </a:endParaRPr>
-                    </a:p>
-                  </a:txBody>
-                  <a:tcPr marL="30218" marR="30218" marT="15109" marB="15109" anchor="ctr">
-                    <a:lnL w="9525" cap="flat" cmpd="sng" algn="ctr">
-                      <a:solidFill>
-                        <a:srgbClr val="DEE2E6"/>
-                      </a:solidFill>
-                      <a:prstDash val="solid"/>
-                      <a:round/>
-                      <a:headEnd type="none" w="med" len="med"/>
-                      <a:tailEnd type="none" w="med" len="med"/>
-                    </a:lnL>
-                    <a:lnR w="9525" cap="flat" cmpd="sng" algn="ctr">
-                      <a:solidFill>
-                        <a:srgbClr val="DEE2E6"/>
-                      </a:solidFill>
-                      <a:prstDash val="solid"/>
-                      <a:round/>
-                      <a:headEnd type="none" w="med" len="med"/>
-                      <a:tailEnd type="none" w="med" len="med"/>
-                    </a:lnR>
-                    <a:lnT w="9525" cap="flat" cmpd="sng" algn="ctr">
-                      <a:solidFill>
-                        <a:srgbClr val="DEE2E6"/>
-                      </a:solidFill>
-                      <a:prstDash val="solid"/>
-                      <a:round/>
-                      <a:headEnd type="none" w="med" len="med"/>
-                      <a:tailEnd type="none" w="med" len="med"/>
-                    </a:lnT>
-                    <a:lnB w="9525" cap="flat" cmpd="sng" algn="ctr">
-                      <a:solidFill>
-                        <a:srgbClr val="DEE2E6"/>
-                      </a:solidFill>
-                      <a:prstDash val="solid"/>
-                      <a:round/>
-                      <a:headEnd type="none" w="med" len="med"/>
-                      <a:tailEnd type="none" w="med" len="med"/>
-                    </a:lnB>
-                    <a:solidFill>
-                      <a:srgbClr val="FFFFFF"/>
-                    </a:solidFill>
-                  </a:tcPr>
-                </a:tc>
-              </a:tr>
-              <a:tr h="492709">
-                <a:tc>
-                  <a:txBody>
-                    <a:bodyPr/>
-                    <a:lstStyle/>
-                    <a:p>
-                      <a:pPr algn="l"/>
-                      <a:r>
-                        <a:rPr lang="en-US" sz="1200" dirty="0">
-                          <a:effectLst/>
-                        </a:rPr>
-                        <a:t>R15: Enable non-NMDA servers to return the expanded data</a:t>
-                      </a:r>
-                    </a:p>
-                  </a:txBody>
-                  <a:tcPr marL="30218" marR="30218" marT="15109" marB="15109" anchor="ctr">
-                    <a:lnL w="9525" cap="flat" cmpd="sng" algn="ctr">
-                      <a:solidFill>
-                        <a:srgbClr val="DEE2E6"/>
-                      </a:solidFill>
-                      <a:prstDash val="solid"/>
-                      <a:round/>
-                      <a:headEnd type="none" w="med" len="med"/>
-                      <a:tailEnd type="none" w="med" len="med"/>
-                    </a:lnL>
-                    <a:lnR w="9525" cap="flat" cmpd="sng" algn="ctr">
-                      <a:solidFill>
-                        <a:srgbClr val="DEE2E6"/>
-                      </a:solidFill>
-                      <a:prstDash val="solid"/>
-                      <a:round/>
-                      <a:headEnd type="none" w="med" len="med"/>
-                      <a:tailEnd type="none" w="med" len="med"/>
-                    </a:lnR>
-                    <a:lnT w="9525" cap="flat" cmpd="sng" algn="ctr">
-                      <a:solidFill>
-                        <a:srgbClr val="DEE2E6"/>
-                      </a:solidFill>
-                      <a:prstDash val="solid"/>
-                      <a:round/>
-                      <a:headEnd type="none" w="med" len="med"/>
-                      <a:tailEnd type="none" w="med" len="med"/>
-                    </a:lnT>
-                    <a:lnB w="9525" cap="flat" cmpd="sng" algn="ctr">
-                      <a:solidFill>
-                        <a:srgbClr val="DEE2E6"/>
-                      </a:solidFill>
-                      <a:prstDash val="solid"/>
-                      <a:round/>
-                      <a:headEnd type="none" w="med" len="med"/>
-                      <a:tailEnd type="none" w="med" len="med"/>
-                    </a:lnB>
-                    <a:solidFill>
-                      <a:schemeClr val="accent4">
-                        <a:lumMod val="20000"/>
-                        <a:lumOff val="80000"/>
+                      <a:schemeClr val="bg1">
+                        <a:alpha val="17000"/>
                       </a:schemeClr>
                     </a:solidFill>
                   </a:tcPr>
@@ -7350,11 +6514,19 @@
                     <a:p>
                       <a:pPr algn="l"/>
                       <a:r>
-                        <a:rPr lang="en-US" sz="1200" dirty="0">
+                        <a:rPr lang="en-US" sz="1200" b="0" i="0" u="sng" dirty="0" smtClean="0">
+                          <a:solidFill>
+                            <a:srgbClr val="0D6EFD"/>
+                          </a:solidFill>
                           <a:effectLst/>
+                          <a:latin typeface="Inter"/>
+                          <a:hlinkClick r:id="rId14"/>
                         </a:rPr>
-                        <a:t>N</a:t>
+                        <a:t>Requirement #10</a:t>
                       </a:r>
+                      <a:endParaRPr lang="en-US" sz="1200" dirty="0">
+                        <a:effectLst/>
+                      </a:endParaRPr>
                     </a:p>
                   </a:txBody>
                   <a:tcPr marL="30218" marR="30218" marT="15109" marB="15109" anchor="ctr">
@@ -7395,442 +6567,8 @@
                       <a:tailEnd type="none" w="med" len="med"/>
                     </a:lnB>
                     <a:solidFill>
-                      <a:schemeClr val="accent4">
-                        <a:lumMod val="20000"/>
-                        <a:lumOff val="80000"/>
-                      </a:schemeClr>
-                    </a:solidFill>
-                  </a:tcPr>
-                </a:tc>
-                <a:tc>
-                  <a:txBody>
-                    <a:bodyPr/>
-                    <a:lstStyle/>
-                    <a:p>
-                      <a:pPr algn="l"/>
-                      <a:r>
-                        <a:rPr lang="en-US" sz="1200">
-                          <a:effectLst/>
-                        </a:rPr>
-                        <a:t>have a dedicated section (</a:t>
-                      </a:r>
-                      <a:r>
-                        <a:rPr lang="en-US" sz="1200" u="sng">
-                          <a:solidFill>
-                            <a:srgbClr val="0D6EFD"/>
-                          </a:solidFill>
-                          <a:effectLst/>
-                          <a:hlinkClick r:id="rId9"/>
-                        </a:rPr>
-                        <a:t>Section 6</a:t>
-                      </a:r>
-                      <a:r>
-                        <a:rPr lang="en-US" sz="1200">
-                          <a:effectLst/>
-                        </a:rPr>
-                        <a:t>) for this, but empty now</a:t>
-                      </a:r>
-                    </a:p>
-                  </a:txBody>
-                  <a:tcPr marL="30218" marR="30218" marT="15109" marB="15109" anchor="ctr">
-                    <a:lnL w="9525" cap="flat" cmpd="sng" algn="ctr">
-                      <a:solidFill>
-                        <a:srgbClr val="DEE2E6"/>
-                      </a:solidFill>
-                      <a:prstDash val="solid"/>
-                      <a:round/>
-                      <a:headEnd type="none" w="med" len="med"/>
-                      <a:tailEnd type="none" w="med" len="med"/>
-                    </a:lnL>
-                    <a:lnR w="9525" cap="flat" cmpd="sng" algn="ctr">
-                      <a:solidFill>
-                        <a:srgbClr val="DEE2E6"/>
-                      </a:solidFill>
-                      <a:prstDash val="solid"/>
-                      <a:round/>
-                      <a:headEnd type="none" w="med" len="med"/>
-                      <a:tailEnd type="none" w="med" len="med"/>
-                    </a:lnR>
-                    <a:lnT w="9525" cap="flat" cmpd="sng" algn="ctr">
-                      <a:solidFill>
-                        <a:srgbClr val="DEE2E6"/>
-                      </a:solidFill>
-                      <a:prstDash val="solid"/>
-                      <a:round/>
-                      <a:headEnd type="none" w="med" len="med"/>
-                      <a:tailEnd type="none" w="med" len="med"/>
-                    </a:lnT>
-                    <a:lnB w="9525" cap="flat" cmpd="sng" algn="ctr">
-                      <a:solidFill>
-                        <a:srgbClr val="DEE2E6"/>
-                      </a:solidFill>
-                      <a:prstDash val="solid"/>
-                      <a:round/>
-                      <a:headEnd type="none" w="med" len="med"/>
-                      <a:tailEnd type="none" w="med" len="med"/>
-                    </a:lnB>
-                    <a:solidFill>
-                      <a:schemeClr val="accent4">
-                        <a:lumMod val="20000"/>
-                        <a:lumOff val="80000"/>
-                      </a:schemeClr>
-                    </a:solidFill>
-                  </a:tcPr>
-                </a:tc>
-              </a:tr>
-              <a:tr h="604176">
-                <a:tc>
-                  <a:txBody>
-                    <a:bodyPr/>
-                    <a:lstStyle/>
-                    <a:p>
-                      <a:pPr algn="l"/>
-                      <a:r>
-                        <a:rPr lang="en-US" sz="1200" dirty="0">
-                          <a:effectLst/>
-                        </a:rPr>
-                        <a:t>Not discussed: R16: exclude templates applied at ancestor nodes</a:t>
-                      </a:r>
-                    </a:p>
-                  </a:txBody>
-                  <a:tcPr marL="30218" marR="30218" marT="15109" marB="15109" anchor="ctr">
-                    <a:lnL w="9525" cap="flat" cmpd="sng" algn="ctr">
-                      <a:solidFill>
-                        <a:srgbClr val="DEE2E6"/>
-                      </a:solidFill>
-                      <a:prstDash val="solid"/>
-                      <a:round/>
-                      <a:headEnd type="none" w="med" len="med"/>
-                      <a:tailEnd type="none" w="med" len="med"/>
-                    </a:lnL>
-                    <a:lnR w="9525" cap="flat" cmpd="sng" algn="ctr">
-                      <a:solidFill>
-                        <a:srgbClr val="DEE2E6"/>
-                      </a:solidFill>
-                      <a:prstDash val="solid"/>
-                      <a:round/>
-                      <a:headEnd type="none" w="med" len="med"/>
-                      <a:tailEnd type="none" w="med" len="med"/>
-                    </a:lnR>
-                    <a:lnT w="9525" cap="flat" cmpd="sng" algn="ctr">
-                      <a:solidFill>
-                        <a:srgbClr val="DEE2E6"/>
-                      </a:solidFill>
-                      <a:prstDash val="solid"/>
-                      <a:round/>
-                      <a:headEnd type="none" w="med" len="med"/>
-                      <a:tailEnd type="none" w="med" len="med"/>
-                    </a:lnT>
-                    <a:lnB w="9525" cap="flat" cmpd="sng" algn="ctr">
-                      <a:solidFill>
-                        <a:srgbClr val="DEE2E6"/>
-                      </a:solidFill>
-                      <a:prstDash val="solid"/>
-                      <a:round/>
-                      <a:headEnd type="none" w="med" len="med"/>
-                      <a:tailEnd type="none" w="med" len="med"/>
-                    </a:lnB>
-                    <a:solidFill>
-                      <a:schemeClr val="accent4">
-                        <a:lumMod val="20000"/>
-                        <a:lumOff val="80000"/>
-                      </a:schemeClr>
-                    </a:solidFill>
-                  </a:tcPr>
-                </a:tc>
-                <a:tc>
-                  <a:txBody>
-                    <a:bodyPr/>
-                    <a:lstStyle/>
-                    <a:p>
-                      <a:pPr algn="l"/>
-                      <a:r>
-                        <a:rPr lang="en-US" sz="1200" dirty="0">
-                          <a:effectLst/>
-                        </a:rPr>
-                        <a:t>N</a:t>
-                      </a:r>
-                    </a:p>
-                  </a:txBody>
-                  <a:tcPr marL="30218" marR="30218" marT="15109" marB="15109" anchor="ctr">
-                    <a:lnL w="9525" cap="flat" cmpd="sng" algn="ctr">
-                      <a:solidFill>
-                        <a:srgbClr val="DEE2E6"/>
-                      </a:solidFill>
-                      <a:prstDash val="solid"/>
-                      <a:round/>
-                      <a:headEnd type="none" w="med" len="med"/>
-                      <a:tailEnd type="none" w="med" len="med"/>
-                    </a:lnL>
-                    <a:lnR w="9525" cap="flat" cmpd="sng" algn="ctr">
-                      <a:solidFill>
-                        <a:srgbClr val="DEE2E6"/>
-                      </a:solidFill>
-                      <a:prstDash val="solid"/>
-                      <a:round/>
-                      <a:headEnd type="none" w="med" len="med"/>
-                      <a:tailEnd type="none" w="med" len="med"/>
-                    </a:lnR>
-                    <a:lnT w="9525" cap="flat" cmpd="sng" algn="ctr">
-                      <a:solidFill>
-                        <a:srgbClr val="DEE2E6"/>
-                      </a:solidFill>
-                      <a:prstDash val="solid"/>
-                      <a:round/>
-                      <a:headEnd type="none" w="med" len="med"/>
-                      <a:tailEnd type="none" w="med" len="med"/>
-                    </a:lnT>
-                    <a:lnB w="9525" cap="flat" cmpd="sng" algn="ctr">
-                      <a:solidFill>
-                        <a:srgbClr val="DEE2E6"/>
-                      </a:solidFill>
-                      <a:prstDash val="solid"/>
-                      <a:round/>
-                      <a:headEnd type="none" w="med" len="med"/>
-                      <a:tailEnd type="none" w="med" len="med"/>
-                    </a:lnB>
-                    <a:solidFill>
-                      <a:schemeClr val="accent4">
-                        <a:lumMod val="20000"/>
-                        <a:lumOff val="80000"/>
-                      </a:schemeClr>
-                    </a:solidFill>
-                  </a:tcPr>
-                </a:tc>
-                <a:tc>
-                  <a:txBody>
-                    <a:bodyPr/>
-                    <a:lstStyle/>
-                    <a:p>
-                      <a:pPr algn="l"/>
-                      <a:r>
-                        <a:rPr lang="en-US" sz="1200" dirty="0">
-                          <a:effectLst/>
-                        </a:rPr>
-                        <a:t>Seems to add some complexity, needs further discussion</a:t>
-                      </a:r>
-                    </a:p>
-                  </a:txBody>
-                  <a:tcPr marL="30218" marR="30218" marT="15109" marB="15109" anchor="ctr">
-                    <a:lnL w="9525" cap="flat" cmpd="sng" algn="ctr">
-                      <a:solidFill>
-                        <a:srgbClr val="DEE2E6"/>
-                      </a:solidFill>
-                      <a:prstDash val="solid"/>
-                      <a:round/>
-                      <a:headEnd type="none" w="med" len="med"/>
-                      <a:tailEnd type="none" w="med" len="med"/>
-                    </a:lnL>
-                    <a:lnR w="9525" cap="flat" cmpd="sng" algn="ctr">
-                      <a:solidFill>
-                        <a:srgbClr val="DEE2E6"/>
-                      </a:solidFill>
-                      <a:prstDash val="solid"/>
-                      <a:round/>
-                      <a:headEnd type="none" w="med" len="med"/>
-                      <a:tailEnd type="none" w="med" len="med"/>
-                    </a:lnR>
-                    <a:lnT w="9525" cap="flat" cmpd="sng" algn="ctr">
-                      <a:solidFill>
-                        <a:srgbClr val="DEE2E6"/>
-                      </a:solidFill>
-                      <a:prstDash val="solid"/>
-                      <a:round/>
-                      <a:headEnd type="none" w="med" len="med"/>
-                      <a:tailEnd type="none" w="med" len="med"/>
-                    </a:lnT>
-                    <a:lnB w="9525" cap="flat" cmpd="sng" algn="ctr">
-                      <a:solidFill>
-                        <a:srgbClr val="DEE2E6"/>
-                      </a:solidFill>
-                      <a:prstDash val="solid"/>
-                      <a:round/>
-                      <a:headEnd type="none" w="med" len="med"/>
-                      <a:tailEnd type="none" w="med" len="med"/>
-                    </a:lnB>
-                    <a:solidFill>
-                      <a:schemeClr val="accent4">
-                        <a:lumMod val="20000"/>
-                        <a:lumOff val="80000"/>
-                      </a:schemeClr>
-                    </a:solidFill>
-                  </a:tcPr>
-                </a:tc>
-              </a:tr>
-              <a:tr h="711900">
-                <a:tc>
-                  <a:txBody>
-                    <a:bodyPr/>
-                    <a:lstStyle/>
-                    <a:p>
-                      <a:pPr algn="l"/>
-                      <a:r>
-                        <a:rPr lang="en-US" sz="1200" dirty="0">
-                          <a:effectLst/>
-                        </a:rPr>
-                        <a:t>Not discussed: R17: Annotations to determine which template a node was applied from</a:t>
-                      </a:r>
-                    </a:p>
-                  </a:txBody>
-                  <a:tcPr marL="30218" marR="30218" marT="15109" marB="15109" anchor="ctr">
-                    <a:lnL w="9525" cap="flat" cmpd="sng" algn="ctr">
-                      <a:solidFill>
-                        <a:srgbClr val="DEE2E6"/>
-                      </a:solidFill>
-                      <a:prstDash val="solid"/>
-                      <a:round/>
-                      <a:headEnd type="none" w="med" len="med"/>
-                      <a:tailEnd type="none" w="med" len="med"/>
-                    </a:lnL>
-                    <a:lnR w="9525" cap="flat" cmpd="sng" algn="ctr">
-                      <a:solidFill>
-                        <a:srgbClr val="DEE2E6"/>
-                      </a:solidFill>
-                      <a:prstDash val="solid"/>
-                      <a:round/>
-                      <a:headEnd type="none" w="med" len="med"/>
-                      <a:tailEnd type="none" w="med" len="med"/>
-                    </a:lnR>
-                    <a:lnT w="9525" cap="flat" cmpd="sng" algn="ctr">
-                      <a:solidFill>
-                        <a:srgbClr val="DEE2E6"/>
-                      </a:solidFill>
-                      <a:prstDash val="solid"/>
-                      <a:round/>
-                      <a:headEnd type="none" w="med" len="med"/>
-                      <a:tailEnd type="none" w="med" len="med"/>
-                    </a:lnT>
-                    <a:lnB w="9525" cap="flat" cmpd="sng" algn="ctr">
-                      <a:solidFill>
-                        <a:srgbClr val="DEE2E6"/>
-                      </a:solidFill>
-                      <a:prstDash val="solid"/>
-                      <a:round/>
-                      <a:headEnd type="none" w="med" len="med"/>
-                      <a:tailEnd type="none" w="med" len="med"/>
-                    </a:lnB>
-                    <a:solidFill>
-                      <a:schemeClr val="accent4">
-                        <a:lumMod val="20000"/>
-                        <a:lumOff val="80000"/>
-                      </a:schemeClr>
-                    </a:solidFill>
-                  </a:tcPr>
-                </a:tc>
-                <a:tc>
-                  <a:txBody>
-                    <a:bodyPr/>
-                    <a:lstStyle/>
-                    <a:p>
-                      <a:pPr algn="l"/>
-                      <a:r>
-                        <a:rPr lang="en-US" sz="1200" dirty="0">
-                          <a:effectLst/>
-                        </a:rPr>
-                        <a:t>N</a:t>
-                      </a:r>
-                    </a:p>
-                  </a:txBody>
-                  <a:tcPr marL="30218" marR="30218" marT="15109" marB="15109" anchor="ctr">
-                    <a:lnL w="9525" cap="flat" cmpd="sng" algn="ctr">
-                      <a:solidFill>
-                        <a:srgbClr val="DEE2E6"/>
-                      </a:solidFill>
-                      <a:prstDash val="solid"/>
-                      <a:round/>
-                      <a:headEnd type="none" w="med" len="med"/>
-                      <a:tailEnd type="none" w="med" len="med"/>
-                    </a:lnL>
-                    <a:lnR w="9525" cap="flat" cmpd="sng" algn="ctr">
-                      <a:solidFill>
-                        <a:srgbClr val="DEE2E6"/>
-                      </a:solidFill>
-                      <a:prstDash val="solid"/>
-                      <a:round/>
-                      <a:headEnd type="none" w="med" len="med"/>
-                      <a:tailEnd type="none" w="med" len="med"/>
-                    </a:lnR>
-                    <a:lnT w="9525" cap="flat" cmpd="sng" algn="ctr">
-                      <a:solidFill>
-                        <a:srgbClr val="DEE2E6"/>
-                      </a:solidFill>
-                      <a:prstDash val="solid"/>
-                      <a:round/>
-                      <a:headEnd type="none" w="med" len="med"/>
-                      <a:tailEnd type="none" w="med" len="med"/>
-                    </a:lnT>
-                    <a:lnB w="9525" cap="flat" cmpd="sng" algn="ctr">
-                      <a:solidFill>
-                        <a:srgbClr val="DEE2E6"/>
-                      </a:solidFill>
-                      <a:prstDash val="solid"/>
-                      <a:round/>
-                      <a:headEnd type="none" w="med" len="med"/>
-                      <a:tailEnd type="none" w="med" len="med"/>
-                    </a:lnB>
-                    <a:solidFill>
-                      <a:schemeClr val="accent4">
-                        <a:lumMod val="20000"/>
-                        <a:lumOff val="80000"/>
-                      </a:schemeClr>
-                    </a:solidFill>
-                  </a:tcPr>
-                </a:tc>
-                <a:tc>
-                  <a:txBody>
-                    <a:bodyPr/>
-                    <a:lstStyle/>
-                    <a:p>
-                      <a:pPr algn="l"/>
-                      <a:r>
-                        <a:rPr lang="en-US" sz="1200" dirty="0">
-                          <a:effectLst/>
-                        </a:rPr>
-                        <a:t>Needs further discussion</a:t>
-                      </a:r>
-                    </a:p>
-                  </a:txBody>
-                  <a:tcPr marL="30218" marR="30218" marT="15109" marB="15109" anchor="ctr">
-                    <a:lnL w="9525" cap="flat" cmpd="sng" algn="ctr">
-                      <a:solidFill>
-                        <a:srgbClr val="DEE2E6"/>
-                      </a:solidFill>
-                      <a:prstDash val="solid"/>
-                      <a:round/>
-                      <a:headEnd type="none" w="med" len="med"/>
-                      <a:tailEnd type="none" w="med" len="med"/>
-                    </a:lnL>
-                    <a:lnR w="9525" cap="flat" cmpd="sng" algn="ctr">
-                      <a:solidFill>
-                        <a:srgbClr val="DEE2E6"/>
-                      </a:solidFill>
-                      <a:prstDash val="solid"/>
-                      <a:round/>
-                      <a:headEnd type="none" w="med" len="med"/>
-                      <a:tailEnd type="none" w="med" len="med"/>
-                    </a:lnR>
-                    <a:lnT w="9525" cap="flat" cmpd="sng" algn="ctr">
-                      <a:solidFill>
-                        <a:srgbClr val="DEE2E6"/>
-                      </a:solidFill>
-                      <a:prstDash val="solid"/>
-                      <a:round/>
-                      <a:headEnd type="none" w="med" len="med"/>
-                      <a:tailEnd type="none" w="med" len="med"/>
-                    </a:lnT>
-                    <a:lnB w="9525" cap="flat" cmpd="sng" algn="ctr">
-                      <a:solidFill>
-                        <a:srgbClr val="DEE2E6"/>
-                      </a:solidFill>
-                      <a:prstDash val="solid"/>
-                      <a:round/>
-                      <a:headEnd type="none" w="med" len="med"/>
-                      <a:tailEnd type="none" w="med" len="med"/>
-                    </a:lnB>
-                    <a:solidFill>
-                      <a:schemeClr val="accent4">
-                        <a:lumMod val="20000"/>
-                        <a:lumOff val="80000"/>
+                      <a:schemeClr val="bg1">
+                        <a:alpha val="17000"/>
                       </a:schemeClr>
                     </a:solidFill>
                   </a:tcPr>
@@ -7842,68 +6580,10 @@
       </p:graphicFrame>
       <p:sp>
         <p:nvSpPr>
-          <p:cNvPr id="7" name="文本框 6"/>
-          <p:cNvSpPr txBox="1"/>
-          <p:nvPr/>
-        </p:nvSpPr>
-        <p:spPr>
-          <a:xfrm>
-            <a:off x="59652" y="6292691"/>
-            <a:ext cx="11673685" cy="261610"/>
-          </a:xfrm>
-          <a:prstGeom prst="rect">
-            <a:avLst/>
-          </a:prstGeom>
-          <a:noFill/>
-        </p:spPr>
-        <p:txBody>
-          <a:bodyPr wrap="square" rtlCol="0">
-            <a:spAutoFit/>
-          </a:bodyPr>
-          <a:lstStyle/>
-          <a:p>
-            <a:r>
-              <a:rPr lang="en-US" sz="1100" dirty="0"/>
-              <a:t>Notes</a:t>
-            </a:r>
-            <a:r>
-              <a:rPr lang="en-US" sz="1100" dirty="0" smtClean="0"/>
-              <a:t>: Requirements </a:t>
-            </a:r>
-            <a:r>
-              <a:rPr lang="en-US" sz="1100" dirty="0"/>
-              <a:t>that did not </a:t>
-            </a:r>
-            <a:r>
-              <a:rPr lang="en-US" sz="1100" dirty="0" smtClean="0"/>
-              <a:t>have consensus are not </a:t>
-            </a:r>
-            <a:r>
-              <a:rPr lang="en-US" sz="1100" dirty="0"/>
-              <a:t>included. Editorial </a:t>
-            </a:r>
-            <a:r>
-              <a:rPr lang="en-US" sz="1100" dirty="0" smtClean="0"/>
-              <a:t>requirements such </a:t>
-            </a:r>
-            <a:r>
-              <a:rPr lang="en-US" sz="1100" dirty="0"/>
-              <a:t>as adding examples, </a:t>
-            </a:r>
-            <a:r>
-              <a:rPr lang="en-US" sz="1100" dirty="0" smtClean="0"/>
-              <a:t>are also not included in this page. </a:t>
-            </a:r>
-            <a:endParaRPr lang="en-US" sz="1100" dirty="0"/>
-          </a:p>
-        </p:txBody>
-      </p:sp>
-      <p:sp>
-        <p:nvSpPr>
           <p:cNvPr id="8" name="Slide Number Placeholder 4">
             <a:extLst>
               <a:ext uri="{FF2B5EF4-FFF2-40B4-BE49-F238E27FC236}">
-                <a16:creationId xmlns:a16="http://schemas.microsoft.com/office/drawing/2014/main" xmlns="" id="{3EE13A6B-CD5C-2B6B-7266-342C4EAFD494}"/>
+                <a16:creationId xmlns="" xmlns:a16="http://schemas.microsoft.com/office/drawing/2014/main" id="{3EE13A6B-CD5C-2B6B-7266-342C4EAFD494}"/>
               </a:ext>
             </a:extLst>
           </p:cNvPr>
@@ -7929,6 +6609,36 @@
               <a:t>4</a:t>
             </a:r>
             <a:endParaRPr lang="en-US" dirty="0"/>
+          </a:p>
+        </p:txBody>
+      </p:sp>
+      <p:sp>
+        <p:nvSpPr>
+          <p:cNvPr id="9" name="文本框 8"/>
+          <p:cNvSpPr txBox="1"/>
+          <p:nvPr/>
+        </p:nvSpPr>
+        <p:spPr>
+          <a:xfrm>
+            <a:off x="457931" y="6277302"/>
+            <a:ext cx="11403599" cy="276999"/>
+          </a:xfrm>
+          <a:prstGeom prst="rect">
+            <a:avLst/>
+          </a:prstGeom>
+          <a:noFill/>
+        </p:spPr>
+        <p:txBody>
+          <a:bodyPr wrap="square" rtlCol="0">
+            <a:spAutoFit/>
+          </a:bodyPr>
+          <a:lstStyle/>
+          <a:p>
+            <a:r>
+              <a:rPr lang="en-US" sz="1200" b="1" i="1" dirty="0" smtClean="0"/>
+              <a:t>Notes: Requirements that is “Mostly Opposed” in the polling have not been taken into account, nor have editorial requirements. </a:t>
+            </a:r>
+            <a:endParaRPr lang="en-US" sz="1200" b="1" i="1" dirty="0"/>
           </a:p>
         </p:txBody>
       </p:sp>
@@ -7979,147 +6689,24 @@
             <p:ph type="title"/>
           </p:nvPr>
         </p:nvSpPr>
-        <p:spPr/>
+        <p:spPr>
+          <a:xfrm>
+            <a:off x="420486" y="0"/>
+            <a:ext cx="11478490" cy="790344"/>
+          </a:xfrm>
+        </p:spPr>
         <p:txBody>
           <a:bodyPr>
             <a:normAutofit/>
           </a:bodyPr>
           <a:lstStyle/>
           <a:p>
-            <a:r>
-              <a:rPr lang="en-US" sz="3600" b="1" dirty="0" smtClean="0"/>
-              <a:t>Open Discussion: MUST template be valid when defined?</a:t>
+            <a:pPr algn="ctr"/>
+            <a:r>
+              <a:rPr lang="en-US" altLang="zh-CN" sz="3600" b="1" dirty="0" smtClean="0"/>
+              <a:t>Requirement Implementation Status (cont.)</a:t>
             </a:r>
             <a:endParaRPr lang="en-US" sz="3600" b="1" dirty="0"/>
-          </a:p>
-        </p:txBody>
-      </p:sp>
-      <p:sp>
-        <p:nvSpPr>
-          <p:cNvPr id="3" name="内容占位符 2"/>
-          <p:cNvSpPr>
-            <a:spLocks noGrp="1"/>
-          </p:cNvSpPr>
-          <p:nvPr>
-            <p:ph idx="1"/>
-          </p:nvPr>
-        </p:nvSpPr>
-        <p:spPr>
-          <a:xfrm>
-            <a:off x="838200" y="1825625"/>
-            <a:ext cx="10915996" cy="4658302"/>
-          </a:xfrm>
-        </p:spPr>
-        <p:txBody>
-          <a:bodyPr>
-            <a:normAutofit lnSpcReduction="10000"/>
-          </a:bodyPr>
-          <a:lstStyle/>
-          <a:p>
-            <a:pPr marL="0" indent="0">
-              <a:buNone/>
-            </a:pPr>
-            <a:r>
-              <a:rPr lang="en-US" dirty="0" smtClean="0"/>
-              <a:t>The current draft states:</a:t>
-            </a:r>
-          </a:p>
-          <a:p>
-            <a:r>
-              <a:rPr lang="en-US" dirty="0" smtClean="0"/>
-              <a:t>In </a:t>
-            </a:r>
-            <a:r>
-              <a:rPr lang="en-US" dirty="0"/>
-              <a:t>&lt;running&gt;:</a:t>
-            </a:r>
-          </a:p>
-          <a:p>
-            <a:pPr lvl="1"/>
-            <a:r>
-              <a:rPr lang="en-US" dirty="0"/>
-              <a:t>Template content does not have to be fully valid</a:t>
-            </a:r>
-          </a:p>
-          <a:p>
-            <a:pPr lvl="2"/>
-            <a:r>
-              <a:rPr lang="en-US" dirty="0" smtClean="0"/>
-              <a:t>e.g., </a:t>
-            </a:r>
-            <a:r>
-              <a:rPr lang="en-US" dirty="0"/>
-              <a:t>mandatory nodes can be missing</a:t>
-            </a:r>
-          </a:p>
-          <a:p>
-            <a:pPr lvl="1"/>
-            <a:r>
-              <a:rPr lang="en-US" dirty="0"/>
-              <a:t>Where validation is possible (</a:t>
-            </a:r>
-            <a:r>
-              <a:rPr lang="en-US" dirty="0" smtClean="0"/>
-              <a:t>e.g., </a:t>
-            </a:r>
-            <a:r>
-              <a:rPr lang="en-US" dirty="0"/>
-              <a:t>range, pattern, length), the server SHOULD enforce these constraints in the template</a:t>
-            </a:r>
-          </a:p>
-          <a:p>
-            <a:r>
-              <a:rPr lang="en-US" dirty="0"/>
-              <a:t>The contents of &lt;intended&gt; (after template expansion) </a:t>
-            </a:r>
-            <a:r>
-              <a:rPr lang="en-US" dirty="0" smtClean="0"/>
-              <a:t>MUST always </a:t>
-            </a:r>
-            <a:r>
-              <a:rPr lang="en-US" dirty="0"/>
-              <a:t>be </a:t>
-            </a:r>
-            <a:r>
-              <a:rPr lang="en-US" dirty="0" smtClean="0"/>
-              <a:t>valid</a:t>
-            </a:r>
-          </a:p>
-          <a:p>
-            <a:endParaRPr lang="en-US" dirty="0"/>
-          </a:p>
-          <a:p>
-            <a:pPr marL="0" indent="0">
-              <a:buNone/>
-            </a:pPr>
-            <a:r>
-              <a:rPr lang="en-US" dirty="0" smtClean="0"/>
-              <a:t>Is this acceptable? Or should we rely on </a:t>
-            </a:r>
-            <a:r>
-              <a:rPr lang="en-US" altLang="zh-CN" dirty="0"/>
-              <a:t>I-D. </a:t>
-            </a:r>
-            <a:r>
-              <a:rPr lang="en-US" altLang="zh-CN" dirty="0" err="1" smtClean="0"/>
-              <a:t>ietf</a:t>
-            </a:r>
-            <a:r>
-              <a:rPr lang="en-US" altLang="zh-CN" dirty="0" smtClean="0"/>
-              <a:t>-</a:t>
-            </a:r>
-            <a:r>
-              <a:rPr lang="en-US" altLang="zh-CN" dirty="0" err="1" smtClean="0"/>
-              <a:t>netmod</a:t>
-            </a:r>
-            <a:r>
-              <a:rPr lang="en-US" altLang="zh-CN" dirty="0" smtClean="0"/>
-              <a:t>-yang-anydata-validation?</a:t>
-            </a:r>
-            <a:endParaRPr lang="en-US" dirty="0" smtClean="0"/>
-          </a:p>
-          <a:p>
-            <a:endParaRPr lang="en-US" dirty="0"/>
           </a:p>
         </p:txBody>
       </p:sp>
@@ -8154,12 +6741,2674 @@
           </a:p>
         </p:txBody>
       </p:sp>
+      <p:graphicFrame>
+        <p:nvGraphicFramePr>
+          <p:cNvPr id="6" name="表格 5"/>
+          <p:cNvGraphicFramePr>
+            <a:graphicFrameLocks noGrp="1"/>
+          </p:cNvGraphicFramePr>
+          <p:nvPr>
+            <p:extLst>
+              <p:ext uri="{D42A27DB-BD31-4B8C-83A1-F6EECF244321}">
+                <p14:modId xmlns:p14="http://schemas.microsoft.com/office/powerpoint/2010/main" val="299269501"/>
+              </p:ext>
+            </p:extLst>
+          </p:nvPr>
+        </p:nvGraphicFramePr>
+        <p:xfrm>
+          <a:off x="582619" y="778193"/>
+          <a:ext cx="10498247" cy="5511260"/>
+        </p:xfrm>
+        <a:graphic>
+          <a:graphicData uri="http://schemas.openxmlformats.org/drawingml/2006/table">
+            <a:tbl>
+              <a:tblPr/>
+              <a:tblGrid>
+                <a:gridCol w="3362437"/>
+                <a:gridCol w="851670"/>
+                <a:gridCol w="3469356"/>
+                <a:gridCol w="2814784"/>
+              </a:tblGrid>
+              <a:tr h="278792">
+                <a:tc>
+                  <a:txBody>
+                    <a:bodyPr/>
+                    <a:lstStyle/>
+                    <a:p>
+                      <a:pPr algn="l"/>
+                      <a:r>
+                        <a:rPr lang="en-US" sz="1400" b="1" dirty="0">
+                          <a:effectLst/>
+                        </a:rPr>
+                        <a:t>Requirement</a:t>
+                      </a:r>
+                    </a:p>
+                  </a:txBody>
+                  <a:tcPr marL="30218" marR="30218" marT="15109" marB="15109" anchor="ctr">
+                    <a:lnL w="9525" cap="flat" cmpd="sng" algn="ctr">
+                      <a:solidFill>
+                        <a:srgbClr val="DEE2E6"/>
+                      </a:solidFill>
+                      <a:prstDash val="solid"/>
+                      <a:round/>
+                      <a:headEnd type="none" w="med" len="med"/>
+                      <a:tailEnd type="none" w="med" len="med"/>
+                    </a:lnL>
+                    <a:lnR w="9525" cap="flat" cmpd="sng" algn="ctr">
+                      <a:solidFill>
+                        <a:srgbClr val="DEE2E6"/>
+                      </a:solidFill>
+                      <a:prstDash val="solid"/>
+                      <a:round/>
+                      <a:headEnd type="none" w="med" len="med"/>
+                      <a:tailEnd type="none" w="med" len="med"/>
+                    </a:lnR>
+                    <a:lnT w="9525" cap="flat" cmpd="sng" algn="ctr">
+                      <a:solidFill>
+                        <a:srgbClr val="DEE2E6"/>
+                      </a:solidFill>
+                      <a:prstDash val="solid"/>
+                      <a:round/>
+                      <a:headEnd type="none" w="med" len="med"/>
+                      <a:tailEnd type="none" w="med" len="med"/>
+                    </a:lnT>
+                    <a:lnB w="9525" cap="flat" cmpd="sng" algn="ctr">
+                      <a:solidFill>
+                        <a:srgbClr val="DEE2E6"/>
+                      </a:solidFill>
+                      <a:prstDash val="solid"/>
+                      <a:round/>
+                      <a:headEnd type="none" w="med" len="med"/>
+                      <a:tailEnd type="none" w="med" len="med"/>
+                    </a:lnB>
+                    <a:solidFill>
+                      <a:srgbClr val="FFFFFF"/>
+                    </a:solidFill>
+                  </a:tcPr>
+                </a:tc>
+                <a:tc>
+                  <a:txBody>
+                    <a:bodyPr/>
+                    <a:lstStyle/>
+                    <a:p>
+                      <a:pPr algn="l"/>
+                      <a:r>
+                        <a:rPr lang="en-US" sz="1400" b="1" dirty="0">
+                          <a:effectLst/>
+                        </a:rPr>
+                        <a:t>Fulfilled</a:t>
+                      </a:r>
+                    </a:p>
+                  </a:txBody>
+                  <a:tcPr marL="30218" marR="30218" marT="15109" marB="15109" anchor="ctr">
+                    <a:lnL w="9525" cap="flat" cmpd="sng" algn="ctr">
+                      <a:solidFill>
+                        <a:srgbClr val="DEE2E6"/>
+                      </a:solidFill>
+                      <a:prstDash val="solid"/>
+                      <a:round/>
+                      <a:headEnd type="none" w="med" len="med"/>
+                      <a:tailEnd type="none" w="med" len="med"/>
+                    </a:lnL>
+                    <a:lnR w="9525" cap="flat" cmpd="sng" algn="ctr">
+                      <a:solidFill>
+                        <a:srgbClr val="DEE2E6"/>
+                      </a:solidFill>
+                      <a:prstDash val="solid"/>
+                      <a:round/>
+                      <a:headEnd type="none" w="med" len="med"/>
+                      <a:tailEnd type="none" w="med" len="med"/>
+                    </a:lnR>
+                    <a:lnT w="9525" cap="flat" cmpd="sng" algn="ctr">
+                      <a:solidFill>
+                        <a:srgbClr val="DEE2E6"/>
+                      </a:solidFill>
+                      <a:prstDash val="solid"/>
+                      <a:round/>
+                      <a:headEnd type="none" w="med" len="med"/>
+                      <a:tailEnd type="none" w="med" len="med"/>
+                    </a:lnT>
+                    <a:lnB w="9525" cap="flat" cmpd="sng" algn="ctr">
+                      <a:solidFill>
+                        <a:srgbClr val="DEE2E6"/>
+                      </a:solidFill>
+                      <a:prstDash val="solid"/>
+                      <a:round/>
+                      <a:headEnd type="none" w="med" len="med"/>
+                      <a:tailEnd type="none" w="med" len="med"/>
+                    </a:lnB>
+                    <a:solidFill>
+                      <a:srgbClr val="FFFFFF"/>
+                    </a:solidFill>
+                  </a:tcPr>
+                </a:tc>
+                <a:tc>
+                  <a:txBody>
+                    <a:bodyPr/>
+                    <a:lstStyle/>
+                    <a:p>
+                      <a:pPr algn="l"/>
+                      <a:r>
+                        <a:rPr lang="en-US" sz="1400" b="1" dirty="0" smtClean="0">
+                          <a:effectLst/>
+                        </a:rPr>
+                        <a:t>Comments</a:t>
+                      </a:r>
+                      <a:r>
+                        <a:rPr lang="en-US" sz="1400" b="1" baseline="0" dirty="0" smtClean="0">
+                          <a:effectLst/>
+                        </a:rPr>
+                        <a:t> from authors</a:t>
+                      </a:r>
+                      <a:endParaRPr lang="en-US" sz="1400" b="1" dirty="0">
+                        <a:effectLst/>
+                      </a:endParaRPr>
+                    </a:p>
+                  </a:txBody>
+                  <a:tcPr marL="30218" marR="30218" marT="15109" marB="15109" anchor="ctr">
+                    <a:lnL w="9525" cap="flat" cmpd="sng" algn="ctr">
+                      <a:solidFill>
+                        <a:srgbClr val="DEE2E6"/>
+                      </a:solidFill>
+                      <a:prstDash val="solid"/>
+                      <a:round/>
+                      <a:headEnd type="none" w="med" len="med"/>
+                      <a:tailEnd type="none" w="med" len="med"/>
+                    </a:lnL>
+                    <a:lnR w="9525" cap="flat" cmpd="sng" algn="ctr">
+                      <a:solidFill>
+                        <a:srgbClr val="DEE2E6"/>
+                      </a:solidFill>
+                      <a:prstDash val="solid"/>
+                      <a:round/>
+                      <a:headEnd type="none" w="med" len="med"/>
+                      <a:tailEnd type="none" w="med" len="med"/>
+                    </a:lnR>
+                    <a:lnT w="9525" cap="flat" cmpd="sng" algn="ctr">
+                      <a:solidFill>
+                        <a:srgbClr val="DEE2E6"/>
+                      </a:solidFill>
+                      <a:prstDash val="solid"/>
+                      <a:round/>
+                      <a:headEnd type="none" w="med" len="med"/>
+                      <a:tailEnd type="none" w="med" len="med"/>
+                    </a:lnT>
+                    <a:lnB w="9525" cap="flat" cmpd="sng" algn="ctr">
+                      <a:solidFill>
+                        <a:srgbClr val="DEE2E6"/>
+                      </a:solidFill>
+                      <a:prstDash val="solid"/>
+                      <a:round/>
+                      <a:headEnd type="none" w="med" len="med"/>
+                      <a:tailEnd type="none" w="med" len="med"/>
+                    </a:lnB>
+                    <a:solidFill>
+                      <a:srgbClr val="FFFFFF"/>
+                    </a:solidFill>
+                  </a:tcPr>
+                </a:tc>
+                <a:tc>
+                  <a:txBody>
+                    <a:bodyPr/>
+                    <a:lstStyle/>
+                    <a:p>
+                      <a:pPr algn="l"/>
+                      <a:r>
+                        <a:rPr lang="en-US" sz="1400" b="1" dirty="0" smtClean="0">
+                          <a:effectLst/>
+                        </a:rPr>
+                        <a:t>Template-</a:t>
+                      </a:r>
+                      <a:r>
+                        <a:rPr lang="en-US" sz="1400" b="1" dirty="0" err="1" smtClean="0">
+                          <a:effectLst/>
+                        </a:rPr>
+                        <a:t>reqs</a:t>
+                      </a:r>
+                      <a:r>
+                        <a:rPr lang="en-US" sz="1400" b="1" dirty="0" smtClean="0">
+                          <a:effectLst/>
+                        </a:rPr>
+                        <a:t> Repo issue</a:t>
+                      </a:r>
+                    </a:p>
+                  </a:txBody>
+                  <a:tcPr marL="30218" marR="30218" marT="15109" marB="15109" anchor="ctr">
+                    <a:lnL w="9525" cap="flat" cmpd="sng" algn="ctr">
+                      <a:solidFill>
+                        <a:srgbClr val="DEE2E6"/>
+                      </a:solidFill>
+                      <a:prstDash val="solid"/>
+                      <a:round/>
+                      <a:headEnd type="none" w="med" len="med"/>
+                      <a:tailEnd type="none" w="med" len="med"/>
+                    </a:lnL>
+                    <a:lnR w="9525" cap="flat" cmpd="sng" algn="ctr">
+                      <a:solidFill>
+                        <a:srgbClr val="DEE2E6"/>
+                      </a:solidFill>
+                      <a:prstDash val="solid"/>
+                      <a:round/>
+                      <a:headEnd type="none" w="med" len="med"/>
+                      <a:tailEnd type="none" w="med" len="med"/>
+                    </a:lnR>
+                    <a:lnT w="9525" cap="flat" cmpd="sng" algn="ctr">
+                      <a:solidFill>
+                        <a:srgbClr val="DEE2E6"/>
+                      </a:solidFill>
+                      <a:prstDash val="solid"/>
+                      <a:round/>
+                      <a:headEnd type="none" w="med" len="med"/>
+                      <a:tailEnd type="none" w="med" len="med"/>
+                    </a:lnT>
+                    <a:lnB w="9525" cap="flat" cmpd="sng" algn="ctr">
+                      <a:solidFill>
+                        <a:srgbClr val="DEE2E6"/>
+                      </a:solidFill>
+                      <a:prstDash val="solid"/>
+                      <a:round/>
+                      <a:headEnd type="none" w="med" len="med"/>
+                      <a:tailEnd type="none" w="med" len="med"/>
+                    </a:lnB>
+                    <a:solidFill>
+                      <a:srgbClr val="FFFFFF"/>
+                    </a:solidFill>
+                  </a:tcPr>
+                </a:tc>
+              </a:tr>
+              <a:tr h="502210">
+                <a:tc>
+                  <a:txBody>
+                    <a:bodyPr/>
+                    <a:lstStyle/>
+                    <a:p>
+                      <a:pPr algn="l"/>
+                      <a:r>
+                        <a:rPr lang="en-US" sz="1200" dirty="0">
+                          <a:effectLst/>
+                        </a:rPr>
+                        <a:t>R9: &lt;running&gt; contains the unexpanded template</a:t>
+                      </a:r>
+                    </a:p>
+                  </a:txBody>
+                  <a:tcPr marL="30218" marR="30218" marT="15109" marB="15109" anchor="ctr">
+                    <a:lnL w="9525" cap="flat" cmpd="sng" algn="ctr">
+                      <a:solidFill>
+                        <a:srgbClr val="DEE2E6"/>
+                      </a:solidFill>
+                      <a:prstDash val="solid"/>
+                      <a:round/>
+                      <a:headEnd type="none" w="med" len="med"/>
+                      <a:tailEnd type="none" w="med" len="med"/>
+                    </a:lnL>
+                    <a:lnR w="9525" cap="flat" cmpd="sng" algn="ctr">
+                      <a:solidFill>
+                        <a:srgbClr val="DEE2E6"/>
+                      </a:solidFill>
+                      <a:prstDash val="solid"/>
+                      <a:round/>
+                      <a:headEnd type="none" w="med" len="med"/>
+                      <a:tailEnd type="none" w="med" len="med"/>
+                    </a:lnR>
+                    <a:lnT w="9525" cap="flat" cmpd="sng" algn="ctr">
+                      <a:solidFill>
+                        <a:srgbClr val="DEE2E6"/>
+                      </a:solidFill>
+                      <a:prstDash val="solid"/>
+                      <a:round/>
+                      <a:headEnd type="none" w="med" len="med"/>
+                      <a:tailEnd type="none" w="med" len="med"/>
+                    </a:lnT>
+                    <a:lnB w="9525" cap="flat" cmpd="sng" algn="ctr">
+                      <a:solidFill>
+                        <a:srgbClr val="DEE2E6"/>
+                      </a:solidFill>
+                      <a:prstDash val="solid"/>
+                      <a:round/>
+                      <a:headEnd type="none" w="med" len="med"/>
+                      <a:tailEnd type="none" w="med" len="med"/>
+                    </a:lnB>
+                    <a:solidFill>
+                      <a:srgbClr val="FFFFFF"/>
+                    </a:solidFill>
+                  </a:tcPr>
+                </a:tc>
+                <a:tc>
+                  <a:txBody>
+                    <a:bodyPr/>
+                    <a:lstStyle/>
+                    <a:p>
+                      <a:pPr algn="l"/>
+                      <a:r>
+                        <a:rPr lang="en-US" sz="1200">
+                          <a:effectLst/>
+                        </a:rPr>
+                        <a:t>Y</a:t>
+                      </a:r>
+                    </a:p>
+                  </a:txBody>
+                  <a:tcPr marL="30218" marR="30218" marT="15109" marB="15109" anchor="ctr">
+                    <a:lnL w="9525" cap="flat" cmpd="sng" algn="ctr">
+                      <a:solidFill>
+                        <a:srgbClr val="DEE2E6"/>
+                      </a:solidFill>
+                      <a:prstDash val="solid"/>
+                      <a:round/>
+                      <a:headEnd type="none" w="med" len="med"/>
+                      <a:tailEnd type="none" w="med" len="med"/>
+                    </a:lnL>
+                    <a:lnR w="9525" cap="flat" cmpd="sng" algn="ctr">
+                      <a:solidFill>
+                        <a:srgbClr val="DEE2E6"/>
+                      </a:solidFill>
+                      <a:prstDash val="solid"/>
+                      <a:round/>
+                      <a:headEnd type="none" w="med" len="med"/>
+                      <a:tailEnd type="none" w="med" len="med"/>
+                    </a:lnR>
+                    <a:lnT w="9525" cap="flat" cmpd="sng" algn="ctr">
+                      <a:solidFill>
+                        <a:srgbClr val="DEE2E6"/>
+                      </a:solidFill>
+                      <a:prstDash val="solid"/>
+                      <a:round/>
+                      <a:headEnd type="none" w="med" len="med"/>
+                      <a:tailEnd type="none" w="med" len="med"/>
+                    </a:lnT>
+                    <a:lnB w="9525" cap="flat" cmpd="sng" algn="ctr">
+                      <a:solidFill>
+                        <a:srgbClr val="DEE2E6"/>
+                      </a:solidFill>
+                      <a:prstDash val="solid"/>
+                      <a:round/>
+                      <a:headEnd type="none" w="med" len="med"/>
+                      <a:tailEnd type="none" w="med" len="med"/>
+                    </a:lnB>
+                    <a:solidFill>
+                      <a:srgbClr val="FFFFFF"/>
+                    </a:solidFill>
+                  </a:tcPr>
+                </a:tc>
+                <a:tc>
+                  <a:txBody>
+                    <a:bodyPr/>
+                    <a:lstStyle/>
+                    <a:p>
+                      <a:pPr algn="l"/>
+                      <a:r>
+                        <a:rPr lang="en-US" sz="1200" dirty="0">
+                          <a:effectLst/>
+                        </a:rPr>
+                        <a:t>see </a:t>
+                      </a:r>
+                      <a:r>
+                        <a:rPr lang="en-US" sz="1200" u="sng" dirty="0">
+                          <a:solidFill>
+                            <a:srgbClr val="0D6EFD"/>
+                          </a:solidFill>
+                          <a:effectLst/>
+                          <a:hlinkClick r:id="rId2"/>
+                        </a:rPr>
+                        <a:t>Section 5</a:t>
+                      </a:r>
+                      <a:r>
+                        <a:rPr lang="en-US" sz="1200" dirty="0">
+                          <a:effectLst/>
+                        </a:rPr>
+                        <a:t>, also stated explicitly in </a:t>
+                      </a:r>
+                      <a:r>
+                        <a:rPr lang="en-US" sz="1200" u="sng" dirty="0">
+                          <a:solidFill>
+                            <a:srgbClr val="0D6EFD"/>
+                          </a:solidFill>
+                          <a:effectLst/>
+                          <a:hlinkClick r:id="rId3"/>
+                        </a:rPr>
+                        <a:t>Section 8</a:t>
+                      </a:r>
+                      <a:endParaRPr lang="en-US" sz="1200" dirty="0">
+                        <a:effectLst/>
+                      </a:endParaRPr>
+                    </a:p>
+                  </a:txBody>
+                  <a:tcPr marL="30218" marR="30218" marT="15109" marB="15109" anchor="ctr">
+                    <a:lnL w="9525" cap="flat" cmpd="sng" algn="ctr">
+                      <a:solidFill>
+                        <a:srgbClr val="DEE2E6"/>
+                      </a:solidFill>
+                      <a:prstDash val="solid"/>
+                      <a:round/>
+                      <a:headEnd type="none" w="med" len="med"/>
+                      <a:tailEnd type="none" w="med" len="med"/>
+                    </a:lnL>
+                    <a:lnR w="9525" cap="flat" cmpd="sng" algn="ctr">
+                      <a:solidFill>
+                        <a:srgbClr val="DEE2E6"/>
+                      </a:solidFill>
+                      <a:prstDash val="solid"/>
+                      <a:round/>
+                      <a:headEnd type="none" w="med" len="med"/>
+                      <a:tailEnd type="none" w="med" len="med"/>
+                    </a:lnR>
+                    <a:lnT w="9525" cap="flat" cmpd="sng" algn="ctr">
+                      <a:solidFill>
+                        <a:srgbClr val="DEE2E6"/>
+                      </a:solidFill>
+                      <a:prstDash val="solid"/>
+                      <a:round/>
+                      <a:headEnd type="none" w="med" len="med"/>
+                      <a:tailEnd type="none" w="med" len="med"/>
+                    </a:lnT>
+                    <a:lnB w="9525" cap="flat" cmpd="sng" algn="ctr">
+                      <a:solidFill>
+                        <a:srgbClr val="DEE2E6"/>
+                      </a:solidFill>
+                      <a:prstDash val="solid"/>
+                      <a:round/>
+                      <a:headEnd type="none" w="med" len="med"/>
+                      <a:tailEnd type="none" w="med" len="med"/>
+                    </a:lnB>
+                    <a:solidFill>
+                      <a:srgbClr val="FFFFFF"/>
+                    </a:solidFill>
+                  </a:tcPr>
+                </a:tc>
+                <a:tc>
+                  <a:txBody>
+                    <a:bodyPr/>
+                    <a:lstStyle/>
+                    <a:p>
+                      <a:pPr algn="l"/>
+                      <a:r>
+                        <a:rPr lang="en-US" sz="1200" b="0" i="0" u="sng" dirty="0" smtClean="0">
+                          <a:solidFill>
+                            <a:srgbClr val="0D6EFD"/>
+                          </a:solidFill>
+                          <a:effectLst/>
+                          <a:latin typeface="Inter"/>
+                          <a:hlinkClick r:id="rId4"/>
+                        </a:rPr>
+                        <a:t>Requirement #12</a:t>
+                      </a:r>
+                      <a:endParaRPr lang="en-US" sz="1200" dirty="0">
+                        <a:effectLst/>
+                      </a:endParaRPr>
+                    </a:p>
+                  </a:txBody>
+                  <a:tcPr marL="30218" marR="30218" marT="15109" marB="15109" anchor="ctr">
+                    <a:lnL w="9525" cap="flat" cmpd="sng" algn="ctr">
+                      <a:solidFill>
+                        <a:srgbClr val="DEE2E6"/>
+                      </a:solidFill>
+                      <a:prstDash val="solid"/>
+                      <a:round/>
+                      <a:headEnd type="none" w="med" len="med"/>
+                      <a:tailEnd type="none" w="med" len="med"/>
+                    </a:lnL>
+                    <a:lnR w="9525" cap="flat" cmpd="sng" algn="ctr">
+                      <a:solidFill>
+                        <a:srgbClr val="DEE2E6"/>
+                      </a:solidFill>
+                      <a:prstDash val="solid"/>
+                      <a:round/>
+                      <a:headEnd type="none" w="med" len="med"/>
+                      <a:tailEnd type="none" w="med" len="med"/>
+                    </a:lnR>
+                    <a:lnT w="9525" cap="flat" cmpd="sng" algn="ctr">
+                      <a:solidFill>
+                        <a:srgbClr val="DEE2E6"/>
+                      </a:solidFill>
+                      <a:prstDash val="solid"/>
+                      <a:round/>
+                      <a:headEnd type="none" w="med" len="med"/>
+                      <a:tailEnd type="none" w="med" len="med"/>
+                    </a:lnT>
+                    <a:lnB w="9525" cap="flat" cmpd="sng" algn="ctr">
+                      <a:solidFill>
+                        <a:srgbClr val="DEE2E6"/>
+                      </a:solidFill>
+                      <a:prstDash val="solid"/>
+                      <a:round/>
+                      <a:headEnd type="none" w="med" len="med"/>
+                      <a:tailEnd type="none" w="med" len="med"/>
+                    </a:lnB>
+                    <a:solidFill>
+                      <a:srgbClr val="FFFFFF"/>
+                    </a:solidFill>
+                  </a:tcPr>
+                </a:tc>
+              </a:tr>
+              <a:tr h="502210">
+                <a:tc>
+                  <a:txBody>
+                    <a:bodyPr/>
+                    <a:lstStyle/>
+                    <a:p>
+                      <a:pPr algn="l"/>
+                      <a:r>
+                        <a:rPr lang="en-US" sz="1200" dirty="0">
+                          <a:effectLst/>
+                        </a:rPr>
+                        <a:t>R10: &lt;intended&gt; contains the expanded template</a:t>
+                      </a:r>
+                    </a:p>
+                  </a:txBody>
+                  <a:tcPr marL="30218" marR="30218" marT="15109" marB="15109" anchor="ctr">
+                    <a:lnL w="9525" cap="flat" cmpd="sng" algn="ctr">
+                      <a:solidFill>
+                        <a:srgbClr val="DEE2E6"/>
+                      </a:solidFill>
+                      <a:prstDash val="solid"/>
+                      <a:round/>
+                      <a:headEnd type="none" w="med" len="med"/>
+                      <a:tailEnd type="none" w="med" len="med"/>
+                    </a:lnL>
+                    <a:lnR w="9525" cap="flat" cmpd="sng" algn="ctr">
+                      <a:solidFill>
+                        <a:srgbClr val="DEE2E6"/>
+                      </a:solidFill>
+                      <a:prstDash val="solid"/>
+                      <a:round/>
+                      <a:headEnd type="none" w="med" len="med"/>
+                      <a:tailEnd type="none" w="med" len="med"/>
+                    </a:lnR>
+                    <a:lnT w="9525" cap="flat" cmpd="sng" algn="ctr">
+                      <a:solidFill>
+                        <a:srgbClr val="DEE2E6"/>
+                      </a:solidFill>
+                      <a:prstDash val="solid"/>
+                      <a:round/>
+                      <a:headEnd type="none" w="med" len="med"/>
+                      <a:tailEnd type="none" w="med" len="med"/>
+                    </a:lnT>
+                    <a:lnB w="9525" cap="flat" cmpd="sng" algn="ctr">
+                      <a:solidFill>
+                        <a:srgbClr val="DEE2E6"/>
+                      </a:solidFill>
+                      <a:prstDash val="solid"/>
+                      <a:round/>
+                      <a:headEnd type="none" w="med" len="med"/>
+                      <a:tailEnd type="none" w="med" len="med"/>
+                    </a:lnB>
+                    <a:solidFill>
+                      <a:srgbClr val="FFFFFF"/>
+                    </a:solidFill>
+                  </a:tcPr>
+                </a:tc>
+                <a:tc>
+                  <a:txBody>
+                    <a:bodyPr/>
+                    <a:lstStyle/>
+                    <a:p>
+                      <a:pPr algn="l"/>
+                      <a:r>
+                        <a:rPr lang="en-US" sz="1200">
+                          <a:effectLst/>
+                        </a:rPr>
+                        <a:t>Y</a:t>
+                      </a:r>
+                    </a:p>
+                  </a:txBody>
+                  <a:tcPr marL="30218" marR="30218" marT="15109" marB="15109" anchor="ctr">
+                    <a:lnL w="9525" cap="flat" cmpd="sng" algn="ctr">
+                      <a:solidFill>
+                        <a:srgbClr val="DEE2E6"/>
+                      </a:solidFill>
+                      <a:prstDash val="solid"/>
+                      <a:round/>
+                      <a:headEnd type="none" w="med" len="med"/>
+                      <a:tailEnd type="none" w="med" len="med"/>
+                    </a:lnL>
+                    <a:lnR w="9525" cap="flat" cmpd="sng" algn="ctr">
+                      <a:solidFill>
+                        <a:srgbClr val="DEE2E6"/>
+                      </a:solidFill>
+                      <a:prstDash val="solid"/>
+                      <a:round/>
+                      <a:headEnd type="none" w="med" len="med"/>
+                      <a:tailEnd type="none" w="med" len="med"/>
+                    </a:lnR>
+                    <a:lnT w="9525" cap="flat" cmpd="sng" algn="ctr">
+                      <a:solidFill>
+                        <a:srgbClr val="DEE2E6"/>
+                      </a:solidFill>
+                      <a:prstDash val="solid"/>
+                      <a:round/>
+                      <a:headEnd type="none" w="med" len="med"/>
+                      <a:tailEnd type="none" w="med" len="med"/>
+                    </a:lnT>
+                    <a:lnB w="9525" cap="flat" cmpd="sng" algn="ctr">
+                      <a:solidFill>
+                        <a:srgbClr val="DEE2E6"/>
+                      </a:solidFill>
+                      <a:prstDash val="solid"/>
+                      <a:round/>
+                      <a:headEnd type="none" w="med" len="med"/>
+                      <a:tailEnd type="none" w="med" len="med"/>
+                    </a:lnB>
+                    <a:solidFill>
+                      <a:srgbClr val="FFFFFF"/>
+                    </a:solidFill>
+                  </a:tcPr>
+                </a:tc>
+                <a:tc>
+                  <a:txBody>
+                    <a:bodyPr/>
+                    <a:lstStyle/>
+                    <a:p>
+                      <a:pPr algn="l"/>
+                      <a:r>
+                        <a:rPr lang="en-US" sz="1200">
+                          <a:effectLst/>
+                        </a:rPr>
+                        <a:t>see </a:t>
+                      </a:r>
+                      <a:r>
+                        <a:rPr lang="en-US" sz="1200" u="sng">
+                          <a:solidFill>
+                            <a:srgbClr val="0D6EFD"/>
+                          </a:solidFill>
+                          <a:effectLst/>
+                          <a:hlinkClick r:id="rId2"/>
+                        </a:rPr>
+                        <a:t>Section 5</a:t>
+                      </a:r>
+                      <a:r>
+                        <a:rPr lang="en-US" sz="1200">
+                          <a:effectLst/>
+                        </a:rPr>
+                        <a:t>, also stated explicitly in </a:t>
+                      </a:r>
+                      <a:r>
+                        <a:rPr lang="en-US" sz="1200" u="sng">
+                          <a:solidFill>
+                            <a:srgbClr val="0D6EFD"/>
+                          </a:solidFill>
+                          <a:effectLst/>
+                          <a:hlinkClick r:id="rId3"/>
+                        </a:rPr>
+                        <a:t>Section 8</a:t>
+                      </a:r>
+                      <a:endParaRPr lang="en-US" sz="1200">
+                        <a:effectLst/>
+                      </a:endParaRPr>
+                    </a:p>
+                  </a:txBody>
+                  <a:tcPr marL="30218" marR="30218" marT="15109" marB="15109" anchor="ctr">
+                    <a:lnL w="9525" cap="flat" cmpd="sng" algn="ctr">
+                      <a:solidFill>
+                        <a:srgbClr val="DEE2E6"/>
+                      </a:solidFill>
+                      <a:prstDash val="solid"/>
+                      <a:round/>
+                      <a:headEnd type="none" w="med" len="med"/>
+                      <a:tailEnd type="none" w="med" len="med"/>
+                    </a:lnL>
+                    <a:lnR w="9525" cap="flat" cmpd="sng" algn="ctr">
+                      <a:solidFill>
+                        <a:srgbClr val="DEE2E6"/>
+                      </a:solidFill>
+                      <a:prstDash val="solid"/>
+                      <a:round/>
+                      <a:headEnd type="none" w="med" len="med"/>
+                      <a:tailEnd type="none" w="med" len="med"/>
+                    </a:lnR>
+                    <a:lnT w="9525" cap="flat" cmpd="sng" algn="ctr">
+                      <a:solidFill>
+                        <a:srgbClr val="DEE2E6"/>
+                      </a:solidFill>
+                      <a:prstDash val="solid"/>
+                      <a:round/>
+                      <a:headEnd type="none" w="med" len="med"/>
+                      <a:tailEnd type="none" w="med" len="med"/>
+                    </a:lnT>
+                    <a:lnB w="9525" cap="flat" cmpd="sng" algn="ctr">
+                      <a:solidFill>
+                        <a:srgbClr val="DEE2E6"/>
+                      </a:solidFill>
+                      <a:prstDash val="solid"/>
+                      <a:round/>
+                      <a:headEnd type="none" w="med" len="med"/>
+                      <a:tailEnd type="none" w="med" len="med"/>
+                    </a:lnB>
+                    <a:solidFill>
+                      <a:srgbClr val="FFFFFF"/>
+                    </a:solidFill>
+                  </a:tcPr>
+                </a:tc>
+                <a:tc>
+                  <a:txBody>
+                    <a:bodyPr/>
+                    <a:lstStyle/>
+                    <a:p>
+                      <a:pPr algn="l"/>
+                      <a:r>
+                        <a:rPr lang="en-US" sz="1200" b="0" i="0" u="sng" dirty="0" smtClean="0">
+                          <a:solidFill>
+                            <a:srgbClr val="0D6EFD"/>
+                          </a:solidFill>
+                          <a:effectLst/>
+                          <a:latin typeface="Inter"/>
+                          <a:hlinkClick r:id="rId5"/>
+                        </a:rPr>
+                        <a:t>Requirement #13</a:t>
+                      </a:r>
+                      <a:endParaRPr lang="en-US" sz="1200" dirty="0">
+                        <a:effectLst/>
+                      </a:endParaRPr>
+                    </a:p>
+                  </a:txBody>
+                  <a:tcPr marL="30218" marR="30218" marT="15109" marB="15109" anchor="ctr">
+                    <a:lnL w="9525" cap="flat" cmpd="sng" algn="ctr">
+                      <a:solidFill>
+                        <a:srgbClr val="DEE2E6"/>
+                      </a:solidFill>
+                      <a:prstDash val="solid"/>
+                      <a:round/>
+                      <a:headEnd type="none" w="med" len="med"/>
+                      <a:tailEnd type="none" w="med" len="med"/>
+                    </a:lnL>
+                    <a:lnR w="9525" cap="flat" cmpd="sng" algn="ctr">
+                      <a:solidFill>
+                        <a:srgbClr val="DEE2E6"/>
+                      </a:solidFill>
+                      <a:prstDash val="solid"/>
+                      <a:round/>
+                      <a:headEnd type="none" w="med" len="med"/>
+                      <a:tailEnd type="none" w="med" len="med"/>
+                    </a:lnR>
+                    <a:lnT w="9525" cap="flat" cmpd="sng" algn="ctr">
+                      <a:solidFill>
+                        <a:srgbClr val="DEE2E6"/>
+                      </a:solidFill>
+                      <a:prstDash val="solid"/>
+                      <a:round/>
+                      <a:headEnd type="none" w="med" len="med"/>
+                      <a:tailEnd type="none" w="med" len="med"/>
+                    </a:lnT>
+                    <a:lnB w="9525" cap="flat" cmpd="sng" algn="ctr">
+                      <a:solidFill>
+                        <a:srgbClr val="DEE2E6"/>
+                      </a:solidFill>
+                      <a:prstDash val="solid"/>
+                      <a:round/>
+                      <a:headEnd type="none" w="med" len="med"/>
+                      <a:tailEnd type="none" w="med" len="med"/>
+                    </a:lnB>
+                    <a:solidFill>
+                      <a:srgbClr val="FFFFFF"/>
+                    </a:solidFill>
+                  </a:tcPr>
+                </a:tc>
+              </a:tr>
+              <a:tr h="502210">
+                <a:tc>
+                  <a:txBody>
+                    <a:bodyPr/>
+                    <a:lstStyle/>
+                    <a:p>
+                      <a:pPr algn="l"/>
+                      <a:r>
+                        <a:rPr lang="en-US" sz="1200">
+                          <a:effectLst/>
+                        </a:rPr>
+                        <a:t>R11: Enables off-box template expansion of &lt;running&gt;</a:t>
+                      </a:r>
+                    </a:p>
+                  </a:txBody>
+                  <a:tcPr marL="30218" marR="30218" marT="15109" marB="15109" anchor="ctr">
+                    <a:lnL w="9525" cap="flat" cmpd="sng" algn="ctr">
+                      <a:solidFill>
+                        <a:srgbClr val="DEE2E6"/>
+                      </a:solidFill>
+                      <a:prstDash val="solid"/>
+                      <a:round/>
+                      <a:headEnd type="none" w="med" len="med"/>
+                      <a:tailEnd type="none" w="med" len="med"/>
+                    </a:lnL>
+                    <a:lnR w="9525" cap="flat" cmpd="sng" algn="ctr">
+                      <a:solidFill>
+                        <a:srgbClr val="DEE2E6"/>
+                      </a:solidFill>
+                      <a:prstDash val="solid"/>
+                      <a:round/>
+                      <a:headEnd type="none" w="med" len="med"/>
+                      <a:tailEnd type="none" w="med" len="med"/>
+                    </a:lnR>
+                    <a:lnT w="9525" cap="flat" cmpd="sng" algn="ctr">
+                      <a:solidFill>
+                        <a:srgbClr val="DEE2E6"/>
+                      </a:solidFill>
+                      <a:prstDash val="solid"/>
+                      <a:round/>
+                      <a:headEnd type="none" w="med" len="med"/>
+                      <a:tailEnd type="none" w="med" len="med"/>
+                    </a:lnT>
+                    <a:lnB w="9525" cap="flat" cmpd="sng" algn="ctr">
+                      <a:solidFill>
+                        <a:srgbClr val="DEE2E6"/>
+                      </a:solidFill>
+                      <a:prstDash val="solid"/>
+                      <a:round/>
+                      <a:headEnd type="none" w="med" len="med"/>
+                      <a:tailEnd type="none" w="med" len="med"/>
+                    </a:lnB>
+                    <a:solidFill>
+                      <a:srgbClr val="FFFFFF"/>
+                    </a:solidFill>
+                  </a:tcPr>
+                </a:tc>
+                <a:tc>
+                  <a:txBody>
+                    <a:bodyPr/>
+                    <a:lstStyle/>
+                    <a:p>
+                      <a:pPr algn="l"/>
+                      <a:r>
+                        <a:rPr lang="en-US" sz="1200">
+                          <a:effectLst/>
+                        </a:rPr>
+                        <a:t>Y</a:t>
+                      </a:r>
+                    </a:p>
+                  </a:txBody>
+                  <a:tcPr marL="30218" marR="30218" marT="15109" marB="15109" anchor="ctr">
+                    <a:lnL w="9525" cap="flat" cmpd="sng" algn="ctr">
+                      <a:solidFill>
+                        <a:srgbClr val="DEE2E6"/>
+                      </a:solidFill>
+                      <a:prstDash val="solid"/>
+                      <a:round/>
+                      <a:headEnd type="none" w="med" len="med"/>
+                      <a:tailEnd type="none" w="med" len="med"/>
+                    </a:lnL>
+                    <a:lnR w="9525" cap="flat" cmpd="sng" algn="ctr">
+                      <a:solidFill>
+                        <a:srgbClr val="DEE2E6"/>
+                      </a:solidFill>
+                      <a:prstDash val="solid"/>
+                      <a:round/>
+                      <a:headEnd type="none" w="med" len="med"/>
+                      <a:tailEnd type="none" w="med" len="med"/>
+                    </a:lnR>
+                    <a:lnT w="9525" cap="flat" cmpd="sng" algn="ctr">
+                      <a:solidFill>
+                        <a:srgbClr val="DEE2E6"/>
+                      </a:solidFill>
+                      <a:prstDash val="solid"/>
+                      <a:round/>
+                      <a:headEnd type="none" w="med" len="med"/>
+                      <a:tailEnd type="none" w="med" len="med"/>
+                    </a:lnT>
+                    <a:lnB w="9525" cap="flat" cmpd="sng" algn="ctr">
+                      <a:solidFill>
+                        <a:srgbClr val="DEE2E6"/>
+                      </a:solidFill>
+                      <a:prstDash val="solid"/>
+                      <a:round/>
+                      <a:headEnd type="none" w="med" len="med"/>
+                      <a:tailEnd type="none" w="med" len="med"/>
+                    </a:lnB>
+                    <a:solidFill>
+                      <a:srgbClr val="FFFFFF"/>
+                    </a:solidFill>
+                  </a:tcPr>
+                </a:tc>
+                <a:tc>
+                  <a:txBody>
+                    <a:bodyPr/>
+                    <a:lstStyle/>
+                    <a:p>
+                      <a:pPr algn="l"/>
+                      <a:r>
+                        <a:rPr lang="en-US" sz="1200">
+                          <a:effectLst/>
+                        </a:rPr>
+                        <a:t>see </a:t>
+                      </a:r>
+                      <a:r>
+                        <a:rPr lang="en-US" sz="1200" u="sng">
+                          <a:solidFill>
+                            <a:srgbClr val="0D6EFD"/>
+                          </a:solidFill>
+                          <a:effectLst/>
+                          <a:hlinkClick r:id="rId6"/>
+                        </a:rPr>
+                        <a:t>Section 4.4</a:t>
+                      </a:r>
+                      <a:endParaRPr lang="en-US" sz="1200">
+                        <a:effectLst/>
+                      </a:endParaRPr>
+                    </a:p>
+                  </a:txBody>
+                  <a:tcPr marL="30218" marR="30218" marT="15109" marB="15109" anchor="ctr">
+                    <a:lnL w="9525" cap="flat" cmpd="sng" algn="ctr">
+                      <a:solidFill>
+                        <a:srgbClr val="DEE2E6"/>
+                      </a:solidFill>
+                      <a:prstDash val="solid"/>
+                      <a:round/>
+                      <a:headEnd type="none" w="med" len="med"/>
+                      <a:tailEnd type="none" w="med" len="med"/>
+                    </a:lnL>
+                    <a:lnR w="9525" cap="flat" cmpd="sng" algn="ctr">
+                      <a:solidFill>
+                        <a:srgbClr val="DEE2E6"/>
+                      </a:solidFill>
+                      <a:prstDash val="solid"/>
+                      <a:round/>
+                      <a:headEnd type="none" w="med" len="med"/>
+                      <a:tailEnd type="none" w="med" len="med"/>
+                    </a:lnR>
+                    <a:lnT w="9525" cap="flat" cmpd="sng" algn="ctr">
+                      <a:solidFill>
+                        <a:srgbClr val="DEE2E6"/>
+                      </a:solidFill>
+                      <a:prstDash val="solid"/>
+                      <a:round/>
+                      <a:headEnd type="none" w="med" len="med"/>
+                      <a:tailEnd type="none" w="med" len="med"/>
+                    </a:lnT>
+                    <a:lnB w="9525" cap="flat" cmpd="sng" algn="ctr">
+                      <a:solidFill>
+                        <a:srgbClr val="DEE2E6"/>
+                      </a:solidFill>
+                      <a:prstDash val="solid"/>
+                      <a:round/>
+                      <a:headEnd type="none" w="med" len="med"/>
+                      <a:tailEnd type="none" w="med" len="med"/>
+                    </a:lnB>
+                    <a:solidFill>
+                      <a:srgbClr val="FFFFFF"/>
+                    </a:solidFill>
+                  </a:tcPr>
+                </a:tc>
+                <a:tc>
+                  <a:txBody>
+                    <a:bodyPr/>
+                    <a:lstStyle/>
+                    <a:p>
+                      <a:pPr algn="l"/>
+                      <a:r>
+                        <a:rPr lang="en-US" sz="1200" b="0" i="0" u="sng" dirty="0" smtClean="0">
+                          <a:solidFill>
+                            <a:srgbClr val="0D6EFD"/>
+                          </a:solidFill>
+                          <a:effectLst/>
+                          <a:latin typeface="Inter"/>
+                          <a:hlinkClick r:id="rId7"/>
+                        </a:rPr>
+                        <a:t>Requirement #14</a:t>
+                      </a:r>
+                      <a:endParaRPr lang="en-US" sz="1200" dirty="0">
+                        <a:effectLst/>
+                      </a:endParaRPr>
+                    </a:p>
+                  </a:txBody>
+                  <a:tcPr marL="30218" marR="30218" marT="15109" marB="15109" anchor="ctr">
+                    <a:lnL w="9525" cap="flat" cmpd="sng" algn="ctr">
+                      <a:solidFill>
+                        <a:srgbClr val="DEE2E6"/>
+                      </a:solidFill>
+                      <a:prstDash val="solid"/>
+                      <a:round/>
+                      <a:headEnd type="none" w="med" len="med"/>
+                      <a:tailEnd type="none" w="med" len="med"/>
+                    </a:lnL>
+                    <a:lnR w="9525" cap="flat" cmpd="sng" algn="ctr">
+                      <a:solidFill>
+                        <a:srgbClr val="DEE2E6"/>
+                      </a:solidFill>
+                      <a:prstDash val="solid"/>
+                      <a:round/>
+                      <a:headEnd type="none" w="med" len="med"/>
+                      <a:tailEnd type="none" w="med" len="med"/>
+                    </a:lnR>
+                    <a:lnT w="9525" cap="flat" cmpd="sng" algn="ctr">
+                      <a:solidFill>
+                        <a:srgbClr val="DEE2E6"/>
+                      </a:solidFill>
+                      <a:prstDash val="solid"/>
+                      <a:round/>
+                      <a:headEnd type="none" w="med" len="med"/>
+                      <a:tailEnd type="none" w="med" len="med"/>
+                    </a:lnT>
+                    <a:lnB w="9525" cap="flat" cmpd="sng" algn="ctr">
+                      <a:solidFill>
+                        <a:srgbClr val="DEE2E6"/>
+                      </a:solidFill>
+                      <a:prstDash val="solid"/>
+                      <a:round/>
+                      <a:headEnd type="none" w="med" len="med"/>
+                      <a:tailEnd type="none" w="med" len="med"/>
+                    </a:lnB>
+                    <a:solidFill>
+                      <a:srgbClr val="FFFFFF"/>
+                    </a:solidFill>
+                  </a:tcPr>
+                </a:tc>
+              </a:tr>
+              <a:tr h="430918">
+                <a:tc>
+                  <a:txBody>
+                    <a:bodyPr/>
+                    <a:lstStyle/>
+                    <a:p>
+                      <a:pPr algn="l"/>
+                      <a:r>
+                        <a:rPr lang="en-US" sz="1200">
+                          <a:effectLst/>
+                        </a:rPr>
+                        <a:t>R12: Support limited regex in templates</a:t>
+                      </a:r>
+                    </a:p>
+                  </a:txBody>
+                  <a:tcPr marL="30218" marR="30218" marT="15109" marB="15109" anchor="ctr">
+                    <a:lnL w="9525" cap="flat" cmpd="sng" algn="ctr">
+                      <a:solidFill>
+                        <a:srgbClr val="DEE2E6"/>
+                      </a:solidFill>
+                      <a:prstDash val="solid"/>
+                      <a:round/>
+                      <a:headEnd type="none" w="med" len="med"/>
+                      <a:tailEnd type="none" w="med" len="med"/>
+                    </a:lnL>
+                    <a:lnR w="9525" cap="flat" cmpd="sng" algn="ctr">
+                      <a:solidFill>
+                        <a:srgbClr val="DEE2E6"/>
+                      </a:solidFill>
+                      <a:prstDash val="solid"/>
+                      <a:round/>
+                      <a:headEnd type="none" w="med" len="med"/>
+                      <a:tailEnd type="none" w="med" len="med"/>
+                    </a:lnR>
+                    <a:lnT w="9525" cap="flat" cmpd="sng" algn="ctr">
+                      <a:solidFill>
+                        <a:srgbClr val="DEE2E6"/>
+                      </a:solidFill>
+                      <a:prstDash val="solid"/>
+                      <a:round/>
+                      <a:headEnd type="none" w="med" len="med"/>
+                      <a:tailEnd type="none" w="med" len="med"/>
+                    </a:lnT>
+                    <a:lnB w="9525" cap="flat" cmpd="sng" algn="ctr">
+                      <a:solidFill>
+                        <a:srgbClr val="DEE2E6"/>
+                      </a:solidFill>
+                      <a:prstDash val="solid"/>
+                      <a:round/>
+                      <a:headEnd type="none" w="med" len="med"/>
+                      <a:tailEnd type="none" w="med" len="med"/>
+                    </a:lnB>
+                    <a:solidFill>
+                      <a:srgbClr val="FFFFFF"/>
+                    </a:solidFill>
+                  </a:tcPr>
+                </a:tc>
+                <a:tc>
+                  <a:txBody>
+                    <a:bodyPr/>
+                    <a:lstStyle/>
+                    <a:p>
+                      <a:pPr algn="l"/>
+                      <a:r>
+                        <a:rPr lang="en-US" sz="1200">
+                          <a:effectLst/>
+                        </a:rPr>
+                        <a:t>Y</a:t>
+                      </a:r>
+                    </a:p>
+                  </a:txBody>
+                  <a:tcPr marL="30218" marR="30218" marT="15109" marB="15109" anchor="ctr">
+                    <a:lnL w="9525" cap="flat" cmpd="sng" algn="ctr">
+                      <a:solidFill>
+                        <a:srgbClr val="DEE2E6"/>
+                      </a:solidFill>
+                      <a:prstDash val="solid"/>
+                      <a:round/>
+                      <a:headEnd type="none" w="med" len="med"/>
+                      <a:tailEnd type="none" w="med" len="med"/>
+                    </a:lnL>
+                    <a:lnR w="9525" cap="flat" cmpd="sng" algn="ctr">
+                      <a:solidFill>
+                        <a:srgbClr val="DEE2E6"/>
+                      </a:solidFill>
+                      <a:prstDash val="solid"/>
+                      <a:round/>
+                      <a:headEnd type="none" w="med" len="med"/>
+                      <a:tailEnd type="none" w="med" len="med"/>
+                    </a:lnR>
+                    <a:lnT w="9525" cap="flat" cmpd="sng" algn="ctr">
+                      <a:solidFill>
+                        <a:srgbClr val="DEE2E6"/>
+                      </a:solidFill>
+                      <a:prstDash val="solid"/>
+                      <a:round/>
+                      <a:headEnd type="none" w="med" len="med"/>
+                      <a:tailEnd type="none" w="med" len="med"/>
+                    </a:lnT>
+                    <a:lnB w="9525" cap="flat" cmpd="sng" algn="ctr">
+                      <a:solidFill>
+                        <a:srgbClr val="DEE2E6"/>
+                      </a:solidFill>
+                      <a:prstDash val="solid"/>
+                      <a:round/>
+                      <a:headEnd type="none" w="med" len="med"/>
+                      <a:tailEnd type="none" w="med" len="med"/>
+                    </a:lnB>
+                    <a:solidFill>
+                      <a:srgbClr val="FFFFFF"/>
+                    </a:solidFill>
+                  </a:tcPr>
+                </a:tc>
+                <a:tc>
+                  <a:txBody>
+                    <a:bodyPr/>
+                    <a:lstStyle/>
+                    <a:p>
+                      <a:pPr algn="l"/>
+                      <a:r>
+                        <a:rPr lang="en-US" sz="1200">
+                          <a:effectLst/>
+                        </a:rPr>
+                        <a:t>But needs more work, see </a:t>
+                      </a:r>
+                      <a:r>
+                        <a:rPr lang="en-US" sz="1200" u="sng">
+                          <a:solidFill>
+                            <a:srgbClr val="0D6EFD"/>
+                          </a:solidFill>
+                          <a:effectLst/>
+                          <a:hlinkClick r:id="rId8"/>
+                        </a:rPr>
+                        <a:t>Section 4.1.1</a:t>
+                      </a:r>
+                      <a:endParaRPr lang="en-US" sz="1200">
+                        <a:effectLst/>
+                      </a:endParaRPr>
+                    </a:p>
+                  </a:txBody>
+                  <a:tcPr marL="30218" marR="30218" marT="15109" marB="15109" anchor="ctr">
+                    <a:lnL w="9525" cap="flat" cmpd="sng" algn="ctr">
+                      <a:solidFill>
+                        <a:srgbClr val="DEE2E6"/>
+                      </a:solidFill>
+                      <a:prstDash val="solid"/>
+                      <a:round/>
+                      <a:headEnd type="none" w="med" len="med"/>
+                      <a:tailEnd type="none" w="med" len="med"/>
+                    </a:lnL>
+                    <a:lnR w="9525" cap="flat" cmpd="sng" algn="ctr">
+                      <a:solidFill>
+                        <a:srgbClr val="DEE2E6"/>
+                      </a:solidFill>
+                      <a:prstDash val="solid"/>
+                      <a:round/>
+                      <a:headEnd type="none" w="med" len="med"/>
+                      <a:tailEnd type="none" w="med" len="med"/>
+                    </a:lnR>
+                    <a:lnT w="9525" cap="flat" cmpd="sng" algn="ctr">
+                      <a:solidFill>
+                        <a:srgbClr val="DEE2E6"/>
+                      </a:solidFill>
+                      <a:prstDash val="solid"/>
+                      <a:round/>
+                      <a:headEnd type="none" w="med" len="med"/>
+                      <a:tailEnd type="none" w="med" len="med"/>
+                    </a:lnT>
+                    <a:lnB w="9525" cap="flat" cmpd="sng" algn="ctr">
+                      <a:solidFill>
+                        <a:srgbClr val="DEE2E6"/>
+                      </a:solidFill>
+                      <a:prstDash val="solid"/>
+                      <a:round/>
+                      <a:headEnd type="none" w="med" len="med"/>
+                      <a:tailEnd type="none" w="med" len="med"/>
+                    </a:lnB>
+                    <a:solidFill>
+                      <a:srgbClr val="FFFFFF"/>
+                    </a:solidFill>
+                  </a:tcPr>
+                </a:tc>
+                <a:tc>
+                  <a:txBody>
+                    <a:bodyPr/>
+                    <a:lstStyle/>
+                    <a:p>
+                      <a:pPr algn="l"/>
+                      <a:r>
+                        <a:rPr lang="en-US" sz="1200" b="0" i="0" u="sng" dirty="0" smtClean="0">
+                          <a:solidFill>
+                            <a:srgbClr val="0D6EFD"/>
+                          </a:solidFill>
+                          <a:effectLst/>
+                          <a:latin typeface="Inter"/>
+                          <a:hlinkClick r:id="rId9"/>
+                        </a:rPr>
+                        <a:t>Requirement #18</a:t>
+                      </a:r>
+                      <a:endParaRPr lang="en-US" sz="1200" dirty="0">
+                        <a:effectLst/>
+                      </a:endParaRPr>
+                    </a:p>
+                  </a:txBody>
+                  <a:tcPr marL="30218" marR="30218" marT="15109" marB="15109" anchor="ctr">
+                    <a:lnL w="9525" cap="flat" cmpd="sng" algn="ctr">
+                      <a:solidFill>
+                        <a:srgbClr val="DEE2E6"/>
+                      </a:solidFill>
+                      <a:prstDash val="solid"/>
+                      <a:round/>
+                      <a:headEnd type="none" w="med" len="med"/>
+                      <a:tailEnd type="none" w="med" len="med"/>
+                    </a:lnL>
+                    <a:lnR w="9525" cap="flat" cmpd="sng" algn="ctr">
+                      <a:solidFill>
+                        <a:srgbClr val="DEE2E6"/>
+                      </a:solidFill>
+                      <a:prstDash val="solid"/>
+                      <a:round/>
+                      <a:headEnd type="none" w="med" len="med"/>
+                      <a:tailEnd type="none" w="med" len="med"/>
+                    </a:lnR>
+                    <a:lnT w="9525" cap="flat" cmpd="sng" algn="ctr">
+                      <a:solidFill>
+                        <a:srgbClr val="DEE2E6"/>
+                      </a:solidFill>
+                      <a:prstDash val="solid"/>
+                      <a:round/>
+                      <a:headEnd type="none" w="med" len="med"/>
+                      <a:tailEnd type="none" w="med" len="med"/>
+                    </a:lnT>
+                    <a:lnB w="9525" cap="flat" cmpd="sng" algn="ctr">
+                      <a:solidFill>
+                        <a:srgbClr val="DEE2E6"/>
+                      </a:solidFill>
+                      <a:prstDash val="solid"/>
+                      <a:round/>
+                      <a:headEnd type="none" w="med" len="med"/>
+                      <a:tailEnd type="none" w="med" len="med"/>
+                    </a:lnB>
+                    <a:solidFill>
+                      <a:srgbClr val="FFFFFF"/>
+                    </a:solidFill>
+                  </a:tcPr>
+                </a:tc>
+              </a:tr>
+              <a:tr h="725628">
+                <a:tc>
+                  <a:txBody>
+                    <a:bodyPr/>
+                    <a:lstStyle/>
+                    <a:p>
+                      <a:pPr algn="l"/>
+                      <a:r>
+                        <a:rPr lang="en-US" sz="1200" dirty="0">
+                          <a:effectLst/>
+                        </a:rPr>
+                        <a:t>R13: Have a precedence rule when multiple templates are applied at a single node</a:t>
+                      </a:r>
+                    </a:p>
+                  </a:txBody>
+                  <a:tcPr marL="30218" marR="30218" marT="15109" marB="15109" anchor="ctr">
+                    <a:lnL w="9525" cap="flat" cmpd="sng" algn="ctr">
+                      <a:solidFill>
+                        <a:srgbClr val="DEE2E6"/>
+                      </a:solidFill>
+                      <a:prstDash val="solid"/>
+                      <a:round/>
+                      <a:headEnd type="none" w="med" len="med"/>
+                      <a:tailEnd type="none" w="med" len="med"/>
+                    </a:lnL>
+                    <a:lnR w="9525" cap="flat" cmpd="sng" algn="ctr">
+                      <a:solidFill>
+                        <a:srgbClr val="DEE2E6"/>
+                      </a:solidFill>
+                      <a:prstDash val="solid"/>
+                      <a:round/>
+                      <a:headEnd type="none" w="med" len="med"/>
+                      <a:tailEnd type="none" w="med" len="med"/>
+                    </a:lnR>
+                    <a:lnT w="9525" cap="flat" cmpd="sng" algn="ctr">
+                      <a:solidFill>
+                        <a:srgbClr val="DEE2E6"/>
+                      </a:solidFill>
+                      <a:prstDash val="solid"/>
+                      <a:round/>
+                      <a:headEnd type="none" w="med" len="med"/>
+                      <a:tailEnd type="none" w="med" len="med"/>
+                    </a:lnT>
+                    <a:lnB w="9525" cap="flat" cmpd="sng" algn="ctr">
+                      <a:solidFill>
+                        <a:srgbClr val="DEE2E6"/>
+                      </a:solidFill>
+                      <a:prstDash val="solid"/>
+                      <a:round/>
+                      <a:headEnd type="none" w="med" len="med"/>
+                      <a:tailEnd type="none" w="med" len="med"/>
+                    </a:lnB>
+                    <a:solidFill>
+                      <a:srgbClr val="FFFFFF"/>
+                    </a:solidFill>
+                  </a:tcPr>
+                </a:tc>
+                <a:tc>
+                  <a:txBody>
+                    <a:bodyPr/>
+                    <a:lstStyle/>
+                    <a:p>
+                      <a:pPr algn="l"/>
+                      <a:r>
+                        <a:rPr lang="en-US" sz="1200">
+                          <a:effectLst/>
+                        </a:rPr>
+                        <a:t>Y</a:t>
+                      </a:r>
+                    </a:p>
+                  </a:txBody>
+                  <a:tcPr marL="30218" marR="30218" marT="15109" marB="15109" anchor="ctr">
+                    <a:lnL w="9525" cap="flat" cmpd="sng" algn="ctr">
+                      <a:solidFill>
+                        <a:srgbClr val="DEE2E6"/>
+                      </a:solidFill>
+                      <a:prstDash val="solid"/>
+                      <a:round/>
+                      <a:headEnd type="none" w="med" len="med"/>
+                      <a:tailEnd type="none" w="med" len="med"/>
+                    </a:lnL>
+                    <a:lnR w="9525" cap="flat" cmpd="sng" algn="ctr">
+                      <a:solidFill>
+                        <a:srgbClr val="DEE2E6"/>
+                      </a:solidFill>
+                      <a:prstDash val="solid"/>
+                      <a:round/>
+                      <a:headEnd type="none" w="med" len="med"/>
+                      <a:tailEnd type="none" w="med" len="med"/>
+                    </a:lnR>
+                    <a:lnT w="9525" cap="flat" cmpd="sng" algn="ctr">
+                      <a:solidFill>
+                        <a:srgbClr val="DEE2E6"/>
+                      </a:solidFill>
+                      <a:prstDash val="solid"/>
+                      <a:round/>
+                      <a:headEnd type="none" w="med" len="med"/>
+                      <a:tailEnd type="none" w="med" len="med"/>
+                    </a:lnT>
+                    <a:lnB w="9525" cap="flat" cmpd="sng" algn="ctr">
+                      <a:solidFill>
+                        <a:srgbClr val="DEE2E6"/>
+                      </a:solidFill>
+                      <a:prstDash val="solid"/>
+                      <a:round/>
+                      <a:headEnd type="none" w="med" len="med"/>
+                      <a:tailEnd type="none" w="med" len="med"/>
+                    </a:lnB>
+                    <a:solidFill>
+                      <a:srgbClr val="FFFFFF"/>
+                    </a:solidFill>
+                  </a:tcPr>
+                </a:tc>
+                <a:tc>
+                  <a:txBody>
+                    <a:bodyPr/>
+                    <a:lstStyle/>
+                    <a:p>
+                      <a:pPr algn="l"/>
+                      <a:r>
+                        <a:rPr lang="en-US" sz="1200" dirty="0">
+                          <a:effectLst/>
+                        </a:rPr>
+                        <a:t>See </a:t>
+                      </a:r>
+                      <a:r>
+                        <a:rPr lang="en-US" sz="1200" u="sng" dirty="0">
+                          <a:solidFill>
+                            <a:srgbClr val="0D6EFD"/>
+                          </a:solidFill>
+                          <a:effectLst/>
+                          <a:hlinkClick r:id="rId6"/>
+                        </a:rPr>
+                        <a:t>Section 4.4</a:t>
+                      </a:r>
+                      <a:endParaRPr lang="en-US" sz="1200" dirty="0">
+                        <a:effectLst/>
+                      </a:endParaRPr>
+                    </a:p>
+                  </a:txBody>
+                  <a:tcPr marL="30218" marR="30218" marT="15109" marB="15109" anchor="ctr">
+                    <a:lnL w="9525" cap="flat" cmpd="sng" algn="ctr">
+                      <a:solidFill>
+                        <a:srgbClr val="DEE2E6"/>
+                      </a:solidFill>
+                      <a:prstDash val="solid"/>
+                      <a:round/>
+                      <a:headEnd type="none" w="med" len="med"/>
+                      <a:tailEnd type="none" w="med" len="med"/>
+                    </a:lnL>
+                    <a:lnR w="9525" cap="flat" cmpd="sng" algn="ctr">
+                      <a:solidFill>
+                        <a:srgbClr val="DEE2E6"/>
+                      </a:solidFill>
+                      <a:prstDash val="solid"/>
+                      <a:round/>
+                      <a:headEnd type="none" w="med" len="med"/>
+                      <a:tailEnd type="none" w="med" len="med"/>
+                    </a:lnR>
+                    <a:lnT w="9525" cap="flat" cmpd="sng" algn="ctr">
+                      <a:solidFill>
+                        <a:srgbClr val="DEE2E6"/>
+                      </a:solidFill>
+                      <a:prstDash val="solid"/>
+                      <a:round/>
+                      <a:headEnd type="none" w="med" len="med"/>
+                      <a:tailEnd type="none" w="med" len="med"/>
+                    </a:lnT>
+                    <a:lnB w="9525" cap="flat" cmpd="sng" algn="ctr">
+                      <a:solidFill>
+                        <a:srgbClr val="DEE2E6"/>
+                      </a:solidFill>
+                      <a:prstDash val="solid"/>
+                      <a:round/>
+                      <a:headEnd type="none" w="med" len="med"/>
+                      <a:tailEnd type="none" w="med" len="med"/>
+                    </a:lnB>
+                    <a:solidFill>
+                      <a:srgbClr val="FFFFFF"/>
+                    </a:solidFill>
+                  </a:tcPr>
+                </a:tc>
+                <a:tc>
+                  <a:txBody>
+                    <a:bodyPr/>
+                    <a:lstStyle/>
+                    <a:p>
+                      <a:pPr algn="l"/>
+                      <a:r>
+                        <a:rPr lang="en-US" sz="1200" b="0" i="0" u="sng" dirty="0" smtClean="0">
+                          <a:solidFill>
+                            <a:srgbClr val="0D6EFD"/>
+                          </a:solidFill>
+                          <a:effectLst/>
+                          <a:latin typeface="Inter"/>
+                          <a:hlinkClick r:id="rId10"/>
+                        </a:rPr>
+                        <a:t>Requirement #19</a:t>
+                      </a:r>
+                      <a:endParaRPr lang="en-US" sz="1200" dirty="0">
+                        <a:effectLst/>
+                      </a:endParaRPr>
+                    </a:p>
+                  </a:txBody>
+                  <a:tcPr marL="30218" marR="30218" marT="15109" marB="15109" anchor="ctr">
+                    <a:lnL w="9525" cap="flat" cmpd="sng" algn="ctr">
+                      <a:solidFill>
+                        <a:srgbClr val="DEE2E6"/>
+                      </a:solidFill>
+                      <a:prstDash val="solid"/>
+                      <a:round/>
+                      <a:headEnd type="none" w="med" len="med"/>
+                      <a:tailEnd type="none" w="med" len="med"/>
+                    </a:lnL>
+                    <a:lnR w="9525" cap="flat" cmpd="sng" algn="ctr">
+                      <a:solidFill>
+                        <a:srgbClr val="DEE2E6"/>
+                      </a:solidFill>
+                      <a:prstDash val="solid"/>
+                      <a:round/>
+                      <a:headEnd type="none" w="med" len="med"/>
+                      <a:tailEnd type="none" w="med" len="med"/>
+                    </a:lnR>
+                    <a:lnT w="9525" cap="flat" cmpd="sng" algn="ctr">
+                      <a:solidFill>
+                        <a:srgbClr val="DEE2E6"/>
+                      </a:solidFill>
+                      <a:prstDash val="solid"/>
+                      <a:round/>
+                      <a:headEnd type="none" w="med" len="med"/>
+                      <a:tailEnd type="none" w="med" len="med"/>
+                    </a:lnT>
+                    <a:lnB w="9525" cap="flat" cmpd="sng" algn="ctr">
+                      <a:solidFill>
+                        <a:srgbClr val="DEE2E6"/>
+                      </a:solidFill>
+                      <a:prstDash val="solid"/>
+                      <a:round/>
+                      <a:headEnd type="none" w="med" len="med"/>
+                      <a:tailEnd type="none" w="med" len="med"/>
+                    </a:lnB>
+                    <a:solidFill>
+                      <a:srgbClr val="FFFFFF"/>
+                    </a:solidFill>
+                  </a:tcPr>
+                </a:tc>
+              </a:tr>
+              <a:tr h="725628">
+                <a:tc>
+                  <a:txBody>
+                    <a:bodyPr/>
+                    <a:lstStyle/>
+                    <a:p>
+                      <a:pPr algn="l"/>
+                      <a:r>
+                        <a:rPr lang="en-US" sz="1200">
+                          <a:effectLst/>
+                        </a:rPr>
+                        <a:t>R14: The innermost template takes precedence when templates are applied at multiple ancestor nodes</a:t>
+                      </a:r>
+                    </a:p>
+                  </a:txBody>
+                  <a:tcPr marL="30218" marR="30218" marT="15109" marB="15109" anchor="ctr">
+                    <a:lnL w="9525" cap="flat" cmpd="sng" algn="ctr">
+                      <a:solidFill>
+                        <a:srgbClr val="DEE2E6"/>
+                      </a:solidFill>
+                      <a:prstDash val="solid"/>
+                      <a:round/>
+                      <a:headEnd type="none" w="med" len="med"/>
+                      <a:tailEnd type="none" w="med" len="med"/>
+                    </a:lnL>
+                    <a:lnR w="9525" cap="flat" cmpd="sng" algn="ctr">
+                      <a:solidFill>
+                        <a:srgbClr val="DEE2E6"/>
+                      </a:solidFill>
+                      <a:prstDash val="solid"/>
+                      <a:round/>
+                      <a:headEnd type="none" w="med" len="med"/>
+                      <a:tailEnd type="none" w="med" len="med"/>
+                    </a:lnR>
+                    <a:lnT w="9525" cap="flat" cmpd="sng" algn="ctr">
+                      <a:solidFill>
+                        <a:srgbClr val="DEE2E6"/>
+                      </a:solidFill>
+                      <a:prstDash val="solid"/>
+                      <a:round/>
+                      <a:headEnd type="none" w="med" len="med"/>
+                      <a:tailEnd type="none" w="med" len="med"/>
+                    </a:lnT>
+                    <a:lnB w="9525" cap="flat" cmpd="sng" algn="ctr">
+                      <a:solidFill>
+                        <a:srgbClr val="DEE2E6"/>
+                      </a:solidFill>
+                      <a:prstDash val="solid"/>
+                      <a:round/>
+                      <a:headEnd type="none" w="med" len="med"/>
+                      <a:tailEnd type="none" w="med" len="med"/>
+                    </a:lnB>
+                    <a:solidFill>
+                      <a:srgbClr val="FFFFFF"/>
+                    </a:solidFill>
+                  </a:tcPr>
+                </a:tc>
+                <a:tc>
+                  <a:txBody>
+                    <a:bodyPr/>
+                    <a:lstStyle/>
+                    <a:p>
+                      <a:pPr algn="l"/>
+                      <a:r>
+                        <a:rPr lang="en-US" sz="1200">
+                          <a:effectLst/>
+                        </a:rPr>
+                        <a:t>Y</a:t>
+                      </a:r>
+                    </a:p>
+                  </a:txBody>
+                  <a:tcPr marL="30218" marR="30218" marT="15109" marB="15109" anchor="ctr">
+                    <a:lnL w="9525" cap="flat" cmpd="sng" algn="ctr">
+                      <a:solidFill>
+                        <a:srgbClr val="DEE2E6"/>
+                      </a:solidFill>
+                      <a:prstDash val="solid"/>
+                      <a:round/>
+                      <a:headEnd type="none" w="med" len="med"/>
+                      <a:tailEnd type="none" w="med" len="med"/>
+                    </a:lnL>
+                    <a:lnR w="9525" cap="flat" cmpd="sng" algn="ctr">
+                      <a:solidFill>
+                        <a:srgbClr val="DEE2E6"/>
+                      </a:solidFill>
+                      <a:prstDash val="solid"/>
+                      <a:round/>
+                      <a:headEnd type="none" w="med" len="med"/>
+                      <a:tailEnd type="none" w="med" len="med"/>
+                    </a:lnR>
+                    <a:lnT w="9525" cap="flat" cmpd="sng" algn="ctr">
+                      <a:solidFill>
+                        <a:srgbClr val="DEE2E6"/>
+                      </a:solidFill>
+                      <a:prstDash val="solid"/>
+                      <a:round/>
+                      <a:headEnd type="none" w="med" len="med"/>
+                      <a:tailEnd type="none" w="med" len="med"/>
+                    </a:lnT>
+                    <a:lnB w="9525" cap="flat" cmpd="sng" algn="ctr">
+                      <a:solidFill>
+                        <a:srgbClr val="DEE2E6"/>
+                      </a:solidFill>
+                      <a:prstDash val="solid"/>
+                      <a:round/>
+                      <a:headEnd type="none" w="med" len="med"/>
+                      <a:tailEnd type="none" w="med" len="med"/>
+                    </a:lnB>
+                    <a:solidFill>
+                      <a:srgbClr val="FFFFFF"/>
+                    </a:solidFill>
+                  </a:tcPr>
+                </a:tc>
+                <a:tc>
+                  <a:txBody>
+                    <a:bodyPr/>
+                    <a:lstStyle/>
+                    <a:p>
+                      <a:pPr algn="l"/>
+                      <a:r>
+                        <a:rPr lang="en-US" sz="1200">
+                          <a:effectLst/>
+                        </a:rPr>
+                        <a:t>See </a:t>
+                      </a:r>
+                      <a:r>
+                        <a:rPr lang="en-US" sz="1200" u="sng">
+                          <a:solidFill>
+                            <a:srgbClr val="0D6EFD"/>
+                          </a:solidFill>
+                          <a:effectLst/>
+                          <a:hlinkClick r:id="rId6"/>
+                        </a:rPr>
+                        <a:t>Section 4.4</a:t>
+                      </a:r>
+                      <a:endParaRPr lang="en-US" sz="1200">
+                        <a:effectLst/>
+                      </a:endParaRPr>
+                    </a:p>
+                  </a:txBody>
+                  <a:tcPr marL="30218" marR="30218" marT="15109" marB="15109" anchor="ctr">
+                    <a:lnL w="9525" cap="flat" cmpd="sng" algn="ctr">
+                      <a:solidFill>
+                        <a:srgbClr val="DEE2E6"/>
+                      </a:solidFill>
+                      <a:prstDash val="solid"/>
+                      <a:round/>
+                      <a:headEnd type="none" w="med" len="med"/>
+                      <a:tailEnd type="none" w="med" len="med"/>
+                    </a:lnL>
+                    <a:lnR w="9525" cap="flat" cmpd="sng" algn="ctr">
+                      <a:solidFill>
+                        <a:srgbClr val="DEE2E6"/>
+                      </a:solidFill>
+                      <a:prstDash val="solid"/>
+                      <a:round/>
+                      <a:headEnd type="none" w="med" len="med"/>
+                      <a:tailEnd type="none" w="med" len="med"/>
+                    </a:lnR>
+                    <a:lnT w="9525" cap="flat" cmpd="sng" algn="ctr">
+                      <a:solidFill>
+                        <a:srgbClr val="DEE2E6"/>
+                      </a:solidFill>
+                      <a:prstDash val="solid"/>
+                      <a:round/>
+                      <a:headEnd type="none" w="med" len="med"/>
+                      <a:tailEnd type="none" w="med" len="med"/>
+                    </a:lnT>
+                    <a:lnB w="9525" cap="flat" cmpd="sng" algn="ctr">
+                      <a:solidFill>
+                        <a:srgbClr val="DEE2E6"/>
+                      </a:solidFill>
+                      <a:prstDash val="solid"/>
+                      <a:round/>
+                      <a:headEnd type="none" w="med" len="med"/>
+                      <a:tailEnd type="none" w="med" len="med"/>
+                    </a:lnB>
+                    <a:solidFill>
+                      <a:srgbClr val="FFFFFF"/>
+                    </a:solidFill>
+                  </a:tcPr>
+                </a:tc>
+                <a:tc>
+                  <a:txBody>
+                    <a:bodyPr/>
+                    <a:lstStyle/>
+                    <a:p>
+                      <a:pPr algn="l"/>
+                      <a:r>
+                        <a:rPr lang="en-US" sz="1200" b="0" i="0" u="sng" dirty="0" smtClean="0">
+                          <a:solidFill>
+                            <a:srgbClr val="0D6EFD"/>
+                          </a:solidFill>
+                          <a:effectLst/>
+                          <a:latin typeface="Inter"/>
+                          <a:hlinkClick r:id="rId11"/>
+                        </a:rPr>
+                        <a:t>Requirement #20</a:t>
+                      </a:r>
+                      <a:endParaRPr lang="en-US" sz="1200" dirty="0">
+                        <a:effectLst/>
+                      </a:endParaRPr>
+                    </a:p>
+                  </a:txBody>
+                  <a:tcPr marL="30218" marR="30218" marT="15109" marB="15109" anchor="ctr">
+                    <a:lnL w="9525" cap="flat" cmpd="sng" algn="ctr">
+                      <a:solidFill>
+                        <a:srgbClr val="DEE2E6"/>
+                      </a:solidFill>
+                      <a:prstDash val="solid"/>
+                      <a:round/>
+                      <a:headEnd type="none" w="med" len="med"/>
+                      <a:tailEnd type="none" w="med" len="med"/>
+                    </a:lnL>
+                    <a:lnR w="9525" cap="flat" cmpd="sng" algn="ctr">
+                      <a:solidFill>
+                        <a:srgbClr val="DEE2E6"/>
+                      </a:solidFill>
+                      <a:prstDash val="solid"/>
+                      <a:round/>
+                      <a:headEnd type="none" w="med" len="med"/>
+                      <a:tailEnd type="none" w="med" len="med"/>
+                    </a:lnR>
+                    <a:lnT w="9525" cap="flat" cmpd="sng" algn="ctr">
+                      <a:solidFill>
+                        <a:srgbClr val="DEE2E6"/>
+                      </a:solidFill>
+                      <a:prstDash val="solid"/>
+                      <a:round/>
+                      <a:headEnd type="none" w="med" len="med"/>
+                      <a:tailEnd type="none" w="med" len="med"/>
+                    </a:lnT>
+                    <a:lnB w="9525" cap="flat" cmpd="sng" algn="ctr">
+                      <a:solidFill>
+                        <a:srgbClr val="DEE2E6"/>
+                      </a:solidFill>
+                      <a:prstDash val="solid"/>
+                      <a:round/>
+                      <a:headEnd type="none" w="med" len="med"/>
+                      <a:tailEnd type="none" w="med" len="med"/>
+                    </a:lnB>
+                    <a:solidFill>
+                      <a:srgbClr val="FFFFFF"/>
+                    </a:solidFill>
+                  </a:tcPr>
+                </a:tc>
+              </a:tr>
+              <a:tr h="502210">
+                <a:tc>
+                  <a:txBody>
+                    <a:bodyPr/>
+                    <a:lstStyle/>
+                    <a:p>
+                      <a:pPr algn="l"/>
+                      <a:r>
+                        <a:rPr lang="en-US" sz="1200" dirty="0">
+                          <a:effectLst/>
+                        </a:rPr>
+                        <a:t>R15: Enable non-NMDA servers to return the expanded data</a:t>
+                      </a:r>
+                    </a:p>
+                  </a:txBody>
+                  <a:tcPr marL="30218" marR="30218" marT="15109" marB="15109" anchor="ctr">
+                    <a:lnL w="9525" cap="flat" cmpd="sng" algn="ctr">
+                      <a:solidFill>
+                        <a:srgbClr val="DEE2E6"/>
+                      </a:solidFill>
+                      <a:prstDash val="solid"/>
+                      <a:round/>
+                      <a:headEnd type="none" w="med" len="med"/>
+                      <a:tailEnd type="none" w="med" len="med"/>
+                    </a:lnL>
+                    <a:lnR w="9525" cap="flat" cmpd="sng" algn="ctr">
+                      <a:solidFill>
+                        <a:srgbClr val="DEE2E6"/>
+                      </a:solidFill>
+                      <a:prstDash val="solid"/>
+                      <a:round/>
+                      <a:headEnd type="none" w="med" len="med"/>
+                      <a:tailEnd type="none" w="med" len="med"/>
+                    </a:lnR>
+                    <a:lnT w="9525" cap="flat" cmpd="sng" algn="ctr">
+                      <a:solidFill>
+                        <a:srgbClr val="DEE2E6"/>
+                      </a:solidFill>
+                      <a:prstDash val="solid"/>
+                      <a:round/>
+                      <a:headEnd type="none" w="med" len="med"/>
+                      <a:tailEnd type="none" w="med" len="med"/>
+                    </a:lnT>
+                    <a:lnB w="9525" cap="flat" cmpd="sng" algn="ctr">
+                      <a:solidFill>
+                        <a:srgbClr val="DEE2E6"/>
+                      </a:solidFill>
+                      <a:prstDash val="solid"/>
+                      <a:round/>
+                      <a:headEnd type="none" w="med" len="med"/>
+                      <a:tailEnd type="none" w="med" len="med"/>
+                    </a:lnB>
+                    <a:solidFill>
+                      <a:schemeClr val="accent4">
+                        <a:lumMod val="20000"/>
+                        <a:lumOff val="80000"/>
+                      </a:schemeClr>
+                    </a:solidFill>
+                  </a:tcPr>
+                </a:tc>
+                <a:tc>
+                  <a:txBody>
+                    <a:bodyPr/>
+                    <a:lstStyle/>
+                    <a:p>
+                      <a:pPr algn="l"/>
+                      <a:r>
+                        <a:rPr lang="en-US" sz="1200" dirty="0">
+                          <a:effectLst/>
+                        </a:rPr>
+                        <a:t>N</a:t>
+                      </a:r>
+                    </a:p>
+                  </a:txBody>
+                  <a:tcPr marL="30218" marR="30218" marT="15109" marB="15109" anchor="ctr">
+                    <a:lnL w="9525" cap="flat" cmpd="sng" algn="ctr">
+                      <a:solidFill>
+                        <a:srgbClr val="DEE2E6"/>
+                      </a:solidFill>
+                      <a:prstDash val="solid"/>
+                      <a:round/>
+                      <a:headEnd type="none" w="med" len="med"/>
+                      <a:tailEnd type="none" w="med" len="med"/>
+                    </a:lnL>
+                    <a:lnR w="9525" cap="flat" cmpd="sng" algn="ctr">
+                      <a:solidFill>
+                        <a:srgbClr val="DEE2E6"/>
+                      </a:solidFill>
+                      <a:prstDash val="solid"/>
+                      <a:round/>
+                      <a:headEnd type="none" w="med" len="med"/>
+                      <a:tailEnd type="none" w="med" len="med"/>
+                    </a:lnR>
+                    <a:lnT w="9525" cap="flat" cmpd="sng" algn="ctr">
+                      <a:solidFill>
+                        <a:srgbClr val="DEE2E6"/>
+                      </a:solidFill>
+                      <a:prstDash val="solid"/>
+                      <a:round/>
+                      <a:headEnd type="none" w="med" len="med"/>
+                      <a:tailEnd type="none" w="med" len="med"/>
+                    </a:lnT>
+                    <a:lnB w="9525" cap="flat" cmpd="sng" algn="ctr">
+                      <a:solidFill>
+                        <a:srgbClr val="DEE2E6"/>
+                      </a:solidFill>
+                      <a:prstDash val="solid"/>
+                      <a:round/>
+                      <a:headEnd type="none" w="med" len="med"/>
+                      <a:tailEnd type="none" w="med" len="med"/>
+                    </a:lnB>
+                    <a:solidFill>
+                      <a:schemeClr val="accent4">
+                        <a:lumMod val="20000"/>
+                        <a:lumOff val="80000"/>
+                      </a:schemeClr>
+                    </a:solidFill>
+                  </a:tcPr>
+                </a:tc>
+                <a:tc>
+                  <a:txBody>
+                    <a:bodyPr/>
+                    <a:lstStyle/>
+                    <a:p>
+                      <a:pPr algn="l"/>
+                      <a:r>
+                        <a:rPr lang="en-US" sz="1200">
+                          <a:effectLst/>
+                        </a:rPr>
+                        <a:t>have a dedicated section (</a:t>
+                      </a:r>
+                      <a:r>
+                        <a:rPr lang="en-US" sz="1200" u="sng">
+                          <a:solidFill>
+                            <a:srgbClr val="0D6EFD"/>
+                          </a:solidFill>
+                          <a:effectLst/>
+                          <a:hlinkClick r:id="rId12"/>
+                        </a:rPr>
+                        <a:t>Section 6</a:t>
+                      </a:r>
+                      <a:r>
+                        <a:rPr lang="en-US" sz="1200">
+                          <a:effectLst/>
+                        </a:rPr>
+                        <a:t>) for this, but empty now</a:t>
+                      </a:r>
+                    </a:p>
+                  </a:txBody>
+                  <a:tcPr marL="30218" marR="30218" marT="15109" marB="15109" anchor="ctr">
+                    <a:lnL w="9525" cap="flat" cmpd="sng" algn="ctr">
+                      <a:solidFill>
+                        <a:srgbClr val="DEE2E6"/>
+                      </a:solidFill>
+                      <a:prstDash val="solid"/>
+                      <a:round/>
+                      <a:headEnd type="none" w="med" len="med"/>
+                      <a:tailEnd type="none" w="med" len="med"/>
+                    </a:lnL>
+                    <a:lnR w="9525" cap="flat" cmpd="sng" algn="ctr">
+                      <a:solidFill>
+                        <a:srgbClr val="DEE2E6"/>
+                      </a:solidFill>
+                      <a:prstDash val="solid"/>
+                      <a:round/>
+                      <a:headEnd type="none" w="med" len="med"/>
+                      <a:tailEnd type="none" w="med" len="med"/>
+                    </a:lnR>
+                    <a:lnT w="9525" cap="flat" cmpd="sng" algn="ctr">
+                      <a:solidFill>
+                        <a:srgbClr val="DEE2E6"/>
+                      </a:solidFill>
+                      <a:prstDash val="solid"/>
+                      <a:round/>
+                      <a:headEnd type="none" w="med" len="med"/>
+                      <a:tailEnd type="none" w="med" len="med"/>
+                    </a:lnT>
+                    <a:lnB w="9525" cap="flat" cmpd="sng" algn="ctr">
+                      <a:solidFill>
+                        <a:srgbClr val="DEE2E6"/>
+                      </a:solidFill>
+                      <a:prstDash val="solid"/>
+                      <a:round/>
+                      <a:headEnd type="none" w="med" len="med"/>
+                      <a:tailEnd type="none" w="med" len="med"/>
+                    </a:lnB>
+                    <a:solidFill>
+                      <a:schemeClr val="accent4">
+                        <a:lumMod val="20000"/>
+                        <a:lumOff val="80000"/>
+                      </a:schemeClr>
+                    </a:solidFill>
+                  </a:tcPr>
+                </a:tc>
+                <a:tc>
+                  <a:txBody>
+                    <a:bodyPr/>
+                    <a:lstStyle/>
+                    <a:p>
+                      <a:pPr algn="l"/>
+                      <a:r>
+                        <a:rPr lang="en-US" sz="1200" b="0" i="0" u="sng" dirty="0" smtClean="0">
+                          <a:solidFill>
+                            <a:srgbClr val="0D6EFD"/>
+                          </a:solidFill>
+                          <a:effectLst/>
+                          <a:latin typeface="Inter"/>
+                          <a:hlinkClick r:id="rId13"/>
+                        </a:rPr>
+                        <a:t>Requirement #21</a:t>
+                      </a:r>
+                      <a:endParaRPr lang="en-US" sz="1200" dirty="0">
+                        <a:effectLst/>
+                      </a:endParaRPr>
+                    </a:p>
+                  </a:txBody>
+                  <a:tcPr marL="30218" marR="30218" marT="15109" marB="15109" anchor="ctr">
+                    <a:lnL w="9525" cap="flat" cmpd="sng" algn="ctr">
+                      <a:solidFill>
+                        <a:srgbClr val="DEE2E6"/>
+                      </a:solidFill>
+                      <a:prstDash val="solid"/>
+                      <a:round/>
+                      <a:headEnd type="none" w="med" len="med"/>
+                      <a:tailEnd type="none" w="med" len="med"/>
+                    </a:lnL>
+                    <a:lnR w="9525" cap="flat" cmpd="sng" algn="ctr">
+                      <a:solidFill>
+                        <a:srgbClr val="DEE2E6"/>
+                      </a:solidFill>
+                      <a:prstDash val="solid"/>
+                      <a:round/>
+                      <a:headEnd type="none" w="med" len="med"/>
+                      <a:tailEnd type="none" w="med" len="med"/>
+                    </a:lnR>
+                    <a:lnT w="9525" cap="flat" cmpd="sng" algn="ctr">
+                      <a:solidFill>
+                        <a:srgbClr val="DEE2E6"/>
+                      </a:solidFill>
+                      <a:prstDash val="solid"/>
+                      <a:round/>
+                      <a:headEnd type="none" w="med" len="med"/>
+                      <a:tailEnd type="none" w="med" len="med"/>
+                    </a:lnT>
+                    <a:lnB w="9525" cap="flat" cmpd="sng" algn="ctr">
+                      <a:solidFill>
+                        <a:srgbClr val="DEE2E6"/>
+                      </a:solidFill>
+                      <a:prstDash val="solid"/>
+                      <a:round/>
+                      <a:headEnd type="none" w="med" len="med"/>
+                      <a:tailEnd type="none" w="med" len="med"/>
+                    </a:lnB>
+                    <a:solidFill>
+                      <a:schemeClr val="accent4">
+                        <a:lumMod val="20000"/>
+                        <a:lumOff val="80000"/>
+                      </a:schemeClr>
+                    </a:solidFill>
+                  </a:tcPr>
+                </a:tc>
+              </a:tr>
+              <a:tr h="615826">
+                <a:tc>
+                  <a:txBody>
+                    <a:bodyPr/>
+                    <a:lstStyle/>
+                    <a:p>
+                      <a:pPr algn="l"/>
+                      <a:r>
+                        <a:rPr lang="en-US" sz="1200" dirty="0">
+                          <a:solidFill>
+                            <a:srgbClr val="C00000"/>
+                          </a:solidFill>
+                          <a:effectLst/>
+                        </a:rPr>
+                        <a:t>Not discussed</a:t>
+                      </a:r>
+                      <a:r>
+                        <a:rPr lang="en-US" sz="1200" dirty="0">
+                          <a:effectLst/>
+                        </a:rPr>
+                        <a:t>: R16: exclude templates applied at ancestor nodes</a:t>
+                      </a:r>
+                    </a:p>
+                  </a:txBody>
+                  <a:tcPr marL="30218" marR="30218" marT="15109" marB="15109" anchor="ctr">
+                    <a:lnL w="9525" cap="flat" cmpd="sng" algn="ctr">
+                      <a:solidFill>
+                        <a:srgbClr val="DEE2E6"/>
+                      </a:solidFill>
+                      <a:prstDash val="solid"/>
+                      <a:round/>
+                      <a:headEnd type="none" w="med" len="med"/>
+                      <a:tailEnd type="none" w="med" len="med"/>
+                    </a:lnL>
+                    <a:lnR w="9525" cap="flat" cmpd="sng" algn="ctr">
+                      <a:solidFill>
+                        <a:srgbClr val="DEE2E6"/>
+                      </a:solidFill>
+                      <a:prstDash val="solid"/>
+                      <a:round/>
+                      <a:headEnd type="none" w="med" len="med"/>
+                      <a:tailEnd type="none" w="med" len="med"/>
+                    </a:lnR>
+                    <a:lnT w="9525" cap="flat" cmpd="sng" algn="ctr">
+                      <a:solidFill>
+                        <a:srgbClr val="DEE2E6"/>
+                      </a:solidFill>
+                      <a:prstDash val="solid"/>
+                      <a:round/>
+                      <a:headEnd type="none" w="med" len="med"/>
+                      <a:tailEnd type="none" w="med" len="med"/>
+                    </a:lnT>
+                    <a:lnB w="9525" cap="flat" cmpd="sng" algn="ctr">
+                      <a:solidFill>
+                        <a:srgbClr val="DEE2E6"/>
+                      </a:solidFill>
+                      <a:prstDash val="solid"/>
+                      <a:round/>
+                      <a:headEnd type="none" w="med" len="med"/>
+                      <a:tailEnd type="none" w="med" len="med"/>
+                    </a:lnB>
+                    <a:solidFill>
+                      <a:schemeClr val="accent4">
+                        <a:lumMod val="20000"/>
+                        <a:lumOff val="80000"/>
+                      </a:schemeClr>
+                    </a:solidFill>
+                  </a:tcPr>
+                </a:tc>
+                <a:tc>
+                  <a:txBody>
+                    <a:bodyPr/>
+                    <a:lstStyle/>
+                    <a:p>
+                      <a:pPr algn="l"/>
+                      <a:r>
+                        <a:rPr lang="en-US" sz="1200" dirty="0">
+                          <a:effectLst/>
+                        </a:rPr>
+                        <a:t>N</a:t>
+                      </a:r>
+                    </a:p>
+                  </a:txBody>
+                  <a:tcPr marL="30218" marR="30218" marT="15109" marB="15109" anchor="ctr">
+                    <a:lnL w="9525" cap="flat" cmpd="sng" algn="ctr">
+                      <a:solidFill>
+                        <a:srgbClr val="DEE2E6"/>
+                      </a:solidFill>
+                      <a:prstDash val="solid"/>
+                      <a:round/>
+                      <a:headEnd type="none" w="med" len="med"/>
+                      <a:tailEnd type="none" w="med" len="med"/>
+                    </a:lnL>
+                    <a:lnR w="9525" cap="flat" cmpd="sng" algn="ctr">
+                      <a:solidFill>
+                        <a:srgbClr val="DEE2E6"/>
+                      </a:solidFill>
+                      <a:prstDash val="solid"/>
+                      <a:round/>
+                      <a:headEnd type="none" w="med" len="med"/>
+                      <a:tailEnd type="none" w="med" len="med"/>
+                    </a:lnR>
+                    <a:lnT w="9525" cap="flat" cmpd="sng" algn="ctr">
+                      <a:solidFill>
+                        <a:srgbClr val="DEE2E6"/>
+                      </a:solidFill>
+                      <a:prstDash val="solid"/>
+                      <a:round/>
+                      <a:headEnd type="none" w="med" len="med"/>
+                      <a:tailEnd type="none" w="med" len="med"/>
+                    </a:lnT>
+                    <a:lnB w="9525" cap="flat" cmpd="sng" algn="ctr">
+                      <a:solidFill>
+                        <a:srgbClr val="DEE2E6"/>
+                      </a:solidFill>
+                      <a:prstDash val="solid"/>
+                      <a:round/>
+                      <a:headEnd type="none" w="med" len="med"/>
+                      <a:tailEnd type="none" w="med" len="med"/>
+                    </a:lnB>
+                    <a:solidFill>
+                      <a:schemeClr val="accent4">
+                        <a:lumMod val="20000"/>
+                        <a:lumOff val="80000"/>
+                      </a:schemeClr>
+                    </a:solidFill>
+                  </a:tcPr>
+                </a:tc>
+                <a:tc>
+                  <a:txBody>
+                    <a:bodyPr/>
+                    <a:lstStyle/>
+                    <a:p>
+                      <a:pPr algn="l"/>
+                      <a:r>
+                        <a:rPr lang="en-US" sz="1200" dirty="0">
+                          <a:effectLst/>
+                        </a:rPr>
+                        <a:t>Seems to add some complexity, needs further discussion</a:t>
+                      </a:r>
+                    </a:p>
+                  </a:txBody>
+                  <a:tcPr marL="30218" marR="30218" marT="15109" marB="15109" anchor="ctr">
+                    <a:lnL w="9525" cap="flat" cmpd="sng" algn="ctr">
+                      <a:solidFill>
+                        <a:srgbClr val="DEE2E6"/>
+                      </a:solidFill>
+                      <a:prstDash val="solid"/>
+                      <a:round/>
+                      <a:headEnd type="none" w="med" len="med"/>
+                      <a:tailEnd type="none" w="med" len="med"/>
+                    </a:lnL>
+                    <a:lnR w="9525" cap="flat" cmpd="sng" algn="ctr">
+                      <a:solidFill>
+                        <a:srgbClr val="DEE2E6"/>
+                      </a:solidFill>
+                      <a:prstDash val="solid"/>
+                      <a:round/>
+                      <a:headEnd type="none" w="med" len="med"/>
+                      <a:tailEnd type="none" w="med" len="med"/>
+                    </a:lnR>
+                    <a:lnT w="9525" cap="flat" cmpd="sng" algn="ctr">
+                      <a:solidFill>
+                        <a:srgbClr val="DEE2E6"/>
+                      </a:solidFill>
+                      <a:prstDash val="solid"/>
+                      <a:round/>
+                      <a:headEnd type="none" w="med" len="med"/>
+                      <a:tailEnd type="none" w="med" len="med"/>
+                    </a:lnT>
+                    <a:lnB w="9525" cap="flat" cmpd="sng" algn="ctr">
+                      <a:solidFill>
+                        <a:srgbClr val="DEE2E6"/>
+                      </a:solidFill>
+                      <a:prstDash val="solid"/>
+                      <a:round/>
+                      <a:headEnd type="none" w="med" len="med"/>
+                      <a:tailEnd type="none" w="med" len="med"/>
+                    </a:lnB>
+                    <a:solidFill>
+                      <a:schemeClr val="accent4">
+                        <a:lumMod val="20000"/>
+                        <a:lumOff val="80000"/>
+                      </a:schemeClr>
+                    </a:solidFill>
+                  </a:tcPr>
+                </a:tc>
+                <a:tc>
+                  <a:txBody>
+                    <a:bodyPr/>
+                    <a:lstStyle/>
+                    <a:p>
+                      <a:pPr marL="0" marR="0" lvl="0" indent="0" algn="l" defTabSz="914400" rtl="0" eaLnBrk="1" fontAlgn="auto" latinLnBrk="0" hangingPunct="1">
+                        <a:lnSpc>
+                          <a:spcPct val="100000"/>
+                        </a:lnSpc>
+                        <a:spcBef>
+                          <a:spcPts val="0"/>
+                        </a:spcBef>
+                        <a:spcAft>
+                          <a:spcPts val="0"/>
+                        </a:spcAft>
+                        <a:buClrTx/>
+                        <a:buSzTx/>
+                        <a:buFontTx/>
+                        <a:buNone/>
+                        <a:tabLst/>
+                        <a:defRPr/>
+                      </a:pPr>
+                      <a:r>
+                        <a:rPr kumimoji="0" lang="en-US" sz="1200" b="0" i="0" u="sng" strike="noStrike" kern="1200" cap="none" spc="0" normalizeH="0" baseline="0" noProof="0" dirty="0" smtClean="0">
+                          <a:ln>
+                            <a:noFill/>
+                          </a:ln>
+                          <a:solidFill>
+                            <a:srgbClr val="0D6EFD"/>
+                          </a:solidFill>
+                          <a:effectLst/>
+                          <a:uLnTx/>
+                          <a:uFillTx/>
+                          <a:latin typeface="Inter"/>
+                          <a:ea typeface="+mn-ea"/>
+                          <a:cs typeface="+mn-cs"/>
+                          <a:hlinkClick r:id="rId14"/>
+                        </a:rPr>
+                        <a:t>Requirement #22</a:t>
+                      </a:r>
+                      <a:endParaRPr kumimoji="0" lang="en-US" sz="1200" b="0" i="0" u="none" strike="noStrike" kern="1200" cap="none" spc="0" normalizeH="0" baseline="0" noProof="0" dirty="0" smtClean="0">
+                        <a:ln>
+                          <a:noFill/>
+                        </a:ln>
+                        <a:solidFill>
+                          <a:prstClr val="black"/>
+                        </a:solidFill>
+                        <a:effectLst/>
+                        <a:uLnTx/>
+                        <a:uFillTx/>
+                        <a:latin typeface="+mn-lt"/>
+                        <a:ea typeface="+mn-ea"/>
+                        <a:cs typeface="+mn-cs"/>
+                      </a:endParaRPr>
+                    </a:p>
+                    <a:p>
+                      <a:pPr algn="l"/>
+                      <a:endParaRPr lang="en-US" sz="1200" dirty="0">
+                        <a:effectLst/>
+                      </a:endParaRPr>
+                    </a:p>
+                  </a:txBody>
+                  <a:tcPr marL="30218" marR="30218" marT="15109" marB="15109" anchor="ctr">
+                    <a:lnL w="9525" cap="flat" cmpd="sng" algn="ctr">
+                      <a:solidFill>
+                        <a:srgbClr val="DEE2E6"/>
+                      </a:solidFill>
+                      <a:prstDash val="solid"/>
+                      <a:round/>
+                      <a:headEnd type="none" w="med" len="med"/>
+                      <a:tailEnd type="none" w="med" len="med"/>
+                    </a:lnL>
+                    <a:lnR w="9525" cap="flat" cmpd="sng" algn="ctr">
+                      <a:solidFill>
+                        <a:srgbClr val="DEE2E6"/>
+                      </a:solidFill>
+                      <a:prstDash val="solid"/>
+                      <a:round/>
+                      <a:headEnd type="none" w="med" len="med"/>
+                      <a:tailEnd type="none" w="med" len="med"/>
+                    </a:lnR>
+                    <a:lnT w="9525" cap="flat" cmpd="sng" algn="ctr">
+                      <a:solidFill>
+                        <a:srgbClr val="DEE2E6"/>
+                      </a:solidFill>
+                      <a:prstDash val="solid"/>
+                      <a:round/>
+                      <a:headEnd type="none" w="med" len="med"/>
+                      <a:tailEnd type="none" w="med" len="med"/>
+                    </a:lnT>
+                    <a:lnB w="9525" cap="flat" cmpd="sng" algn="ctr">
+                      <a:solidFill>
+                        <a:srgbClr val="DEE2E6"/>
+                      </a:solidFill>
+                      <a:prstDash val="solid"/>
+                      <a:round/>
+                      <a:headEnd type="none" w="med" len="med"/>
+                      <a:tailEnd type="none" w="med" len="med"/>
+                    </a:lnB>
+                    <a:solidFill>
+                      <a:schemeClr val="accent4">
+                        <a:lumMod val="20000"/>
+                        <a:lumOff val="80000"/>
+                      </a:schemeClr>
+                    </a:solidFill>
+                  </a:tcPr>
+                </a:tc>
+              </a:tr>
+              <a:tr h="725628">
+                <a:tc>
+                  <a:txBody>
+                    <a:bodyPr/>
+                    <a:lstStyle/>
+                    <a:p>
+                      <a:pPr algn="l"/>
+                      <a:r>
+                        <a:rPr lang="en-US" sz="1200" b="0" dirty="0">
+                          <a:solidFill>
+                            <a:srgbClr val="C00000"/>
+                          </a:solidFill>
+                          <a:effectLst/>
+                        </a:rPr>
+                        <a:t>Not discussed</a:t>
+                      </a:r>
+                      <a:r>
+                        <a:rPr lang="en-US" sz="1200" dirty="0">
+                          <a:effectLst/>
+                        </a:rPr>
+                        <a:t>: R17: Annotations to determine which template a node was applied from</a:t>
+                      </a:r>
+                    </a:p>
+                  </a:txBody>
+                  <a:tcPr marL="30218" marR="30218" marT="15109" marB="15109" anchor="ctr">
+                    <a:lnL w="9525" cap="flat" cmpd="sng" algn="ctr">
+                      <a:solidFill>
+                        <a:srgbClr val="DEE2E6"/>
+                      </a:solidFill>
+                      <a:prstDash val="solid"/>
+                      <a:round/>
+                      <a:headEnd type="none" w="med" len="med"/>
+                      <a:tailEnd type="none" w="med" len="med"/>
+                    </a:lnL>
+                    <a:lnR w="9525" cap="flat" cmpd="sng" algn="ctr">
+                      <a:solidFill>
+                        <a:srgbClr val="DEE2E6"/>
+                      </a:solidFill>
+                      <a:prstDash val="solid"/>
+                      <a:round/>
+                      <a:headEnd type="none" w="med" len="med"/>
+                      <a:tailEnd type="none" w="med" len="med"/>
+                    </a:lnR>
+                    <a:lnT w="9525" cap="flat" cmpd="sng" algn="ctr">
+                      <a:solidFill>
+                        <a:srgbClr val="DEE2E6"/>
+                      </a:solidFill>
+                      <a:prstDash val="solid"/>
+                      <a:round/>
+                      <a:headEnd type="none" w="med" len="med"/>
+                      <a:tailEnd type="none" w="med" len="med"/>
+                    </a:lnT>
+                    <a:lnB w="9525" cap="flat" cmpd="sng" algn="ctr">
+                      <a:solidFill>
+                        <a:srgbClr val="DEE2E6"/>
+                      </a:solidFill>
+                      <a:prstDash val="solid"/>
+                      <a:round/>
+                      <a:headEnd type="none" w="med" len="med"/>
+                      <a:tailEnd type="none" w="med" len="med"/>
+                    </a:lnB>
+                    <a:solidFill>
+                      <a:schemeClr val="accent4">
+                        <a:lumMod val="20000"/>
+                        <a:lumOff val="80000"/>
+                      </a:schemeClr>
+                    </a:solidFill>
+                  </a:tcPr>
+                </a:tc>
+                <a:tc>
+                  <a:txBody>
+                    <a:bodyPr/>
+                    <a:lstStyle/>
+                    <a:p>
+                      <a:pPr algn="l"/>
+                      <a:r>
+                        <a:rPr lang="en-US" sz="1200" dirty="0">
+                          <a:effectLst/>
+                        </a:rPr>
+                        <a:t>N</a:t>
+                      </a:r>
+                    </a:p>
+                  </a:txBody>
+                  <a:tcPr marL="30218" marR="30218" marT="15109" marB="15109" anchor="ctr">
+                    <a:lnL w="9525" cap="flat" cmpd="sng" algn="ctr">
+                      <a:solidFill>
+                        <a:srgbClr val="DEE2E6"/>
+                      </a:solidFill>
+                      <a:prstDash val="solid"/>
+                      <a:round/>
+                      <a:headEnd type="none" w="med" len="med"/>
+                      <a:tailEnd type="none" w="med" len="med"/>
+                    </a:lnL>
+                    <a:lnR w="9525" cap="flat" cmpd="sng" algn="ctr">
+                      <a:solidFill>
+                        <a:srgbClr val="DEE2E6"/>
+                      </a:solidFill>
+                      <a:prstDash val="solid"/>
+                      <a:round/>
+                      <a:headEnd type="none" w="med" len="med"/>
+                      <a:tailEnd type="none" w="med" len="med"/>
+                    </a:lnR>
+                    <a:lnT w="9525" cap="flat" cmpd="sng" algn="ctr">
+                      <a:solidFill>
+                        <a:srgbClr val="DEE2E6"/>
+                      </a:solidFill>
+                      <a:prstDash val="solid"/>
+                      <a:round/>
+                      <a:headEnd type="none" w="med" len="med"/>
+                      <a:tailEnd type="none" w="med" len="med"/>
+                    </a:lnT>
+                    <a:lnB w="9525" cap="flat" cmpd="sng" algn="ctr">
+                      <a:solidFill>
+                        <a:srgbClr val="DEE2E6"/>
+                      </a:solidFill>
+                      <a:prstDash val="solid"/>
+                      <a:round/>
+                      <a:headEnd type="none" w="med" len="med"/>
+                      <a:tailEnd type="none" w="med" len="med"/>
+                    </a:lnB>
+                    <a:solidFill>
+                      <a:schemeClr val="accent4">
+                        <a:lumMod val="20000"/>
+                        <a:lumOff val="80000"/>
+                      </a:schemeClr>
+                    </a:solidFill>
+                  </a:tcPr>
+                </a:tc>
+                <a:tc>
+                  <a:txBody>
+                    <a:bodyPr/>
+                    <a:lstStyle/>
+                    <a:p>
+                      <a:pPr algn="l"/>
+                      <a:r>
+                        <a:rPr lang="en-US" sz="1200" dirty="0">
+                          <a:effectLst/>
+                        </a:rPr>
+                        <a:t>Needs further discussion</a:t>
+                      </a:r>
+                    </a:p>
+                  </a:txBody>
+                  <a:tcPr marL="30218" marR="30218" marT="15109" marB="15109" anchor="ctr">
+                    <a:lnL w="9525" cap="flat" cmpd="sng" algn="ctr">
+                      <a:solidFill>
+                        <a:srgbClr val="DEE2E6"/>
+                      </a:solidFill>
+                      <a:prstDash val="solid"/>
+                      <a:round/>
+                      <a:headEnd type="none" w="med" len="med"/>
+                      <a:tailEnd type="none" w="med" len="med"/>
+                    </a:lnL>
+                    <a:lnR w="9525" cap="flat" cmpd="sng" algn="ctr">
+                      <a:solidFill>
+                        <a:srgbClr val="DEE2E6"/>
+                      </a:solidFill>
+                      <a:prstDash val="solid"/>
+                      <a:round/>
+                      <a:headEnd type="none" w="med" len="med"/>
+                      <a:tailEnd type="none" w="med" len="med"/>
+                    </a:lnR>
+                    <a:lnT w="9525" cap="flat" cmpd="sng" algn="ctr">
+                      <a:solidFill>
+                        <a:srgbClr val="DEE2E6"/>
+                      </a:solidFill>
+                      <a:prstDash val="solid"/>
+                      <a:round/>
+                      <a:headEnd type="none" w="med" len="med"/>
+                      <a:tailEnd type="none" w="med" len="med"/>
+                    </a:lnT>
+                    <a:lnB w="9525" cap="flat" cmpd="sng" algn="ctr">
+                      <a:solidFill>
+                        <a:srgbClr val="DEE2E6"/>
+                      </a:solidFill>
+                      <a:prstDash val="solid"/>
+                      <a:round/>
+                      <a:headEnd type="none" w="med" len="med"/>
+                      <a:tailEnd type="none" w="med" len="med"/>
+                    </a:lnB>
+                    <a:solidFill>
+                      <a:schemeClr val="accent4">
+                        <a:lumMod val="20000"/>
+                        <a:lumOff val="80000"/>
+                      </a:schemeClr>
+                    </a:solidFill>
+                  </a:tcPr>
+                </a:tc>
+                <a:tc>
+                  <a:txBody>
+                    <a:bodyPr/>
+                    <a:lstStyle/>
+                    <a:p>
+                      <a:pPr marL="0" marR="0" lvl="0" indent="0" algn="l" defTabSz="914400" rtl="0" eaLnBrk="1" fontAlgn="auto" latinLnBrk="0" hangingPunct="1">
+                        <a:lnSpc>
+                          <a:spcPct val="100000"/>
+                        </a:lnSpc>
+                        <a:spcBef>
+                          <a:spcPts val="0"/>
+                        </a:spcBef>
+                        <a:spcAft>
+                          <a:spcPts val="0"/>
+                        </a:spcAft>
+                        <a:buClrTx/>
+                        <a:buSzTx/>
+                        <a:buFontTx/>
+                        <a:buNone/>
+                        <a:tabLst/>
+                        <a:defRPr/>
+                      </a:pPr>
+                      <a:r>
+                        <a:rPr kumimoji="0" lang="en-US" sz="1200" b="0" i="0" u="sng" strike="noStrike" kern="1200" cap="none" spc="0" normalizeH="0" baseline="0" noProof="0" dirty="0" smtClean="0">
+                          <a:ln>
+                            <a:noFill/>
+                          </a:ln>
+                          <a:solidFill>
+                            <a:srgbClr val="0D6EFD"/>
+                          </a:solidFill>
+                          <a:effectLst/>
+                          <a:uLnTx/>
+                          <a:uFillTx/>
+                          <a:latin typeface="Inter"/>
+                          <a:ea typeface="+mn-ea"/>
+                          <a:cs typeface="+mn-cs"/>
+                          <a:hlinkClick r:id="rId15"/>
+                        </a:rPr>
+                        <a:t>Requirement</a:t>
+                      </a:r>
+                      <a:r>
+                        <a:rPr kumimoji="0" lang="en-US" sz="1200" b="0" i="0" u="sng" strike="noStrike" kern="1200" cap="none" spc="0" normalizeH="0" baseline="0" noProof="0" dirty="0" smtClean="0">
+                          <a:ln>
+                            <a:noFill/>
+                          </a:ln>
+                          <a:solidFill>
+                            <a:srgbClr val="0D6EFD"/>
+                          </a:solidFill>
+                          <a:effectLst/>
+                          <a:uLnTx/>
+                          <a:uFillTx/>
+                          <a:latin typeface="Inter"/>
+                          <a:ea typeface="+mn-ea"/>
+                          <a:cs typeface="+mn-cs"/>
+                        </a:rPr>
+                        <a:t> #24</a:t>
+                      </a:r>
+                      <a:endParaRPr kumimoji="0" lang="en-US" sz="1200" b="0" i="0" u="none" strike="noStrike" kern="1200" cap="none" spc="0" normalizeH="0" baseline="0" noProof="0" dirty="0" smtClean="0">
+                        <a:ln>
+                          <a:noFill/>
+                        </a:ln>
+                        <a:solidFill>
+                          <a:prstClr val="black"/>
+                        </a:solidFill>
+                        <a:effectLst/>
+                        <a:uLnTx/>
+                        <a:uFillTx/>
+                        <a:latin typeface="+mn-lt"/>
+                        <a:ea typeface="+mn-ea"/>
+                        <a:cs typeface="+mn-cs"/>
+                      </a:endParaRPr>
+                    </a:p>
+                    <a:p>
+                      <a:pPr algn="l"/>
+                      <a:endParaRPr lang="en-US" sz="1200" dirty="0">
+                        <a:effectLst/>
+                      </a:endParaRPr>
+                    </a:p>
+                  </a:txBody>
+                  <a:tcPr marL="30218" marR="30218" marT="15109" marB="15109" anchor="ctr">
+                    <a:lnL w="9525" cap="flat" cmpd="sng" algn="ctr">
+                      <a:solidFill>
+                        <a:srgbClr val="DEE2E6"/>
+                      </a:solidFill>
+                      <a:prstDash val="solid"/>
+                      <a:round/>
+                      <a:headEnd type="none" w="med" len="med"/>
+                      <a:tailEnd type="none" w="med" len="med"/>
+                    </a:lnL>
+                    <a:lnR w="9525" cap="flat" cmpd="sng" algn="ctr">
+                      <a:solidFill>
+                        <a:srgbClr val="DEE2E6"/>
+                      </a:solidFill>
+                      <a:prstDash val="solid"/>
+                      <a:round/>
+                      <a:headEnd type="none" w="med" len="med"/>
+                      <a:tailEnd type="none" w="med" len="med"/>
+                    </a:lnR>
+                    <a:lnT w="9525" cap="flat" cmpd="sng" algn="ctr">
+                      <a:solidFill>
+                        <a:srgbClr val="DEE2E6"/>
+                      </a:solidFill>
+                      <a:prstDash val="solid"/>
+                      <a:round/>
+                      <a:headEnd type="none" w="med" len="med"/>
+                      <a:tailEnd type="none" w="med" len="med"/>
+                    </a:lnT>
+                    <a:lnB w="9525" cap="flat" cmpd="sng" algn="ctr">
+                      <a:solidFill>
+                        <a:srgbClr val="DEE2E6"/>
+                      </a:solidFill>
+                      <a:prstDash val="solid"/>
+                      <a:round/>
+                      <a:headEnd type="none" w="med" len="med"/>
+                      <a:tailEnd type="none" w="med" len="med"/>
+                    </a:lnB>
+                    <a:solidFill>
+                      <a:schemeClr val="accent4">
+                        <a:lumMod val="20000"/>
+                        <a:lumOff val="80000"/>
+                      </a:schemeClr>
+                    </a:solidFill>
+                  </a:tcPr>
+                </a:tc>
+              </a:tr>
+            </a:tbl>
+          </a:graphicData>
+        </a:graphic>
+      </p:graphicFrame>
       <p:sp>
         <p:nvSpPr>
-          <p:cNvPr id="5" name="Slide Number Placeholder 4">
+          <p:cNvPr id="8" name="Slide Number Placeholder 4">
             <a:extLst>
               <a:ext uri="{FF2B5EF4-FFF2-40B4-BE49-F238E27FC236}">
-                <a16:creationId xmlns:a16="http://schemas.microsoft.com/office/drawing/2014/main" xmlns="" id="{3EE13A6B-CD5C-2B6B-7266-342C4EAFD494}"/>
+                <a16:creationId xmlns="" xmlns:a16="http://schemas.microsoft.com/office/drawing/2014/main" id="{3EE13A6B-CD5C-2B6B-7266-342C4EAFD494}"/>
               </a:ext>
             </a:extLst>
           </p:cNvPr>
@@ -8188,10 +9437,40 @@
           </a:p>
         </p:txBody>
       </p:sp>
+      <p:sp>
+        <p:nvSpPr>
+          <p:cNvPr id="9" name="文本框 8"/>
+          <p:cNvSpPr txBox="1"/>
+          <p:nvPr/>
+        </p:nvSpPr>
+        <p:spPr>
+          <a:xfrm>
+            <a:off x="457931" y="6277302"/>
+            <a:ext cx="11403599" cy="276999"/>
+          </a:xfrm>
+          <a:prstGeom prst="rect">
+            <a:avLst/>
+          </a:prstGeom>
+          <a:noFill/>
+        </p:spPr>
+        <p:txBody>
+          <a:bodyPr wrap="square" rtlCol="0">
+            <a:spAutoFit/>
+          </a:bodyPr>
+          <a:lstStyle/>
+          <a:p>
+            <a:r>
+              <a:rPr lang="en-US" sz="1200" b="1" i="1" dirty="0" smtClean="0"/>
+              <a:t>Notes: Requirements that is “Mostly Opposed” in the polling have not been taken into account, nor have editorial requirements. </a:t>
+            </a:r>
+            <a:endParaRPr lang="en-US" sz="1200" b="1" i="1" dirty="0"/>
+          </a:p>
+        </p:txBody>
+      </p:sp>
     </p:spTree>
     <p:extLst>
       <p:ext uri="{BB962C8B-B14F-4D97-AF65-F5344CB8AC3E}">
-        <p14:creationId xmlns:p14="http://schemas.microsoft.com/office/powerpoint/2010/main" val="3510236641"/>
+        <p14:creationId xmlns:p14="http://schemas.microsoft.com/office/powerpoint/2010/main" val="175651370"/>
       </p:ext>
     </p:extLst>
   </p:cSld>
@@ -8227,10 +9506,270 @@
       </p:grpSpPr>
       <p:sp>
         <p:nvSpPr>
+          <p:cNvPr id="2" name="标题 1"/>
+          <p:cNvSpPr>
+            <a:spLocks noGrp="1"/>
+          </p:cNvSpPr>
+          <p:nvPr>
+            <p:ph type="title"/>
+          </p:nvPr>
+        </p:nvSpPr>
+        <p:spPr>
+          <a:xfrm>
+            <a:off x="838200" y="132368"/>
+            <a:ext cx="10515600" cy="1325563"/>
+          </a:xfrm>
+        </p:spPr>
+        <p:txBody>
+          <a:bodyPr>
+            <a:normAutofit/>
+          </a:bodyPr>
+          <a:lstStyle/>
+          <a:p>
+            <a:r>
+              <a:rPr lang="en-US" sz="3600" b="1" dirty="0" smtClean="0"/>
+              <a:t>Open Discussion: MUST template be valid when defined?</a:t>
+            </a:r>
+            <a:endParaRPr lang="en-US" sz="3600" b="1" dirty="0"/>
+          </a:p>
+        </p:txBody>
+      </p:sp>
+      <p:sp>
+        <p:nvSpPr>
+          <p:cNvPr id="3" name="内容占位符 2"/>
+          <p:cNvSpPr>
+            <a:spLocks noGrp="1"/>
+          </p:cNvSpPr>
+          <p:nvPr>
+            <p:ph idx="1"/>
+          </p:nvPr>
+        </p:nvSpPr>
+        <p:spPr>
+          <a:xfrm>
+            <a:off x="838200" y="1457931"/>
+            <a:ext cx="10957560" cy="5159953"/>
+          </a:xfrm>
+        </p:spPr>
+        <p:txBody>
+          <a:bodyPr>
+            <a:normAutofit lnSpcReduction="10000"/>
+          </a:bodyPr>
+          <a:lstStyle/>
+          <a:p>
+            <a:pPr marL="0" indent="0">
+              <a:buNone/>
+            </a:pPr>
+            <a:r>
+              <a:rPr lang="en-US" dirty="0" smtClean="0"/>
+              <a:t>The show-of-hands poll at the interim shows a split opinion.</a:t>
+            </a:r>
+          </a:p>
+          <a:p>
+            <a:pPr lvl="1"/>
+            <a:r>
+              <a:rPr lang="en-US" dirty="0" smtClean="0"/>
+              <a:t>Unsure if “no” because opposed to the entire idea or to doing it in a first release.</a:t>
+            </a:r>
+          </a:p>
+          <a:p>
+            <a:pPr marL="0" indent="0">
+              <a:buNone/>
+            </a:pPr>
+            <a:endParaRPr lang="en-US" sz="900" dirty="0" smtClean="0"/>
+          </a:p>
+          <a:p>
+            <a:pPr marL="0" indent="0">
+              <a:buNone/>
+            </a:pPr>
+            <a:r>
+              <a:rPr lang="en-US" dirty="0" smtClean="0"/>
+              <a:t>The current draft states:</a:t>
+            </a:r>
+          </a:p>
+          <a:p>
+            <a:r>
+              <a:rPr lang="en-US" i="1" dirty="0" smtClean="0"/>
+              <a:t>At definition time:</a:t>
+            </a:r>
+            <a:endParaRPr lang="en-US" i="1" dirty="0"/>
+          </a:p>
+          <a:p>
+            <a:pPr lvl="1"/>
+            <a:r>
+              <a:rPr lang="en-US" dirty="0"/>
+              <a:t>Template content does not have to be fully valid</a:t>
+            </a:r>
+          </a:p>
+          <a:p>
+            <a:pPr lvl="2"/>
+            <a:r>
+              <a:rPr lang="en-US" dirty="0" smtClean="0"/>
+              <a:t>e.g., </a:t>
+            </a:r>
+            <a:r>
+              <a:rPr lang="en-US" dirty="0"/>
+              <a:t>mandatory nodes can be missing</a:t>
+            </a:r>
+          </a:p>
+          <a:p>
+            <a:pPr lvl="1"/>
+            <a:r>
+              <a:rPr lang="en-US" dirty="0"/>
+              <a:t>Where validation is possible (</a:t>
+            </a:r>
+            <a:r>
+              <a:rPr lang="en-US" dirty="0" smtClean="0"/>
+              <a:t>e.g., </a:t>
+            </a:r>
+            <a:r>
+              <a:rPr lang="en-US" dirty="0"/>
+              <a:t>range, pattern, length), the server SHOULD enforce these constraints in the template</a:t>
+            </a:r>
+          </a:p>
+          <a:p>
+            <a:r>
+              <a:rPr lang="en-US" i="1" dirty="0" smtClean="0"/>
+              <a:t>At expansion time: </a:t>
+            </a:r>
+          </a:p>
+          <a:p>
+            <a:pPr lvl="1"/>
+            <a:r>
+              <a:rPr lang="en-US" dirty="0" smtClean="0"/>
+              <a:t>Config after template expansion MUST always </a:t>
+            </a:r>
+            <a:r>
+              <a:rPr lang="en-US" dirty="0"/>
+              <a:t>be </a:t>
+            </a:r>
+            <a:r>
+              <a:rPr lang="en-US" dirty="0" smtClean="0"/>
+              <a:t>valid.</a:t>
+            </a:r>
+          </a:p>
+          <a:p>
+            <a:endParaRPr lang="en-US" sz="900" dirty="0"/>
+          </a:p>
+          <a:p>
+            <a:pPr marL="0" indent="0">
+              <a:buNone/>
+            </a:pPr>
+            <a:r>
+              <a:rPr lang="en-US" dirty="0" smtClean="0"/>
+              <a:t>Is this acceptable?</a:t>
+            </a:r>
+            <a:endParaRPr lang="en-US" dirty="0"/>
+          </a:p>
+        </p:txBody>
+      </p:sp>
+      <p:sp>
+        <p:nvSpPr>
+          <p:cNvPr id="4" name="页脚占位符 3"/>
+          <p:cNvSpPr>
+            <a:spLocks noGrp="1"/>
+          </p:cNvSpPr>
+          <p:nvPr>
+            <p:ph type="ftr" sz="quarter" idx="11"/>
+          </p:nvPr>
+        </p:nvSpPr>
+        <p:spPr>
+          <a:xfrm>
+            <a:off x="4038600" y="6356350"/>
+            <a:ext cx="4114800" cy="365125"/>
+          </a:xfrm>
+        </p:spPr>
+        <p:txBody>
+          <a:bodyPr/>
+          <a:lstStyle/>
+          <a:p>
+            <a:r>
+              <a:rPr lang="en-US" dirty="0" smtClean="0"/>
+              <a:t>IETF125 </a:t>
+            </a:r>
+            <a:r>
+              <a:rPr lang="en-US" dirty="0"/>
+              <a:t>NETMOD Hybrid Meeting</a:t>
+            </a:r>
+          </a:p>
+        </p:txBody>
+      </p:sp>
+      <p:sp>
+        <p:nvSpPr>
+          <p:cNvPr id="5" name="Slide Number Placeholder 4">
+            <a:extLst>
+              <a:ext uri="{FF2B5EF4-FFF2-40B4-BE49-F238E27FC236}">
+                <a16:creationId xmlns="" xmlns:a16="http://schemas.microsoft.com/office/drawing/2014/main" id="{3EE13A6B-CD5C-2B6B-7266-342C4EAFD494}"/>
+              </a:ext>
+            </a:extLst>
+          </p:cNvPr>
+          <p:cNvSpPr>
+            <a:spLocks noGrp="1"/>
+          </p:cNvSpPr>
+          <p:nvPr>
+            <p:ph type="sldNum" sz="quarter" idx="12"/>
+          </p:nvPr>
+        </p:nvSpPr>
+        <p:spPr>
+          <a:xfrm>
+            <a:off x="8610600" y="6356350"/>
+            <a:ext cx="2743200" cy="365125"/>
+          </a:xfrm>
+        </p:spPr>
+        <p:txBody>
+          <a:bodyPr/>
+          <a:lstStyle/>
+          <a:p>
+            <a:r>
+              <a:rPr lang="en-US" dirty="0" smtClean="0"/>
+              <a:t>6</a:t>
+            </a:r>
+            <a:endParaRPr lang="en-US" dirty="0"/>
+          </a:p>
+        </p:txBody>
+      </p:sp>
+    </p:spTree>
+    <p:extLst>
+      <p:ext uri="{BB962C8B-B14F-4D97-AF65-F5344CB8AC3E}">
+        <p14:creationId xmlns:p14="http://schemas.microsoft.com/office/powerpoint/2010/main" val="3510236641"/>
+      </p:ext>
+    </p:extLst>
+  </p:cSld>
+  <p:clrMapOvr>
+    <a:masterClrMapping/>
+  </p:clrMapOvr>
+  <p:timing>
+    <p:tnLst>
+      <p:par>
+        <p:cTn id="1" dur="indefinite" restart="never" nodeType="tmRoot"/>
+      </p:par>
+    </p:tnLst>
+  </p:timing>
+</p:sld>
+</file>
+
+<file path=ppt/slides/slide7.xml><?xml version="1.0" encoding="utf-8"?>
+<p:sld xmlns:a="http://schemas.openxmlformats.org/drawingml/2006/main" xmlns:r="http://schemas.openxmlformats.org/officeDocument/2006/relationships" xmlns:p="http://schemas.openxmlformats.org/presentationml/2006/main">
+  <p:cSld>
+    <p:spTree>
+      <p:nvGrpSpPr>
+        <p:cNvPr id="1" name=""/>
+        <p:cNvGrpSpPr/>
+        <p:nvPr/>
+      </p:nvGrpSpPr>
+      <p:grpSpPr>
+        <a:xfrm>
+          <a:off x="0" y="0"/>
+          <a:ext cx="0" cy="0"/>
+          <a:chOff x="0" y="0"/>
+          <a:chExt cx="0" cy="0"/>
+        </a:xfrm>
+      </p:grpSpPr>
+      <p:sp>
+        <p:nvSpPr>
           <p:cNvPr id="4" name="Title 1">
             <a:extLst>
               <a:ext uri="{FF2B5EF4-FFF2-40B4-BE49-F238E27FC236}">
-                <a16:creationId xmlns:a16="http://schemas.microsoft.com/office/drawing/2014/main" xmlns="" id="{D80B6DFA-761F-B6E1-D517-3039157B5A0B}"/>
+                <a16:creationId xmlns="" xmlns:a16="http://schemas.microsoft.com/office/drawing/2014/main" id="{D80B6DFA-761F-B6E1-D517-3039157B5A0B}"/>
               </a:ext>
             </a:extLst>
           </p:cNvPr>
@@ -8274,7 +9813,7 @@
           <p:cNvPr id="5" name="Right Brace 6">
             <a:extLst>
               <a:ext uri="{FF2B5EF4-FFF2-40B4-BE49-F238E27FC236}">
-                <a16:creationId xmlns:a16="http://schemas.microsoft.com/office/drawing/2014/main" xmlns="" id="{3634E080-1549-3C67-4550-991A658977DB}"/>
+                <a16:creationId xmlns="" xmlns:a16="http://schemas.microsoft.com/office/drawing/2014/main" id="{3634E080-1549-3C67-4550-991A658977DB}"/>
               </a:ext>
             </a:extLst>
           </p:cNvPr>
@@ -8283,8 +9822,8 @@
         </p:nvSpPr>
         <p:spPr>
           <a:xfrm>
-            <a:off x="3323039" y="2676214"/>
-            <a:ext cx="438894" cy="1099840"/>
+            <a:off x="8535118" y="2592124"/>
+            <a:ext cx="241616" cy="1396073"/>
           </a:xfrm>
           <a:prstGeom prst="rightBrace">
             <a:avLst/>
@@ -8323,7 +9862,7 @@
           <p:cNvPr id="6" name="TextBox 7">
             <a:extLst>
               <a:ext uri="{FF2B5EF4-FFF2-40B4-BE49-F238E27FC236}">
-                <a16:creationId xmlns:a16="http://schemas.microsoft.com/office/drawing/2014/main" xmlns="" id="{5F87CB09-A569-6B46-73D4-AB440D7A7116}"/>
+                <a16:creationId xmlns="" xmlns:a16="http://schemas.microsoft.com/office/drawing/2014/main" id="{5F87CB09-A569-6B46-73D4-AB440D7A7116}"/>
               </a:ext>
             </a:extLst>
           </p:cNvPr>
@@ -8332,8 +9871,8 @@
         </p:nvSpPr>
         <p:spPr>
           <a:xfrm>
-            <a:off x="3856724" y="2965201"/>
-            <a:ext cx="5328840" cy="523220"/>
+            <a:off x="8828918" y="2881112"/>
+            <a:ext cx="2933590" cy="523220"/>
           </a:xfrm>
           <a:prstGeom prst="rect">
             <a:avLst/>
@@ -8378,7 +9917,7 @@
           <p:cNvPr id="7" name="TextBox 8">
             <a:extLst>
               <a:ext uri="{FF2B5EF4-FFF2-40B4-BE49-F238E27FC236}">
-                <a16:creationId xmlns:a16="http://schemas.microsoft.com/office/drawing/2014/main" xmlns="" id="{FBA1AE89-E94F-C9A9-C732-44DD646AAA19}"/>
+                <a16:creationId xmlns="" xmlns:a16="http://schemas.microsoft.com/office/drawing/2014/main" id="{FBA1AE89-E94F-C9A9-C732-44DD646AAA19}"/>
               </a:ext>
             </a:extLst>
           </p:cNvPr>
@@ -8387,7 +9926,7 @@
         </p:nvSpPr>
         <p:spPr>
           <a:xfrm>
-            <a:off x="628647" y="1470844"/>
+            <a:off x="529069" y="1387126"/>
             <a:ext cx="11133861" cy="461665"/>
           </a:xfrm>
           <a:prstGeom prst="rect">
@@ -8401,10 +9940,15 @@
           </a:bodyPr>
           <a:lstStyle/>
           <a:p>
-            <a:r>
-              <a:rPr lang="en-US" sz="2400" dirty="0"/>
-              <a:t>Templates are defined in a list in the &lt;running&gt; datastore – for example:</a:t>
-            </a:r>
+            <a:pPr marL="342900" indent="-342900">
+              <a:buFont typeface="Arial" panose="020B0604020202020204" pitchFamily="34" charset="0"/>
+              <a:buChar char="•"/>
+            </a:pPr>
+            <a:r>
+              <a:rPr lang="en-US" sz="2400" dirty="0" smtClean="0"/>
+              <a:t>Template config is modeled as anydata in the current draft </a:t>
+            </a:r>
+            <a:endParaRPr lang="en-US" sz="2400" dirty="0"/>
           </a:p>
         </p:txBody>
       </p:sp>
@@ -8413,7 +9957,7 @@
           <p:cNvPr id="8" name="TextBox 5">
             <a:extLst>
               <a:ext uri="{FF2B5EF4-FFF2-40B4-BE49-F238E27FC236}">
-                <a16:creationId xmlns:a16="http://schemas.microsoft.com/office/drawing/2014/main" xmlns="" id="{C2FB2C15-096E-C1D2-26F3-8B624429CD3B}"/>
+                <a16:creationId xmlns="" xmlns:a16="http://schemas.microsoft.com/office/drawing/2014/main" id="{C2FB2C15-096E-C1D2-26F3-8B624429CD3B}"/>
               </a:ext>
             </a:extLst>
           </p:cNvPr>
@@ -8422,8 +9966,8 @@
         </p:nvSpPr>
         <p:spPr>
           <a:xfrm>
-            <a:off x="642610" y="4808746"/>
-            <a:ext cx="9440728" cy="461665"/>
+            <a:off x="633844" y="4334290"/>
+            <a:ext cx="11029086" cy="2369367"/>
           </a:xfrm>
           <a:prstGeom prst="rect">
             <a:avLst/>
@@ -8436,9 +9980,140 @@
           </a:bodyPr>
           <a:lstStyle/>
           <a:p>
-            <a:r>
-              <a:rPr lang="en-US" sz="2400" dirty="0"/>
-              <a:t>But what is the schema for the data inside &lt;content&gt;…&lt;/content&gt;?</a:t>
+            <a:pPr marL="342900" lvl="0" indent="-342900">
+              <a:lnSpc>
+                <a:spcPct val="90000"/>
+              </a:lnSpc>
+              <a:spcBef>
+                <a:spcPts val="1000"/>
+              </a:spcBef>
+              <a:buFont typeface="Arial" panose="020B0604020202020204" pitchFamily="34" charset="0"/>
+              <a:buChar char="•"/>
+            </a:pPr>
+            <a:r>
+              <a:rPr lang="en-US" sz="2400" dirty="0" smtClean="0">
+                <a:solidFill>
+                  <a:prstClr val="black"/>
+                </a:solidFill>
+              </a:rPr>
+              <a:t>Limitations of using anydata:</a:t>
+            </a:r>
+            <a:endParaRPr lang="en-US" sz="2400" dirty="0">
+              <a:solidFill>
+                <a:prstClr val="black"/>
+              </a:solidFill>
+            </a:endParaRPr>
+          </a:p>
+          <a:p>
+            <a:pPr marL="685800" lvl="1" indent="-228600">
+              <a:lnSpc>
+                <a:spcPct val="90000"/>
+              </a:lnSpc>
+              <a:spcBef>
+                <a:spcPts val="1000"/>
+              </a:spcBef>
+              <a:buFont typeface="Arial" panose="020B0604020202020204" pitchFamily="34" charset="0"/>
+              <a:buChar char="•"/>
+            </a:pPr>
+            <a:r>
+              <a:rPr lang="en-US" sz="2400" dirty="0">
+                <a:solidFill>
+                  <a:prstClr val="black"/>
+                </a:solidFill>
+              </a:rPr>
+              <a:t>No schema to declare what a valid template is</a:t>
+            </a:r>
+          </a:p>
+          <a:p>
+            <a:pPr marL="1143000" lvl="2" indent="-228600">
+              <a:lnSpc>
+                <a:spcPct val="90000"/>
+              </a:lnSpc>
+              <a:spcBef>
+                <a:spcPts val="500"/>
+              </a:spcBef>
+              <a:buFont typeface="Arial" panose="020B0604020202020204" pitchFamily="34" charset="0"/>
+              <a:buChar char="•"/>
+            </a:pPr>
+            <a:r>
+              <a:rPr lang="en-US" sz="2000" dirty="0">
+                <a:solidFill>
+                  <a:prstClr val="black"/>
+                </a:solidFill>
+              </a:rPr>
+              <a:t>Again, do we want to validate template at definition time?</a:t>
+            </a:r>
+          </a:p>
+          <a:p>
+            <a:pPr marL="685800" lvl="1" indent="-228600">
+              <a:lnSpc>
+                <a:spcPct val="90000"/>
+              </a:lnSpc>
+              <a:spcBef>
+                <a:spcPts val="1000"/>
+              </a:spcBef>
+              <a:buFont typeface="Arial" panose="020B0604020202020204" pitchFamily="34" charset="0"/>
+              <a:buChar char="•"/>
+            </a:pPr>
+            <a:r>
+              <a:rPr lang="en-US" sz="2400" dirty="0">
+                <a:solidFill>
+                  <a:prstClr val="black"/>
+                </a:solidFill>
+              </a:rPr>
+              <a:t>Opaque data – not possible for the client to edit part of the </a:t>
+            </a:r>
+            <a:r>
+              <a:rPr lang="en-US" sz="2400" dirty="0" smtClean="0">
+                <a:solidFill>
+                  <a:prstClr val="black"/>
+                </a:solidFill>
+              </a:rPr>
+              <a:t>template </a:t>
+            </a:r>
+          </a:p>
+          <a:p>
+            <a:pPr marL="1143000" lvl="2" indent="-228600">
+              <a:lnSpc>
+                <a:spcPct val="90000"/>
+              </a:lnSpc>
+              <a:spcBef>
+                <a:spcPts val="1000"/>
+              </a:spcBef>
+              <a:buFont typeface="Arial" panose="020B0604020202020204" pitchFamily="34" charset="0"/>
+              <a:buChar char="•"/>
+            </a:pPr>
+            <a:r>
+              <a:rPr lang="en-US" sz="2000" dirty="0" smtClean="0">
+                <a:solidFill>
+                  <a:prstClr val="black"/>
+                </a:solidFill>
+              </a:rPr>
+              <a:t>See Sec.7.10.3 in 7950, </a:t>
+            </a:r>
+            <a:r>
+              <a:rPr lang="en-US" sz="2000" dirty="0">
+                <a:solidFill>
+                  <a:prstClr val="black"/>
+                </a:solidFill>
+              </a:rPr>
+              <a:t>a</a:t>
+            </a:r>
+            <a:r>
+              <a:rPr lang="en-US" sz="2000" dirty="0" smtClean="0">
+                <a:solidFill>
+                  <a:prstClr val="black"/>
+                </a:solidFill>
+              </a:rPr>
+              <a:t>ny </a:t>
+            </a:r>
+            <a:r>
+              <a:rPr lang="en-US" sz="2000" dirty="0" smtClean="0">
+                <a:solidFill>
+                  <a:prstClr val="black"/>
+                </a:solidFill>
+              </a:rPr>
+              <a:t>delta change to the template requires the client to send the entire template config</a:t>
             </a:r>
           </a:p>
         </p:txBody>
@@ -8448,7 +10123,7 @@
           <p:cNvPr id="9" name="Content Placeholder 2">
             <a:extLst>
               <a:ext uri="{FF2B5EF4-FFF2-40B4-BE49-F238E27FC236}">
-                <a16:creationId xmlns:a16="http://schemas.microsoft.com/office/drawing/2014/main" xmlns="" id="{0820E31D-5357-142A-D690-7C24CC34E240}"/>
+                <a16:creationId xmlns="" xmlns:a16="http://schemas.microsoft.com/office/drawing/2014/main" id="{0820E31D-5357-142A-D690-7C24CC34E240}"/>
               </a:ext>
             </a:extLst>
           </p:cNvPr>
@@ -8461,7 +10136,7 @@
         </p:nvSpPr>
         <p:spPr>
           <a:xfrm>
-            <a:off x="642610" y="1971913"/>
+            <a:off x="5743307" y="1914524"/>
             <a:ext cx="5583623" cy="3325045"/>
           </a:xfrm>
         </p:spPr>
@@ -8547,8 +10222,19 @@
                 <a:latin typeface="Consolas" panose="020B0609020204030204" pitchFamily="49" charset="0"/>
                 <a:cs typeface="Consolas" panose="020B0609020204030204" pitchFamily="49" charset="0"/>
               </a:rPr>
-              <a:t>&lt;/id&gt;</a:t>
-            </a:r>
+              <a:t>&lt;/</a:t>
+            </a:r>
+            <a:r>
+              <a:rPr lang="en-US" sz="1400" dirty="0" smtClean="0">
+                <a:latin typeface="Consolas" panose="020B0609020204030204" pitchFamily="49" charset="0"/>
+                <a:cs typeface="Consolas" panose="020B0609020204030204" pitchFamily="49" charset="0"/>
+              </a:rPr>
+              <a:t>id&gt;</a:t>
+            </a:r>
+            <a:endParaRPr lang="en-US" sz="1400" dirty="0">
+              <a:latin typeface="Consolas" panose="020B0609020204030204" pitchFamily="49" charset="0"/>
+              <a:cs typeface="Consolas" panose="020B0609020204030204" pitchFamily="49" charset="0"/>
+            </a:endParaRPr>
           </a:p>
           <a:p>
             <a:pPr marL="0" indent="0">
@@ -8606,8 +10292,41 @@
                 <a:latin typeface="Consolas" panose="020B0609020204030204" pitchFamily="49" charset="0"/>
                 <a:cs typeface="Consolas" panose="020B0609020204030204" pitchFamily="49" charset="0"/>
               </a:rPr>
-              <a:t>    &lt;interface&gt;</a:t>
-            </a:r>
+              <a:t>    &lt;interface</a:t>
+            </a:r>
+            <a:r>
+              <a:rPr lang="en-US" sz="1400" dirty="0" smtClean="0">
+                <a:latin typeface="Consolas" panose="020B0609020204030204" pitchFamily="49" charset="0"/>
+                <a:cs typeface="Consolas" panose="020B0609020204030204" pitchFamily="49" charset="0"/>
+              </a:rPr>
+              <a:t>&gt;</a:t>
+            </a:r>
+          </a:p>
+          <a:p>
+            <a:pPr marL="0" indent="0">
+              <a:spcBef>
+                <a:spcPts val="0"/>
+              </a:spcBef>
+              <a:buNone/>
+            </a:pPr>
+            <a:r>
+              <a:rPr lang="en-US" sz="1400" dirty="0">
+                <a:latin typeface="Consolas" panose="020B0609020204030204" pitchFamily="49" charset="0"/>
+                <a:cs typeface="Consolas" panose="020B0609020204030204" pitchFamily="49" charset="0"/>
+              </a:rPr>
+              <a:t> </a:t>
+            </a:r>
+            <a:r>
+              <a:rPr lang="en-US" sz="1400" dirty="0" smtClean="0">
+                <a:latin typeface="Consolas" panose="020B0609020204030204" pitchFamily="49" charset="0"/>
+                <a:cs typeface="Consolas" panose="020B0609020204030204" pitchFamily="49" charset="0"/>
+              </a:rPr>
+              <a:t>    &lt;name&gt;eth*&lt;/name&gt;</a:t>
+            </a:r>
+            <a:endParaRPr lang="en-US" sz="1400" dirty="0">
+              <a:latin typeface="Consolas" panose="020B0609020204030204" pitchFamily="49" charset="0"/>
+              <a:cs typeface="Consolas" panose="020B0609020204030204" pitchFamily="49" charset="0"/>
+            </a:endParaRPr>
           </a:p>
           <a:p>
             <a:pPr marL="0" indent="0">
@@ -8790,7 +10509,7 @@
           <p:cNvPr id="11" name="Slide Number Placeholder 4">
             <a:extLst>
               <a:ext uri="{FF2B5EF4-FFF2-40B4-BE49-F238E27FC236}">
-                <a16:creationId xmlns:a16="http://schemas.microsoft.com/office/drawing/2014/main" xmlns="" id="{3EE13A6B-CD5C-2B6B-7266-342C4EAFD494}"/>
+                <a16:creationId xmlns="" xmlns:a16="http://schemas.microsoft.com/office/drawing/2014/main" id="{3EE13A6B-CD5C-2B6B-7266-342C4EAFD494}"/>
               </a:ext>
             </a:extLst>
           </p:cNvPr>
@@ -8813,245 +10532,312 @@
           <a:p>
             <a:r>
               <a:rPr lang="en-US" dirty="0" smtClean="0"/>
-              <a:t>6</a:t>
+              <a:t>7</a:t>
             </a:r>
             <a:endParaRPr lang="en-US" dirty="0"/>
           </a:p>
         </p:txBody>
       </p:sp>
+      <p:grpSp>
+        <p:nvGrpSpPr>
+          <p:cNvPr id="12" name="组合 11"/>
+          <p:cNvGrpSpPr/>
+          <p:nvPr/>
+        </p:nvGrpSpPr>
+        <p:grpSpPr>
+          <a:xfrm>
+            <a:off x="529069" y="2240758"/>
+            <a:ext cx="4862945" cy="1449628"/>
+            <a:chOff x="628647" y="2950153"/>
+            <a:chExt cx="4862945" cy="1449628"/>
+          </a:xfrm>
+        </p:grpSpPr>
+        <p:sp>
+          <p:nvSpPr>
+            <p:cNvPr id="13" name="圆角矩形 12"/>
+            <p:cNvSpPr/>
+            <p:nvPr/>
+          </p:nvSpPr>
+          <p:spPr>
+            <a:xfrm>
+              <a:off x="1413163" y="3988603"/>
+              <a:ext cx="3381786" cy="186648"/>
+            </a:xfrm>
+            <a:prstGeom prst="roundRect">
+              <a:avLst/>
+            </a:prstGeom>
+            <a:solidFill>
+              <a:schemeClr val="accent3">
+                <a:lumMod val="20000"/>
+                <a:lumOff val="80000"/>
+              </a:schemeClr>
+            </a:solidFill>
+            <a:ln>
+              <a:solidFill>
+                <a:srgbClr val="C00000"/>
+              </a:solidFill>
+            </a:ln>
+          </p:spPr>
+          <p:style>
+            <a:lnRef idx="2">
+              <a:schemeClr val="accent1">
+                <a:shade val="50000"/>
+              </a:schemeClr>
+            </a:lnRef>
+            <a:fillRef idx="1">
+              <a:schemeClr val="accent1"/>
+            </a:fillRef>
+            <a:effectRef idx="0">
+              <a:schemeClr val="accent1"/>
+            </a:effectRef>
+            <a:fontRef idx="minor">
+              <a:schemeClr val="lt1"/>
+            </a:fontRef>
+          </p:style>
+          <p:txBody>
+            <a:bodyPr rtlCol="0" anchor="ctr"/>
+            <a:lstStyle/>
+            <a:p>
+              <a:pPr algn="ctr"/>
+              <a:endParaRPr lang="en-US"/>
+            </a:p>
+          </p:txBody>
+        </p:sp>
+        <p:sp>
+          <p:nvSpPr>
+            <p:cNvPr id="14" name="文本框 13"/>
+            <p:cNvSpPr txBox="1"/>
+            <p:nvPr/>
+          </p:nvSpPr>
+          <p:spPr>
+            <a:xfrm>
+              <a:off x="628647" y="2950153"/>
+              <a:ext cx="4862945" cy="1449628"/>
+            </a:xfrm>
+            <a:prstGeom prst="rect">
+              <a:avLst/>
+            </a:prstGeom>
+            <a:noFill/>
+          </p:spPr>
+          <p:txBody>
+            <a:bodyPr wrap="square" rtlCol="0">
+              <a:spAutoFit/>
+            </a:bodyPr>
+            <a:lstStyle/>
+            <a:p>
+              <a:pPr>
+                <a:lnSpc>
+                  <a:spcPct val="90000"/>
+                </a:lnSpc>
+              </a:pPr>
+              <a:r>
+                <a:rPr lang="en-US" sz="1400" dirty="0">
+                  <a:latin typeface="Consolas" panose="020B0609020204030204" pitchFamily="49" charset="0"/>
+                  <a:cs typeface="Consolas" panose="020B0609020204030204" pitchFamily="49" charset="0"/>
+                </a:rPr>
+                <a:t>module: </a:t>
+              </a:r>
+              <a:r>
+                <a:rPr lang="en-US" sz="1400" dirty="0" err="1">
+                  <a:latin typeface="Consolas" panose="020B0609020204030204" pitchFamily="49" charset="0"/>
+                  <a:cs typeface="Consolas" panose="020B0609020204030204" pitchFamily="49" charset="0"/>
+                </a:rPr>
+                <a:t>ietf</a:t>
+              </a:r>
+              <a:r>
+                <a:rPr lang="en-US" sz="1400" dirty="0">
+                  <a:latin typeface="Consolas" panose="020B0609020204030204" pitchFamily="49" charset="0"/>
+                  <a:cs typeface="Consolas" panose="020B0609020204030204" pitchFamily="49" charset="0"/>
+                </a:rPr>
+                <a:t>-config-template</a:t>
+              </a:r>
+            </a:p>
+            <a:p>
+              <a:pPr>
+                <a:lnSpc>
+                  <a:spcPct val="90000"/>
+                </a:lnSpc>
+              </a:pPr>
+              <a:r>
+                <a:rPr lang="en-US" sz="1400" dirty="0">
+                  <a:latin typeface="Consolas" panose="020B0609020204030204" pitchFamily="49" charset="0"/>
+                  <a:cs typeface="Consolas" panose="020B0609020204030204" pitchFamily="49" charset="0"/>
+                </a:rPr>
+                <a:t>  +--</a:t>
+              </a:r>
+              <a:r>
+                <a:rPr lang="en-US" sz="1400" dirty="0" err="1">
+                  <a:latin typeface="Consolas" panose="020B0609020204030204" pitchFamily="49" charset="0"/>
+                  <a:cs typeface="Consolas" panose="020B0609020204030204" pitchFamily="49" charset="0"/>
+                </a:rPr>
+                <a:t>rw</a:t>
+              </a:r>
+              <a:r>
+                <a:rPr lang="en-US" sz="1400" dirty="0">
+                  <a:latin typeface="Consolas" panose="020B0609020204030204" pitchFamily="49" charset="0"/>
+                  <a:cs typeface="Consolas" panose="020B0609020204030204" pitchFamily="49" charset="0"/>
+                </a:rPr>
+                <a:t> templates</a:t>
+              </a:r>
+            </a:p>
+            <a:p>
+              <a:pPr>
+                <a:lnSpc>
+                  <a:spcPct val="90000"/>
+                </a:lnSpc>
+              </a:pPr>
+              <a:r>
+                <a:rPr lang="en-US" sz="1400" dirty="0">
+                  <a:latin typeface="Consolas" panose="020B0609020204030204" pitchFamily="49" charset="0"/>
+                  <a:cs typeface="Consolas" panose="020B0609020204030204" pitchFamily="49" charset="0"/>
+                </a:rPr>
+                <a:t>     +--</a:t>
+              </a:r>
+              <a:r>
+                <a:rPr lang="en-US" sz="1400" dirty="0" err="1">
+                  <a:latin typeface="Consolas" panose="020B0609020204030204" pitchFamily="49" charset="0"/>
+                  <a:cs typeface="Consolas" panose="020B0609020204030204" pitchFamily="49" charset="0"/>
+                </a:rPr>
+                <a:t>rw</a:t>
+              </a:r>
+              <a:r>
+                <a:rPr lang="en-US" sz="1400" dirty="0">
+                  <a:latin typeface="Consolas" panose="020B0609020204030204" pitchFamily="49" charset="0"/>
+                  <a:cs typeface="Consolas" panose="020B0609020204030204" pitchFamily="49" charset="0"/>
+                </a:rPr>
+                <a:t> template* [id]</a:t>
+              </a:r>
+            </a:p>
+            <a:p>
+              <a:pPr>
+                <a:lnSpc>
+                  <a:spcPct val="90000"/>
+                </a:lnSpc>
+              </a:pPr>
+              <a:r>
+                <a:rPr lang="en-US" sz="1400" dirty="0">
+                  <a:latin typeface="Consolas" panose="020B0609020204030204" pitchFamily="49" charset="0"/>
+                  <a:cs typeface="Consolas" panose="020B0609020204030204" pitchFamily="49" charset="0"/>
+                </a:rPr>
+                <a:t>        +--</a:t>
+              </a:r>
+              <a:r>
+                <a:rPr lang="en-US" sz="1400" dirty="0" err="1">
+                  <a:latin typeface="Consolas" panose="020B0609020204030204" pitchFamily="49" charset="0"/>
+                  <a:cs typeface="Consolas" panose="020B0609020204030204" pitchFamily="49" charset="0"/>
+                </a:rPr>
+                <a:t>rw</a:t>
+              </a:r>
+              <a:r>
+                <a:rPr lang="en-US" sz="1400" dirty="0">
+                  <a:latin typeface="Consolas" panose="020B0609020204030204" pitchFamily="49" charset="0"/>
+                  <a:cs typeface="Consolas" panose="020B0609020204030204" pitchFamily="49" charset="0"/>
+                </a:rPr>
+                <a:t> id               string</a:t>
+              </a:r>
+            </a:p>
+            <a:p>
+              <a:pPr>
+                <a:lnSpc>
+                  <a:spcPct val="90000"/>
+                </a:lnSpc>
+              </a:pPr>
+              <a:r>
+                <a:rPr lang="en-US" sz="1400" dirty="0">
+                  <a:latin typeface="Consolas" panose="020B0609020204030204" pitchFamily="49" charset="0"/>
+                  <a:cs typeface="Consolas" panose="020B0609020204030204" pitchFamily="49" charset="0"/>
+                </a:rPr>
+                <a:t>        +--</a:t>
+              </a:r>
+              <a:r>
+                <a:rPr lang="en-US" sz="1400" dirty="0" err="1">
+                  <a:latin typeface="Consolas" panose="020B0609020204030204" pitchFamily="49" charset="0"/>
+                  <a:cs typeface="Consolas" panose="020B0609020204030204" pitchFamily="49" charset="0"/>
+                </a:rPr>
+                <a:t>rw</a:t>
+              </a:r>
+              <a:r>
+                <a:rPr lang="en-US" sz="1400" dirty="0">
+                  <a:latin typeface="Consolas" panose="020B0609020204030204" pitchFamily="49" charset="0"/>
+                  <a:cs typeface="Consolas" panose="020B0609020204030204" pitchFamily="49" charset="0"/>
+                </a:rPr>
+                <a:t> description?     string</a:t>
+              </a:r>
+            </a:p>
+            <a:p>
+              <a:pPr>
+                <a:lnSpc>
+                  <a:spcPct val="90000"/>
+                </a:lnSpc>
+              </a:pPr>
+              <a:r>
+                <a:rPr lang="en-US" sz="1400" dirty="0">
+                  <a:latin typeface="Consolas" panose="020B0609020204030204" pitchFamily="49" charset="0"/>
+                  <a:cs typeface="Consolas" panose="020B0609020204030204" pitchFamily="49" charset="0"/>
+                </a:rPr>
+                <a:t>        +--</a:t>
+              </a:r>
+              <a:r>
+                <a:rPr lang="en-US" sz="1400" dirty="0" err="1">
+                  <a:latin typeface="Consolas" panose="020B0609020204030204" pitchFamily="49" charset="0"/>
+                  <a:cs typeface="Consolas" panose="020B0609020204030204" pitchFamily="49" charset="0"/>
+                </a:rPr>
+                <a:t>rw</a:t>
+              </a:r>
+              <a:r>
+                <a:rPr lang="en-US" sz="1400" dirty="0">
+                  <a:latin typeface="Consolas" panose="020B0609020204030204" pitchFamily="49" charset="0"/>
+                  <a:cs typeface="Consolas" panose="020B0609020204030204" pitchFamily="49" charset="0"/>
+                </a:rPr>
+                <a:t> content?         &lt;anydata&gt;</a:t>
+              </a:r>
+            </a:p>
+            <a:p>
+              <a:pPr>
+                <a:lnSpc>
+                  <a:spcPct val="90000"/>
+                </a:lnSpc>
+              </a:pPr>
+              <a:r>
+                <a:rPr lang="en-US" sz="1400" dirty="0">
+                  <a:latin typeface="Consolas" panose="020B0609020204030204" pitchFamily="49" charset="0"/>
+                  <a:cs typeface="Consolas" panose="020B0609020204030204" pitchFamily="49" charset="0"/>
+                </a:rPr>
+                <a:t>        +--</a:t>
+              </a:r>
+              <a:r>
+                <a:rPr lang="en-US" sz="1400" dirty="0" err="1">
+                  <a:latin typeface="Consolas" panose="020B0609020204030204" pitchFamily="49" charset="0"/>
+                  <a:cs typeface="Consolas" panose="020B0609020204030204" pitchFamily="49" charset="0"/>
+                </a:rPr>
+                <a:t>ro</a:t>
+              </a:r>
+              <a:r>
+                <a:rPr lang="en-US" sz="1400" dirty="0">
+                  <a:latin typeface="Consolas" panose="020B0609020204030204" pitchFamily="49" charset="0"/>
+                  <a:cs typeface="Consolas" panose="020B0609020204030204" pitchFamily="49" charset="0"/>
+                </a:rPr>
+                <a:t> last-modified?   </a:t>
+              </a:r>
+              <a:r>
+                <a:rPr lang="en-US" sz="1400" dirty="0" err="1">
+                  <a:latin typeface="Consolas" panose="020B0609020204030204" pitchFamily="49" charset="0"/>
+                  <a:cs typeface="Consolas" panose="020B0609020204030204" pitchFamily="49" charset="0"/>
+                </a:rPr>
+                <a:t>yang:timestamp</a:t>
+              </a:r>
+              <a:endParaRPr lang="en-US" sz="1400" dirty="0">
+                <a:latin typeface="Consolas" panose="020B0609020204030204" pitchFamily="49" charset="0"/>
+                <a:cs typeface="Consolas" panose="020B0609020204030204" pitchFamily="49" charset="0"/>
+              </a:endParaRPr>
+            </a:p>
+          </p:txBody>
+        </p:sp>
+      </p:grpSp>
     </p:spTree>
     <p:extLst>
       <p:ext uri="{BB962C8B-B14F-4D97-AF65-F5344CB8AC3E}">
         <p14:creationId xmlns:p14="http://schemas.microsoft.com/office/powerpoint/2010/main" val="1932104854"/>
-      </p:ext>
-    </p:extLst>
-  </p:cSld>
-  <p:clrMapOvr>
-    <a:masterClrMapping/>
-  </p:clrMapOvr>
-  <p:timing>
-    <p:tnLst>
-      <p:par>
-        <p:cTn id="1" dur="indefinite" restart="never" nodeType="tmRoot"/>
-      </p:par>
-    </p:tnLst>
-  </p:timing>
-</p:sld>
-</file>
-
-<file path=ppt/slides/slide7.xml><?xml version="1.0" encoding="utf-8"?>
-<p:sld xmlns:a="http://schemas.openxmlformats.org/drawingml/2006/main" xmlns:r="http://schemas.openxmlformats.org/officeDocument/2006/relationships" xmlns:p="http://schemas.openxmlformats.org/presentationml/2006/main">
-  <p:cSld>
-    <p:spTree>
-      <p:nvGrpSpPr>
-        <p:cNvPr id="1" name="">
-          <a:extLst>
-            <a:ext uri="{FF2B5EF4-FFF2-40B4-BE49-F238E27FC236}">
-              <a16:creationId xmlns:a16="http://schemas.microsoft.com/office/drawing/2014/main" xmlns="" id="{57D10B66-129F-92DD-1B83-29C617281F25}"/>
-            </a:ext>
-          </a:extLst>
-        </p:cNvPr>
-        <p:cNvGrpSpPr/>
-        <p:nvPr/>
-      </p:nvGrpSpPr>
-      <p:grpSpPr>
-        <a:xfrm>
-          <a:off x="0" y="0"/>
-          <a:ext cx="0" cy="0"/>
-          <a:chOff x="0" y="0"/>
-          <a:chExt cx="0" cy="0"/>
-        </a:xfrm>
-      </p:grpSpPr>
-      <p:sp>
-        <p:nvSpPr>
-          <p:cNvPr id="2" name="Title 1">
-            <a:extLst>
-              <a:ext uri="{FF2B5EF4-FFF2-40B4-BE49-F238E27FC236}">
-                <a16:creationId xmlns:a16="http://schemas.microsoft.com/office/drawing/2014/main" xmlns="" id="{C53EF5C8-D20D-D93F-BF2D-836C60979FDF}"/>
-              </a:ext>
-            </a:extLst>
-          </p:cNvPr>
-          <p:cNvSpPr>
-            <a:spLocks noGrp="1"/>
-          </p:cNvSpPr>
-          <p:nvPr>
-            <p:ph type="title"/>
-          </p:nvPr>
-        </p:nvSpPr>
-        <p:spPr/>
-        <p:txBody>
-          <a:bodyPr/>
-          <a:lstStyle/>
-          <a:p>
-            <a:r>
-              <a:rPr lang="en-US" b="1" dirty="0"/>
-              <a:t>Option 1: </a:t>
-            </a:r>
-            <a:r>
-              <a:rPr lang="en-US" b="1" dirty="0" smtClean="0"/>
-              <a:t>anydata</a:t>
-            </a:r>
-            <a:endParaRPr lang="en-US" b="1" dirty="0"/>
-          </a:p>
-        </p:txBody>
-      </p:sp>
-      <p:sp>
-        <p:nvSpPr>
-          <p:cNvPr id="3" name="Content Placeholder 2">
-            <a:extLst>
-              <a:ext uri="{FF2B5EF4-FFF2-40B4-BE49-F238E27FC236}">
-                <a16:creationId xmlns:a16="http://schemas.microsoft.com/office/drawing/2014/main" xmlns="" id="{EE4DBF42-685C-6692-8091-5843C97D39FC}"/>
-              </a:ext>
-            </a:extLst>
-          </p:cNvPr>
-          <p:cNvSpPr>
-            <a:spLocks noGrp="1"/>
-          </p:cNvSpPr>
-          <p:nvPr>
-            <p:ph idx="1"/>
-          </p:nvPr>
-        </p:nvSpPr>
-        <p:spPr/>
-        <p:txBody>
-          <a:bodyPr/>
-          <a:lstStyle/>
-          <a:p>
-            <a:r>
-              <a:rPr lang="en-US" dirty="0"/>
-              <a:t>Model the value of &lt;content&gt; as </a:t>
-            </a:r>
-            <a:r>
-              <a:rPr lang="en-US" dirty="0" smtClean="0"/>
-              <a:t>anydata</a:t>
-            </a:r>
-            <a:endParaRPr lang="en-US" dirty="0"/>
-          </a:p>
-          <a:p>
-            <a:endParaRPr lang="en-US" dirty="0"/>
-          </a:p>
-          <a:p>
-            <a:pPr marL="0" indent="0">
-              <a:buNone/>
-            </a:pPr>
-            <a:r>
-              <a:rPr lang="en-US" b="1" dirty="0"/>
-              <a:t>Problems:</a:t>
-            </a:r>
-          </a:p>
-          <a:p>
-            <a:r>
-              <a:rPr lang="en-US" dirty="0"/>
-              <a:t>N</a:t>
-            </a:r>
-            <a:r>
-              <a:rPr lang="en-US" dirty="0" smtClean="0"/>
-              <a:t>o </a:t>
-            </a:r>
-            <a:r>
-              <a:rPr lang="en-US" dirty="0"/>
-              <a:t>schema to declare what a valid template </a:t>
-            </a:r>
-            <a:r>
-              <a:rPr lang="en-US" dirty="0" smtClean="0"/>
-              <a:t>is</a:t>
-            </a:r>
-          </a:p>
-          <a:p>
-            <a:pPr lvl="1"/>
-            <a:r>
-              <a:rPr lang="en-US" dirty="0" smtClean="0"/>
-              <a:t>Again, do we want to validate template at definition time?</a:t>
-            </a:r>
-            <a:endParaRPr lang="en-US" dirty="0"/>
-          </a:p>
-          <a:p>
-            <a:r>
-              <a:rPr lang="en-US" dirty="0"/>
-              <a:t>Opaque data – not possible for the client to edit part of the </a:t>
-            </a:r>
-            <a:r>
-              <a:rPr lang="en-US" dirty="0" smtClean="0"/>
-              <a:t>template</a:t>
-            </a:r>
-          </a:p>
-          <a:p>
-            <a:pPr lvl="1"/>
-            <a:r>
-              <a:rPr lang="en-US" dirty="0" smtClean="0"/>
-              <a:t>Can the “operation” attribute defined in 6241 be used to make changes/delta to the template?</a:t>
-            </a:r>
-            <a:endParaRPr lang="en-US" dirty="0" smtClean="0"/>
-          </a:p>
-          <a:p>
-            <a:pPr lvl="1"/>
-            <a:endParaRPr lang="en-US" dirty="0"/>
-          </a:p>
-        </p:txBody>
-      </p:sp>
-      <p:sp>
-        <p:nvSpPr>
-          <p:cNvPr id="5" name="Slide Number Placeholder 4">
-            <a:extLst>
-              <a:ext uri="{FF2B5EF4-FFF2-40B4-BE49-F238E27FC236}">
-                <a16:creationId xmlns:a16="http://schemas.microsoft.com/office/drawing/2014/main" xmlns="" id="{8EDB6EA0-D8D0-F2F6-12B0-ADE7599F11C2}"/>
-              </a:ext>
-            </a:extLst>
-          </p:cNvPr>
-          <p:cNvSpPr>
-            <a:spLocks noGrp="1"/>
-          </p:cNvSpPr>
-          <p:nvPr>
-            <p:ph type="sldNum" sz="quarter" idx="12"/>
-          </p:nvPr>
-        </p:nvSpPr>
-        <p:spPr/>
-        <p:txBody>
-          <a:bodyPr/>
-          <a:lstStyle/>
-          <a:p>
-            <a:fld id="{3C586BAA-A4D4-D948-A50D-301A6C830E12}" type="slidenum">
-              <a:rPr lang="en-US" smtClean="0"/>
-              <a:t>7</a:t>
-            </a:fld>
-            <a:endParaRPr lang="en-US"/>
-          </a:p>
-        </p:txBody>
-      </p:sp>
-      <p:sp>
-        <p:nvSpPr>
-          <p:cNvPr id="6" name="页脚占位符 3"/>
-          <p:cNvSpPr>
-            <a:spLocks noGrp="1"/>
-          </p:cNvSpPr>
-          <p:nvPr>
-            <p:ph type="ftr" sz="quarter" idx="11"/>
-          </p:nvPr>
-        </p:nvSpPr>
-        <p:spPr>
-          <a:xfrm>
-            <a:off x="4038600" y="6356350"/>
-            <a:ext cx="4114800" cy="365125"/>
-          </a:xfrm>
-        </p:spPr>
-        <p:txBody>
-          <a:bodyPr/>
-          <a:lstStyle/>
-          <a:p>
-            <a:r>
-              <a:rPr lang="en-US" dirty="0" smtClean="0"/>
-              <a:t>IETF125 </a:t>
-            </a:r>
-            <a:r>
-              <a:rPr lang="en-US" dirty="0"/>
-              <a:t>NETMOD Hybrid Meeting</a:t>
-            </a:r>
-          </a:p>
-        </p:txBody>
-      </p:sp>
-    </p:spTree>
-    <p:extLst>
-      <p:ext uri="{BB962C8B-B14F-4D97-AF65-F5344CB8AC3E}">
-        <p14:creationId xmlns:p14="http://schemas.microsoft.com/office/powerpoint/2010/main" val="1724440525"/>
       </p:ext>
     </p:extLst>
   </p:cSld>
@@ -9076,7 +10862,7 @@
         <p:cNvPr id="1" name="">
           <a:extLst>
             <a:ext uri="{FF2B5EF4-FFF2-40B4-BE49-F238E27FC236}">
-              <a16:creationId xmlns:a16="http://schemas.microsoft.com/office/drawing/2014/main" xmlns="" id="{B12783EE-98E7-3F14-A842-34D7AA74AA48}"/>
+              <a16:creationId xmlns="" xmlns:a16="http://schemas.microsoft.com/office/drawing/2014/main" id="{B12783EE-98E7-3F14-A842-34D7AA74AA48}"/>
             </a:ext>
           </a:extLst>
         </p:cNvPr>
@@ -9096,7 +10882,7 @@
           <p:cNvPr id="2" name="Title 1">
             <a:extLst>
               <a:ext uri="{FF2B5EF4-FFF2-40B4-BE49-F238E27FC236}">
-                <a16:creationId xmlns:a16="http://schemas.microsoft.com/office/drawing/2014/main" xmlns="" id="{6C6D6565-3B97-CCF2-1B7A-819BFB0DD98B}"/>
+                <a16:creationId xmlns="" xmlns:a16="http://schemas.microsoft.com/office/drawing/2014/main" id="{6C6D6565-3B97-CCF2-1B7A-819BFB0DD98B}"/>
               </a:ext>
             </a:extLst>
           </p:cNvPr>
@@ -9107,14 +10893,25 @@
             <p:ph type="title"/>
           </p:nvPr>
         </p:nvSpPr>
-        <p:spPr/>
+        <p:spPr>
+          <a:xfrm>
+            <a:off x="838200" y="99118"/>
+            <a:ext cx="10515600" cy="1325563"/>
+          </a:xfrm>
+        </p:spPr>
         <p:txBody>
-          <a:bodyPr/>
+          <a:bodyPr>
+            <a:normAutofit/>
+          </a:bodyPr>
           <a:lstStyle/>
           <a:p>
             <a:r>
-              <a:rPr lang="en-US" b="1" dirty="0"/>
-              <a:t>Option 2: Automatically derive a schema</a:t>
+              <a:rPr lang="en-US" sz="3600" b="1" dirty="0" smtClean="0"/>
+              <a:t>Alternative Option: </a:t>
+            </a:r>
+            <a:r>
+              <a:rPr lang="en-US" sz="3600" b="1" dirty="0"/>
+              <a:t>Automatically derive a schema</a:t>
             </a:r>
           </a:p>
         </p:txBody>
@@ -9124,7 +10921,7 @@
           <p:cNvPr id="3" name="Content Placeholder 2">
             <a:extLst>
               <a:ext uri="{FF2B5EF4-FFF2-40B4-BE49-F238E27FC236}">
-                <a16:creationId xmlns:a16="http://schemas.microsoft.com/office/drawing/2014/main" xmlns="" id="{EA9F4D2F-062E-3C06-747F-478BC35BCA72}"/>
+                <a16:creationId xmlns="" xmlns:a16="http://schemas.microsoft.com/office/drawing/2014/main" id="{EA9F4D2F-062E-3C06-747F-478BC35BCA72}"/>
               </a:ext>
             </a:extLst>
           </p:cNvPr>
@@ -9137,8 +10934,8 @@
         </p:nvSpPr>
         <p:spPr>
           <a:xfrm>
-            <a:off x="838199" y="1690688"/>
-            <a:ext cx="10600113" cy="4665662"/>
+            <a:off x="795943" y="1358178"/>
+            <a:ext cx="10791999" cy="4901305"/>
           </a:xfrm>
         </p:spPr>
         <p:txBody>
@@ -9159,21 +10956,32 @@
             </a:r>
             <a:r>
               <a:rPr lang="en-US" dirty="0" smtClean="0"/>
-              <a:t>YANG</a:t>
+              <a:t>YANG </a:t>
+            </a:r>
+            <a:r>
+              <a:rPr lang="en-US" dirty="0"/>
+              <a:t>model that the server supports, derive a second </a:t>
             </a:r>
             <a:r>
               <a:rPr lang="en-US" dirty="0" smtClean="0"/>
-              <a:t> </a:t>
+              <a:t>“template </a:t>
             </a:r>
             <a:r>
               <a:rPr lang="en-US" dirty="0"/>
-              <a:t>model that the server supports, derive a second “template model” that augments /templates/template/content</a:t>
-            </a:r>
-          </a:p>
-          <a:p>
+              <a:t>model” that augments /templates/template/content</a:t>
+            </a:r>
+          </a:p>
+          <a:p>
+            <a:endParaRPr lang="en-US" sz="800" dirty="0" smtClean="0"/>
+          </a:p>
+          <a:p>
+            <a:r>
+              <a:rPr lang="en-US" dirty="0" smtClean="0"/>
+              <a:t>For </a:t>
+            </a:r>
             <a:r>
               <a:rPr lang="en-US" dirty="0"/>
-              <a:t>For example:</a:t>
+              <a:t>example:</a:t>
             </a:r>
           </a:p>
           <a:p>
@@ -9195,13 +11003,30 @@
             <a:pPr lvl="1"/>
             <a:r>
               <a:rPr lang="en-US" dirty="0"/>
-              <a:t>the server derives a second model that augments /templates/template/content to provide the “interfaces” list</a:t>
-            </a:r>
-          </a:p>
-          <a:p>
+              <a:t>the server derives a second model </a:t>
+            </a:r>
+            <a:r>
+              <a:rPr lang="en-US" dirty="0" smtClean="0"/>
+              <a:t>that augments </a:t>
+            </a:r>
             <a:r>
               <a:rPr lang="en-US" dirty="0"/>
-              <a:t>To a client, the template content is just another </a:t>
+              <a:t>/</a:t>
+            </a:r>
+            <a:r>
+              <a:rPr lang="en-US" dirty="0" smtClean="0"/>
+              <a:t>templates/template/content</a:t>
+            </a:r>
+          </a:p>
+          <a:p>
+            <a:pPr lvl="1"/>
+            <a:r>
+              <a:rPr lang="en-US" dirty="0" smtClean="0"/>
+              <a:t>To </a:t>
+            </a:r>
+            <a:r>
+              <a:rPr lang="en-US" dirty="0"/>
+              <a:t>a client, the template content is just another </a:t>
             </a:r>
             <a:r>
               <a:rPr lang="en-US" dirty="0" smtClean="0"/>
@@ -9217,10 +11042,13 @@
             </a:r>
           </a:p>
           <a:p>
-            <a:pPr marL="0" indent="0">
-              <a:buNone/>
-            </a:pPr>
-            <a:endParaRPr lang="en-US" dirty="0"/>
+            <a:endParaRPr lang="en-US" sz="900" dirty="0" smtClean="0"/>
+          </a:p>
+          <a:p>
+            <a:r>
+              <a:rPr lang="en-US" dirty="0" smtClean="0"/>
+              <a:t>Does the value of this option deserves such an implementation complexity?</a:t>
+            </a:r>
           </a:p>
         </p:txBody>
       </p:sp>
@@ -9229,7 +11057,7 @@
           <p:cNvPr id="5" name="Slide Number Placeholder 4">
             <a:extLst>
               <a:ext uri="{FF2B5EF4-FFF2-40B4-BE49-F238E27FC236}">
-                <a16:creationId xmlns:a16="http://schemas.microsoft.com/office/drawing/2014/main" xmlns="" id="{6B96791A-E6EC-88EA-E837-88D8FAE13C47}"/>
+                <a16:creationId xmlns="" xmlns:a16="http://schemas.microsoft.com/office/drawing/2014/main" id="{6B96791A-E6EC-88EA-E837-88D8FAE13C47}"/>
               </a:ext>
             </a:extLst>
           </p:cNvPr>
@@ -9385,7 +11213,7 @@
           <p:cNvPr id="7" name="Slide Number Placeholder 4">
             <a:extLst>
               <a:ext uri="{FF2B5EF4-FFF2-40B4-BE49-F238E27FC236}">
-                <a16:creationId xmlns:a16="http://schemas.microsoft.com/office/drawing/2014/main" xmlns="" id="{3EE13A6B-CD5C-2B6B-7266-342C4EAFD494}"/>
+                <a16:creationId xmlns="" xmlns:a16="http://schemas.microsoft.com/office/drawing/2014/main" id="{3EE13A6B-CD5C-2B6B-7266-342C4EAFD494}"/>
               </a:ext>
             </a:extLst>
           </p:cNvPr>
